--- a/exports/pptx/lessons/middle-module-15-project-implementation/day-08-document.pptx
+++ b/exports/pptx/lessons/middle-module-15-project-implementation/day-08-document.pptx
@@ -4537,7 +4537,297 @@
         </p:nvSpPr>
         <p:spPr>
           <a:xfrm>
-            <a:off x="634901" y="3844677"/>
+            <a:off x="406301" y="2140446"/>
+            <a:ext cx="8498026" cy="213271"/>
+          </a:xfrm>
+          <a:prstGeom prst="rect">
+            <a:avLst/>
+          </a:prstGeom>
+          <a:noFill/>
+          <a:ln/>
+        </p:spPr>
+        <p:txBody>
+          <a:bodyPr wrap="square" lIns="0" tIns="0" rIns="0" bIns="0" rtlCol="0" anchor="t"/>
+          <a:lstStyle/>
+          <a:p>
+            <a:pPr algn="l" indent="0" marL="0">
+              <a:lnSpc>
+                <a:spcPts val="1680"/>
+              </a:lnSpc>
+              <a:spcBef>
+                <a:spcPts val="300"/>
+              </a:spcBef>
+              <a:spcAft>
+                <a:spcPts val="300"/>
+              </a:spcAft>
+              <a:buNone/>
+            </a:pPr>
+            <a:r>
+              <a:rPr lang="en-US" sz="1200" i="1" dirty="0">
+                <a:solidFill>
+                  <a:srgbClr val="1C2833"/>
+                </a:solidFill>
+                <a:latin typeface="Arial" pitchFamily="34" charset="0"/>
+                <a:ea typeface="Arial" pitchFamily="34" charset="-122"/>
+                <a:cs typeface="Arial" pitchFamily="34" charset="-120"/>
+              </a:rPr>
+              <a:t>Each row: Section · Length · What goes here.</a:t>
+            </a:r>
+            <a:endParaRPr lang="en-US" sz="1200" dirty="0"/>
+          </a:p>
+        </p:txBody>
+      </p:sp>
+      <p:sp>
+        <p:nvSpPr>
+          <p:cNvPr id="8" name="Text 6"/>
+          <p:cNvSpPr/>
+          <p:nvPr/>
+        </p:nvSpPr>
+        <p:spPr>
+          <a:xfrm>
+            <a:off x="634901" y="2442567"/>
+            <a:ext cx="8102798" cy="1257002"/>
+          </a:xfrm>
+          <a:prstGeom prst="rect">
+            <a:avLst/>
+          </a:prstGeom>
+          <a:noFill/>
+          <a:ln/>
+        </p:spPr>
+        <p:txBody>
+          <a:bodyPr wrap="square" lIns="0" tIns="0" rIns="0" bIns="0" rtlCol="0" anchor="t"/>
+          <a:lstStyle/>
+          <a:p>
+            <a:pPr algn="l" marL="342900" indent="-342900">
+              <a:lnSpc>
+                <a:spcPts val="1620"/>
+              </a:lnSpc>
+              <a:spcAft>
+                <a:spcPts val="300"/>
+              </a:spcAft>
+              <a:buSzPct val="100000"/>
+              <a:buChar char="•"/>
+            </a:pPr>
+            <a:r>
+              <a:rPr lang="en-US" sz="1200" b="1" dirty="0">
+                <a:solidFill>
+                  <a:srgbClr val="1C2833"/>
+                </a:solidFill>
+                <a:latin typeface="Arial" pitchFamily="34" charset="0"/>
+                <a:ea typeface="Arial" pitchFamily="34" charset="-122"/>
+                <a:cs typeface="Arial" pitchFamily="34" charset="-120"/>
+              </a:rPr>
+              <a:t>1. The question</a:t>
+            </a:r>
+            <a:pPr algn="l" indent="0" marL="0">
+              <a:lnSpc>
+                <a:spcPts val="1620"/>
+              </a:lnSpc>
+              <a:spcAft>
+                <a:spcPts val="300"/>
+              </a:spcAft>
+              <a:buNone/>
+            </a:pPr>
+            <a:r>
+              <a:rPr lang="en-US" sz="1200" dirty="0">
+                <a:solidFill>
+                  <a:srgbClr val="1C2833"/>
+                </a:solidFill>
+                <a:latin typeface="Arial" pitchFamily="34" charset="0"/>
+                <a:ea typeface="Arial" pitchFamily="34" charset="-122"/>
+                <a:cs typeface="Arial" pitchFamily="34" charset="-120"/>
+              </a:rPr>
+              <a:t> — 1–2 sentences · The driving question you set on Day 2 (and how, if at all, it changed)</a:t>
+            </a:r>
+            <a:endParaRPr lang="en-US" sz="1200" dirty="0"/>
+          </a:p>
+          <a:p>
+            <a:pPr algn="l" marL="342900" indent="-342900">
+              <a:lnSpc>
+                <a:spcPts val="1620"/>
+              </a:lnSpc>
+              <a:spcAft>
+                <a:spcPts val="300"/>
+              </a:spcAft>
+              <a:buSzPct val="100000"/>
+              <a:buChar char="•"/>
+            </a:pPr>
+            <a:r>
+              <a:rPr lang="en-US" sz="1200" b="1" dirty="0">
+                <a:solidFill>
+                  <a:srgbClr val="1C2833"/>
+                </a:solidFill>
+                <a:latin typeface="Arial" pitchFamily="34" charset="0"/>
+                <a:ea typeface="Arial" pitchFamily="34" charset="-122"/>
+                <a:cs typeface="Arial" pitchFamily="34" charset="-120"/>
+              </a:rPr>
+              <a:t>2. The process</a:t>
+            </a:r>
+            <a:pPr algn="l" indent="0" marL="0">
+              <a:lnSpc>
+                <a:spcPts val="1620"/>
+              </a:lnSpc>
+              <a:spcAft>
+                <a:spcPts val="300"/>
+              </a:spcAft>
+              <a:buNone/>
+            </a:pPr>
+            <a:r>
+              <a:rPr lang="en-US" sz="1200" dirty="0">
+                <a:solidFill>
+                  <a:srgbClr val="1C2833"/>
+                </a:solidFill>
+                <a:latin typeface="Arial" pitchFamily="34" charset="0"/>
+                <a:ea typeface="Arial" pitchFamily="34" charset="-122"/>
+                <a:cs typeface="Arial" pitchFamily="34" charset="-120"/>
+              </a:rPr>
+              <a:t> — 1 paragraph · A short narrative of Days 1–7 — what you did, in order</a:t>
+            </a:r>
+            <a:endParaRPr lang="en-US" sz="1200" dirty="0"/>
+          </a:p>
+          <a:p>
+            <a:pPr algn="l" marL="342900" indent="-342900">
+              <a:lnSpc>
+                <a:spcPts val="1620"/>
+              </a:lnSpc>
+              <a:spcAft>
+                <a:spcPts val="300"/>
+              </a:spcAft>
+              <a:buSzPct val="100000"/>
+              <a:buChar char="•"/>
+            </a:pPr>
+            <a:r>
+              <a:rPr lang="en-US" sz="1200" b="1" dirty="0">
+                <a:solidFill>
+                  <a:srgbClr val="1C2833"/>
+                </a:solidFill>
+                <a:latin typeface="Arial" pitchFamily="34" charset="0"/>
+                <a:ea typeface="Arial" pitchFamily="34" charset="-122"/>
+                <a:cs typeface="Arial" pitchFamily="34" charset="-120"/>
+              </a:rPr>
+              <a:t>3. The sources</a:t>
+            </a:r>
+            <a:pPr algn="l" indent="0" marL="0">
+              <a:lnSpc>
+                <a:spcPts val="1620"/>
+              </a:lnSpc>
+              <a:spcAft>
+                <a:spcPts val="300"/>
+              </a:spcAft>
+              <a:buNone/>
+            </a:pPr>
+            <a:r>
+              <a:rPr lang="en-US" sz="1200" dirty="0">
+                <a:solidFill>
+                  <a:srgbClr val="1C2833"/>
+                </a:solidFill>
+                <a:latin typeface="Arial" pitchFamily="34" charset="0"/>
+                <a:ea typeface="Arial" pitchFamily="34" charset="-122"/>
+                <a:cs typeface="Arial" pitchFamily="34" charset="-120"/>
+              </a:rPr>
+              <a:t> — 3–5 bullets · Each source with its identifier, what it contributed</a:t>
+            </a:r>
+            <a:endParaRPr lang="en-US" sz="1200" dirty="0"/>
+          </a:p>
+          <a:p>
+            <a:pPr algn="l" marL="342900" indent="-342900">
+              <a:lnSpc>
+                <a:spcPts val="1620"/>
+              </a:lnSpc>
+              <a:spcAft>
+                <a:spcPts val="300"/>
+              </a:spcAft>
+              <a:buSzPct val="100000"/>
+              <a:buChar char="•"/>
+            </a:pPr>
+            <a:r>
+              <a:rPr lang="en-US" sz="1200" b="1" dirty="0">
+                <a:solidFill>
+                  <a:srgbClr val="1C2833"/>
+                </a:solidFill>
+                <a:latin typeface="Arial" pitchFamily="34" charset="0"/>
+                <a:ea typeface="Arial" pitchFamily="34" charset="-122"/>
+                <a:cs typeface="Arial" pitchFamily="34" charset="-120"/>
+              </a:rPr>
+              <a:t>4. The artefact</a:t>
+            </a:r>
+            <a:pPr algn="l" indent="0" marL="0">
+              <a:lnSpc>
+                <a:spcPts val="1620"/>
+              </a:lnSpc>
+              <a:spcAft>
+                <a:spcPts val="300"/>
+              </a:spcAft>
+              <a:buNone/>
+            </a:pPr>
+            <a:r>
+              <a:rPr lang="en-US" sz="1200" dirty="0">
+                <a:solidFill>
+                  <a:srgbClr val="1C2833"/>
+                </a:solidFill>
+                <a:latin typeface="Arial" pitchFamily="34" charset="0"/>
+                <a:ea typeface="Arial" pitchFamily="34" charset="-122"/>
+                <a:cs typeface="Arial" pitchFamily="34" charset="-120"/>
+              </a:rPr>
+              <a:t> — 1 paragraph · What the final artefact is, in plain language, including its dimensions / format</a:t>
+            </a:r>
+            <a:endParaRPr lang="en-US" sz="1200" dirty="0"/>
+          </a:p>
+          <a:p>
+            <a:pPr algn="l" marL="342900" indent="-342900">
+              <a:lnSpc>
+                <a:spcPts val="1620"/>
+              </a:lnSpc>
+              <a:spcAft>
+                <a:spcPts val="300"/>
+              </a:spcAft>
+              <a:buSzPct val="100000"/>
+              <a:buChar char="•"/>
+            </a:pPr>
+            <a:r>
+              <a:rPr lang="en-US" sz="1200" b="1" dirty="0">
+                <a:solidFill>
+                  <a:srgbClr val="1C2833"/>
+                </a:solidFill>
+                <a:latin typeface="Arial" pitchFamily="34" charset="0"/>
+                <a:ea typeface="Arial" pitchFamily="34" charset="-122"/>
+                <a:cs typeface="Arial" pitchFamily="34" charset="-120"/>
+              </a:rPr>
+              <a:t>5. The reflection</a:t>
+            </a:r>
+            <a:pPr algn="l" indent="0" marL="0">
+              <a:lnSpc>
+                <a:spcPts val="1620"/>
+              </a:lnSpc>
+              <a:spcAft>
+                <a:spcPts val="300"/>
+              </a:spcAft>
+              <a:buNone/>
+            </a:pPr>
+            <a:r>
+              <a:rPr lang="en-US" sz="1200" dirty="0">
+                <a:solidFill>
+                  <a:srgbClr val="1C2833"/>
+                </a:solidFill>
+                <a:latin typeface="Arial" pitchFamily="34" charset="0"/>
+                <a:ea typeface="Arial" pitchFamily="34" charset="-122"/>
+                <a:cs typeface="Arial" pitchFamily="34" charset="-120"/>
+              </a:rPr>
+              <a:t> — 1 paragraph · What worked, what didn't, what you'd do with three more days</a:t>
+            </a:r>
+            <a:endParaRPr lang="en-US" sz="1200" dirty="0"/>
+          </a:p>
+        </p:txBody>
+      </p:sp>
+      <p:sp>
+        <p:nvSpPr>
+          <p:cNvPr id="9" name="Text 7"/>
+          <p:cNvSpPr/>
+          <p:nvPr/>
+        </p:nvSpPr>
+        <p:spPr>
+          <a:xfrm>
+            <a:off x="634901" y="3801070"/>
             <a:ext cx="8102798" cy="898922"/>
           </a:xfrm>
           <a:prstGeom prst="rect">
@@ -4717,13 +5007,13 @@
       </p:sp>
       <p:sp>
         <p:nvSpPr>
-          <p:cNvPr id="8" name="Text 6"/>
+          <p:cNvPr id="10" name="Text 8"/>
           <p:cNvSpPr/>
           <p:nvPr/>
         </p:nvSpPr>
         <p:spPr>
           <a:xfrm>
-            <a:off x="406301" y="4908649"/>
+            <a:off x="406301" y="4865043"/>
             <a:ext cx="8498026" cy="213271"/>
           </a:xfrm>
           <a:prstGeom prst="rect">

--- a/exports/pptx/lessons/middle-module-15-project-implementation/day-08-document.pptx
+++ b/exports/pptx/lessons/middle-module-15-project-implementation/day-08-document.pptx
@@ -17,9 +17,14 @@
     <p:sldId id="265" r:id="rId11"/>
     <p:sldId id="266" r:id="rId12"/>
     <p:sldId id="267" r:id="rId13"/>
+    <p:sldId id="268" r:id="rId14"/>
+    <p:sldId id="269" r:id="rId15"/>
+    <p:sldId id="270" r:id="rId16"/>
+    <p:sldId id="271" r:id="rId17"/>
+    <p:sldId id="272" r:id="rId18"/>
   </p:sldIdLst>
   <p:notesMasterIdLst>
-    <p:notesMasterId r:id="rId14"/>
+    <p:notesMasterId r:id="rId19"/>
   </p:notesMasterIdLst>
   <p:sldSz cx="9144000" cy="5143500"/>
   <p:notesSz cx="5143500" cy="9144000"/>
@@ -801,6 +806,446 @@
             <a:fld id="{F7021451-1387-4CA6-816F-3879F97B5CBC}" type="slidenum">
               <a:rPr lang="en-US"/>
               <a:t>12</a:t>
+            </a:fld>
+            <a:endParaRPr lang="en-US"/>
+          </a:p>
+        </p:txBody>
+      </p:sp>
+    </p:spTree>
+    <p:extLst>
+      <p:ext uri="{BB962C8B-B14F-4D97-AF65-F5344CB8AC3E}">
+        <p14:creationId xmlns:p14="http://schemas.microsoft.com/office/powerpoint/2010/main" val="1024086991"/>
+      </p:ext>
+    </p:extLst>
+  </p:cSld>
+  <p:clrMapOvr>
+    <a:masterClrMapping/>
+  </p:clrMapOvr>
+</p:notes>
+</file>
+
+<file path=ppt/notesSlides/notesSlide13.xml><?xml version="1.0" encoding="utf-8"?>
+<p:notes xmlns:a="http://schemas.openxmlformats.org/drawingml/2006/main" xmlns:r="http://schemas.openxmlformats.org/officeDocument/2006/relationships" xmlns:p="http://schemas.openxmlformats.org/presentationml/2006/main">
+  <p:cSld>
+    <p:spTree>
+      <p:nvGrpSpPr>
+        <p:cNvPr id="1" name=""/>
+        <p:cNvGrpSpPr/>
+        <p:nvPr/>
+      </p:nvGrpSpPr>
+      <p:grpSpPr>
+        <a:xfrm>
+          <a:off x="0" y="0"/>
+          <a:ext cx="0" cy="0"/>
+          <a:chOff x="0" y="0"/>
+          <a:chExt cx="0" cy="0"/>
+        </a:xfrm>
+      </p:grpSpPr>
+      <p:sp>
+        <p:nvSpPr>
+          <p:cNvPr id="2" name="Slide Image Placeholder 1"/>
+          <p:cNvSpPr>
+            <a:spLocks noGrp="1" noRot="1" noChangeAspect="1"/>
+          </p:cNvSpPr>
+          <p:nvPr>
+            <p:ph type="sldImg"/>
+          </p:nvPr>
+        </p:nvSpPr>
+        <p:spPr/>
+      </p:sp>
+      <p:sp>
+        <p:nvSpPr>
+          <p:cNvPr id="3" name="Notes Placeholder 2"/>
+          <p:cNvSpPr>
+            <a:spLocks noGrp="1"/>
+          </p:cNvSpPr>
+          <p:nvPr>
+            <p:ph type="body" idx="1"/>
+          </p:nvPr>
+        </p:nvSpPr>
+        <p:spPr/>
+        <p:txBody>
+          <a:bodyPr/>
+          <a:lstStyle/>
+          <a:p>
+            <a:r>
+              <a:rPr lang="en-US" dirty="0"/>
+              <a:t/>
+            </a:r>
+            <a:endParaRPr lang="en-US" dirty="0"/>
+          </a:p>
+        </p:txBody>
+      </p:sp>
+      <p:sp>
+        <p:nvSpPr>
+          <p:cNvPr id="4" name="Slide Number Placeholder 3"/>
+          <p:cNvSpPr>
+            <a:spLocks noGrp="1"/>
+          </p:cNvSpPr>
+          <p:nvPr>
+            <p:ph type="sldNum" sz="quarter" idx="10"/>
+          </p:nvPr>
+        </p:nvSpPr>
+        <p:spPr/>
+        <p:txBody>
+          <a:bodyPr/>
+          <a:lstStyle/>
+          <a:p>
+            <a:fld id="{F7021451-1387-4CA6-816F-3879F97B5CBC}" type="slidenum">
+              <a:rPr lang="en-US"/>
+              <a:t>13</a:t>
+            </a:fld>
+            <a:endParaRPr lang="en-US"/>
+          </a:p>
+        </p:txBody>
+      </p:sp>
+    </p:spTree>
+    <p:extLst>
+      <p:ext uri="{BB962C8B-B14F-4D97-AF65-F5344CB8AC3E}">
+        <p14:creationId xmlns:p14="http://schemas.microsoft.com/office/powerpoint/2010/main" val="1024086991"/>
+      </p:ext>
+    </p:extLst>
+  </p:cSld>
+  <p:clrMapOvr>
+    <a:masterClrMapping/>
+  </p:clrMapOvr>
+</p:notes>
+</file>
+
+<file path=ppt/notesSlides/notesSlide14.xml><?xml version="1.0" encoding="utf-8"?>
+<p:notes xmlns:a="http://schemas.openxmlformats.org/drawingml/2006/main" xmlns:r="http://schemas.openxmlformats.org/officeDocument/2006/relationships" xmlns:p="http://schemas.openxmlformats.org/presentationml/2006/main">
+  <p:cSld>
+    <p:spTree>
+      <p:nvGrpSpPr>
+        <p:cNvPr id="1" name=""/>
+        <p:cNvGrpSpPr/>
+        <p:nvPr/>
+      </p:nvGrpSpPr>
+      <p:grpSpPr>
+        <a:xfrm>
+          <a:off x="0" y="0"/>
+          <a:ext cx="0" cy="0"/>
+          <a:chOff x="0" y="0"/>
+          <a:chExt cx="0" cy="0"/>
+        </a:xfrm>
+      </p:grpSpPr>
+      <p:sp>
+        <p:nvSpPr>
+          <p:cNvPr id="2" name="Slide Image Placeholder 1"/>
+          <p:cNvSpPr>
+            <a:spLocks noGrp="1" noRot="1" noChangeAspect="1"/>
+          </p:cNvSpPr>
+          <p:nvPr>
+            <p:ph type="sldImg"/>
+          </p:nvPr>
+        </p:nvSpPr>
+        <p:spPr/>
+      </p:sp>
+      <p:sp>
+        <p:nvSpPr>
+          <p:cNvPr id="3" name="Notes Placeholder 2"/>
+          <p:cNvSpPr>
+            <a:spLocks noGrp="1"/>
+          </p:cNvSpPr>
+          <p:nvPr>
+            <p:ph type="body" idx="1"/>
+          </p:nvPr>
+        </p:nvSpPr>
+        <p:spPr/>
+        <p:txBody>
+          <a:bodyPr/>
+          <a:lstStyle/>
+          <a:p>
+            <a:r>
+              <a:rPr lang="en-US" dirty="0"/>
+              <a:t/>
+            </a:r>
+            <a:endParaRPr lang="en-US" dirty="0"/>
+          </a:p>
+        </p:txBody>
+      </p:sp>
+      <p:sp>
+        <p:nvSpPr>
+          <p:cNvPr id="4" name="Slide Number Placeholder 3"/>
+          <p:cNvSpPr>
+            <a:spLocks noGrp="1"/>
+          </p:cNvSpPr>
+          <p:nvPr>
+            <p:ph type="sldNum" sz="quarter" idx="10"/>
+          </p:nvPr>
+        </p:nvSpPr>
+        <p:spPr/>
+        <p:txBody>
+          <a:bodyPr/>
+          <a:lstStyle/>
+          <a:p>
+            <a:fld id="{F7021451-1387-4CA6-816F-3879F97B5CBC}" type="slidenum">
+              <a:rPr lang="en-US"/>
+              <a:t>14</a:t>
+            </a:fld>
+            <a:endParaRPr lang="en-US"/>
+          </a:p>
+        </p:txBody>
+      </p:sp>
+    </p:spTree>
+    <p:extLst>
+      <p:ext uri="{BB962C8B-B14F-4D97-AF65-F5344CB8AC3E}">
+        <p14:creationId xmlns:p14="http://schemas.microsoft.com/office/powerpoint/2010/main" val="1024086991"/>
+      </p:ext>
+    </p:extLst>
+  </p:cSld>
+  <p:clrMapOvr>
+    <a:masterClrMapping/>
+  </p:clrMapOvr>
+</p:notes>
+</file>
+
+<file path=ppt/notesSlides/notesSlide15.xml><?xml version="1.0" encoding="utf-8"?>
+<p:notes xmlns:a="http://schemas.openxmlformats.org/drawingml/2006/main" xmlns:r="http://schemas.openxmlformats.org/officeDocument/2006/relationships" xmlns:p="http://schemas.openxmlformats.org/presentationml/2006/main">
+  <p:cSld>
+    <p:spTree>
+      <p:nvGrpSpPr>
+        <p:cNvPr id="1" name=""/>
+        <p:cNvGrpSpPr/>
+        <p:nvPr/>
+      </p:nvGrpSpPr>
+      <p:grpSpPr>
+        <a:xfrm>
+          <a:off x="0" y="0"/>
+          <a:ext cx="0" cy="0"/>
+          <a:chOff x="0" y="0"/>
+          <a:chExt cx="0" cy="0"/>
+        </a:xfrm>
+      </p:grpSpPr>
+      <p:sp>
+        <p:nvSpPr>
+          <p:cNvPr id="2" name="Slide Image Placeholder 1"/>
+          <p:cNvSpPr>
+            <a:spLocks noGrp="1" noRot="1" noChangeAspect="1"/>
+          </p:cNvSpPr>
+          <p:nvPr>
+            <p:ph type="sldImg"/>
+          </p:nvPr>
+        </p:nvSpPr>
+        <p:spPr/>
+      </p:sp>
+      <p:sp>
+        <p:nvSpPr>
+          <p:cNvPr id="3" name="Notes Placeholder 2"/>
+          <p:cNvSpPr>
+            <a:spLocks noGrp="1"/>
+          </p:cNvSpPr>
+          <p:nvPr>
+            <p:ph type="body" idx="1"/>
+          </p:nvPr>
+        </p:nvSpPr>
+        <p:spPr/>
+        <p:txBody>
+          <a:bodyPr/>
+          <a:lstStyle/>
+          <a:p>
+            <a:r>
+              <a:rPr lang="en-US" dirty="0"/>
+              <a:t/>
+            </a:r>
+            <a:endParaRPr lang="en-US" dirty="0"/>
+          </a:p>
+        </p:txBody>
+      </p:sp>
+      <p:sp>
+        <p:nvSpPr>
+          <p:cNvPr id="4" name="Slide Number Placeholder 3"/>
+          <p:cNvSpPr>
+            <a:spLocks noGrp="1"/>
+          </p:cNvSpPr>
+          <p:nvPr>
+            <p:ph type="sldNum" sz="quarter" idx="10"/>
+          </p:nvPr>
+        </p:nvSpPr>
+        <p:spPr/>
+        <p:txBody>
+          <a:bodyPr/>
+          <a:lstStyle/>
+          <a:p>
+            <a:fld id="{F7021451-1387-4CA6-816F-3879F97B5CBC}" type="slidenum">
+              <a:rPr lang="en-US"/>
+              <a:t>15</a:t>
+            </a:fld>
+            <a:endParaRPr lang="en-US"/>
+          </a:p>
+        </p:txBody>
+      </p:sp>
+    </p:spTree>
+    <p:extLst>
+      <p:ext uri="{BB962C8B-B14F-4D97-AF65-F5344CB8AC3E}">
+        <p14:creationId xmlns:p14="http://schemas.microsoft.com/office/powerpoint/2010/main" val="1024086991"/>
+      </p:ext>
+    </p:extLst>
+  </p:cSld>
+  <p:clrMapOvr>
+    <a:masterClrMapping/>
+  </p:clrMapOvr>
+</p:notes>
+</file>
+
+<file path=ppt/notesSlides/notesSlide16.xml><?xml version="1.0" encoding="utf-8"?>
+<p:notes xmlns:a="http://schemas.openxmlformats.org/drawingml/2006/main" xmlns:r="http://schemas.openxmlformats.org/officeDocument/2006/relationships" xmlns:p="http://schemas.openxmlformats.org/presentationml/2006/main">
+  <p:cSld>
+    <p:spTree>
+      <p:nvGrpSpPr>
+        <p:cNvPr id="1" name=""/>
+        <p:cNvGrpSpPr/>
+        <p:nvPr/>
+      </p:nvGrpSpPr>
+      <p:grpSpPr>
+        <a:xfrm>
+          <a:off x="0" y="0"/>
+          <a:ext cx="0" cy="0"/>
+          <a:chOff x="0" y="0"/>
+          <a:chExt cx="0" cy="0"/>
+        </a:xfrm>
+      </p:grpSpPr>
+      <p:sp>
+        <p:nvSpPr>
+          <p:cNvPr id="2" name="Slide Image Placeholder 1"/>
+          <p:cNvSpPr>
+            <a:spLocks noGrp="1" noRot="1" noChangeAspect="1"/>
+          </p:cNvSpPr>
+          <p:nvPr>
+            <p:ph type="sldImg"/>
+          </p:nvPr>
+        </p:nvSpPr>
+        <p:spPr/>
+      </p:sp>
+      <p:sp>
+        <p:nvSpPr>
+          <p:cNvPr id="3" name="Notes Placeholder 2"/>
+          <p:cNvSpPr>
+            <a:spLocks noGrp="1"/>
+          </p:cNvSpPr>
+          <p:nvPr>
+            <p:ph type="body" idx="1"/>
+          </p:nvPr>
+        </p:nvSpPr>
+        <p:spPr/>
+        <p:txBody>
+          <a:bodyPr/>
+          <a:lstStyle/>
+          <a:p>
+            <a:r>
+              <a:rPr lang="en-US" dirty="0"/>
+              <a:t/>
+            </a:r>
+            <a:endParaRPr lang="en-US" dirty="0"/>
+          </a:p>
+        </p:txBody>
+      </p:sp>
+      <p:sp>
+        <p:nvSpPr>
+          <p:cNvPr id="4" name="Slide Number Placeholder 3"/>
+          <p:cNvSpPr>
+            <a:spLocks noGrp="1"/>
+          </p:cNvSpPr>
+          <p:nvPr>
+            <p:ph type="sldNum" sz="quarter" idx="10"/>
+          </p:nvPr>
+        </p:nvSpPr>
+        <p:spPr/>
+        <p:txBody>
+          <a:bodyPr/>
+          <a:lstStyle/>
+          <a:p>
+            <a:fld id="{F7021451-1387-4CA6-816F-3879F97B5CBC}" type="slidenum">
+              <a:rPr lang="en-US"/>
+              <a:t>16</a:t>
+            </a:fld>
+            <a:endParaRPr lang="en-US"/>
+          </a:p>
+        </p:txBody>
+      </p:sp>
+    </p:spTree>
+    <p:extLst>
+      <p:ext uri="{BB962C8B-B14F-4D97-AF65-F5344CB8AC3E}">
+        <p14:creationId xmlns:p14="http://schemas.microsoft.com/office/powerpoint/2010/main" val="1024086991"/>
+      </p:ext>
+    </p:extLst>
+  </p:cSld>
+  <p:clrMapOvr>
+    <a:masterClrMapping/>
+  </p:clrMapOvr>
+</p:notes>
+</file>
+
+<file path=ppt/notesSlides/notesSlide17.xml><?xml version="1.0" encoding="utf-8"?>
+<p:notes xmlns:a="http://schemas.openxmlformats.org/drawingml/2006/main" xmlns:r="http://schemas.openxmlformats.org/officeDocument/2006/relationships" xmlns:p="http://schemas.openxmlformats.org/presentationml/2006/main">
+  <p:cSld>
+    <p:spTree>
+      <p:nvGrpSpPr>
+        <p:cNvPr id="1" name=""/>
+        <p:cNvGrpSpPr/>
+        <p:nvPr/>
+      </p:nvGrpSpPr>
+      <p:grpSpPr>
+        <a:xfrm>
+          <a:off x="0" y="0"/>
+          <a:ext cx="0" cy="0"/>
+          <a:chOff x="0" y="0"/>
+          <a:chExt cx="0" cy="0"/>
+        </a:xfrm>
+      </p:grpSpPr>
+      <p:sp>
+        <p:nvSpPr>
+          <p:cNvPr id="2" name="Slide Image Placeholder 1"/>
+          <p:cNvSpPr>
+            <a:spLocks noGrp="1" noRot="1" noChangeAspect="1"/>
+          </p:cNvSpPr>
+          <p:nvPr>
+            <p:ph type="sldImg"/>
+          </p:nvPr>
+        </p:nvSpPr>
+        <p:spPr/>
+      </p:sp>
+      <p:sp>
+        <p:nvSpPr>
+          <p:cNvPr id="3" name="Notes Placeholder 2"/>
+          <p:cNvSpPr>
+            <a:spLocks noGrp="1"/>
+          </p:cNvSpPr>
+          <p:nvPr>
+            <p:ph type="body" idx="1"/>
+          </p:nvPr>
+        </p:nvSpPr>
+        <p:spPr/>
+        <p:txBody>
+          <a:bodyPr/>
+          <a:lstStyle/>
+          <a:p>
+            <a:r>
+              <a:rPr lang="en-US" dirty="0"/>
+              <a:t/>
+            </a:r>
+            <a:endParaRPr lang="en-US" dirty="0"/>
+          </a:p>
+        </p:txBody>
+      </p:sp>
+      <p:sp>
+        <p:nvSpPr>
+          <p:cNvPr id="4" name="Slide Number Placeholder 3"/>
+          <p:cNvSpPr>
+            <a:spLocks noGrp="1"/>
+          </p:cNvSpPr>
+          <p:nvPr>
+            <p:ph type="sldNum" sz="quarter" idx="10"/>
+          </p:nvPr>
+        </p:nvSpPr>
+        <p:spPr/>
+        <p:txBody>
+          <a:bodyPr/>
+          <a:lstStyle/>
+          <a:p>
+            <a:fld id="{F7021451-1387-4CA6-816F-3879F97B5CBC}" type="slidenum">
+              <a:rPr lang="en-US"/>
+              <a:t>17</a:t>
             </a:fld>
             <a:endParaRPr lang="en-US"/>
           </a:p>
@@ -2100,148 +2545,6 @@
         </p:nvSpPr>
         <p:spPr>
           <a:xfrm>
-            <a:off x="406301" y="1223963"/>
-            <a:ext cx="8498026" cy="274290"/>
-          </a:xfrm>
-          <a:prstGeom prst="rect">
-            <a:avLst/>
-          </a:prstGeom>
-          <a:noFill/>
-          <a:ln/>
-        </p:spPr>
-        <p:txBody>
-          <a:bodyPr wrap="square" lIns="0" tIns="0" rIns="0" bIns="0" rtlCol="0" anchor="t"/>
-          <a:lstStyle/>
-          <a:p>
-            <a:pPr algn="l" indent="0" marL="0">
-              <a:lnSpc>
-                <a:spcPts val="2160"/>
-              </a:lnSpc>
-              <a:spcBef>
-                <a:spcPts val="600"/>
-              </a:spcBef>
-              <a:spcAft>
-                <a:spcPts val="800"/>
-              </a:spcAft>
-              <a:buNone/>
-            </a:pPr>
-            <a:r>
-              <a:rPr lang="en-US" sz="1800" b="1" dirty="0">
-                <a:solidFill>
-                  <a:srgbClr val="FE4447"/>
-                </a:solidFill>
-                <a:latin typeface="Georgia" pitchFamily="34" charset="0"/>
-                <a:ea typeface="Georgia" pitchFamily="34" charset="-122"/>
-                <a:cs typeface="Georgia" pitchFamily="34" charset="-120"/>
-              </a:rPr>
-              <a:t>Learning objective</a:t>
-            </a:r>
-            <a:endParaRPr lang="en-US" sz="1800" dirty="0"/>
-          </a:p>
-        </p:txBody>
-      </p:sp>
-      <p:sp>
-        <p:nvSpPr>
-          <p:cNvPr id="6" name="Text 4"/>
-          <p:cNvSpPr/>
-          <p:nvPr/>
-        </p:nvSpPr>
-        <p:spPr>
-          <a:xfrm>
-            <a:off x="406301" y="1637854"/>
-            <a:ext cx="8498026" cy="426541"/>
-          </a:xfrm>
-          <a:prstGeom prst="rect">
-            <a:avLst/>
-          </a:prstGeom>
-          <a:noFill/>
-          <a:ln/>
-        </p:spPr>
-        <p:txBody>
-          <a:bodyPr wrap="square" lIns="0" tIns="0" rIns="0" bIns="0" rtlCol="0" anchor="t"/>
-          <a:lstStyle/>
-          <a:p>
-            <a:pPr algn="l" indent="0" marL="0">
-              <a:lnSpc>
-                <a:spcPts val="1680"/>
-              </a:lnSpc>
-              <a:spcBef>
-                <a:spcPts val="300"/>
-              </a:spcBef>
-              <a:spcAft>
-                <a:spcPts val="300"/>
-              </a:spcAft>
-              <a:buNone/>
-            </a:pPr>
-            <a:r>
-              <a:rPr lang="en-US" sz="1200" dirty="0">
-                <a:solidFill>
-                  <a:srgbClr val="1C2833"/>
-                </a:solidFill>
-                <a:latin typeface="Arial" pitchFamily="34" charset="0"/>
-                <a:ea typeface="Arial" pitchFamily="34" charset="-122"/>
-                <a:cs typeface="Arial" pitchFamily="34" charset="-120"/>
-              </a:rPr>
-              <a:t>By the end of this lesson, students will have written a </a:t>
-            </a:r>
-            <a:pPr algn="l" indent="0" marL="0">
-              <a:lnSpc>
-                <a:spcPts val="1680"/>
-              </a:lnSpc>
-              <a:spcBef>
-                <a:spcPts val="300"/>
-              </a:spcBef>
-              <a:spcAft>
-                <a:spcPts val="300"/>
-              </a:spcAft>
-              <a:buNone/>
-            </a:pPr>
-            <a:r>
-              <a:rPr lang="en-US" sz="1200" b="1" dirty="0">
-                <a:solidFill>
-                  <a:srgbClr val="1C2833"/>
-                </a:solidFill>
-                <a:latin typeface="Arial" pitchFamily="34" charset="0"/>
-                <a:ea typeface="Arial" pitchFamily="34" charset="-122"/>
-                <a:cs typeface="Arial" pitchFamily="34" charset="-120"/>
-              </a:rPr>
-              <a:t>one-to-two-page documentation</a:t>
-            </a:r>
-            <a:pPr algn="l" indent="0" marL="0">
-              <a:lnSpc>
-                <a:spcPts val="1680"/>
-              </a:lnSpc>
-              <a:spcBef>
-                <a:spcPts val="300"/>
-              </a:spcBef>
-              <a:spcAft>
-                <a:spcPts val="300"/>
-              </a:spcAft>
-              <a:buNone/>
-            </a:pPr>
-            <a:r>
-              <a:rPr lang="en-US" sz="1200" dirty="0">
-                <a:solidFill>
-                  <a:srgbClr val="1C2833"/>
-                </a:solidFill>
-                <a:latin typeface="Arial" pitchFamily="34" charset="0"/>
-                <a:ea typeface="Arial" pitchFamily="34" charset="-122"/>
-                <a:cs typeface="Arial" pitchFamily="34" charset="-120"/>
-              </a:rPr>
-              <a:t> that captures the process, the sources, the final artefact's key features, and a short honest reflection on what worked and what didn't.</a:t>
-            </a:r>
-            <a:endParaRPr lang="en-US" sz="1200" dirty="0"/>
-          </a:p>
-        </p:txBody>
-      </p:sp>
-      <p:sp>
-        <p:nvSpPr>
-          <p:cNvPr id="7" name="Text 5"/>
-          <p:cNvSpPr/>
-          <p:nvPr/>
-        </p:nvSpPr>
-        <p:spPr>
-          <a:xfrm>
             <a:off x="406301" y="4434929"/>
             <a:ext cx="8498026" cy="213271"/>
           </a:xfrm>
@@ -2386,7 +2689,7 @@
                 <a:ea typeface="Georgia" pitchFamily="34" charset="-122"/>
                 <a:cs typeface="Georgia" pitchFamily="34" charset="-120"/>
               </a:rPr>
-              <a:t>Differentiation</a:t>
+              <a:t>Activity (25 min) — Write the documentation</a:t>
             </a:r>
             <a:endParaRPr lang="en-US" sz="1800" dirty="0"/>
           </a:p>
@@ -2401,7 +2704,7 @@
         <p:spPr>
           <a:xfrm>
             <a:off x="634901" y="883593"/>
-            <a:ext cx="8102798" cy="937022"/>
+            <a:ext cx="8102798" cy="1218902"/>
           </a:xfrm>
           <a:prstGeom prst="rect">
             <a:avLst/>
@@ -2424,26 +2727,6 @@
               <a:buChar char="•"/>
             </a:pPr>
             <a:r>
-              <a:rPr lang="en-US" sz="1200" b="1" dirty="0">
-                <a:solidFill>
-                  <a:srgbClr val="1C2833"/>
-                </a:solidFill>
-                <a:latin typeface="Arial" pitchFamily="34" charset="0"/>
-                <a:ea typeface="Arial" pitchFamily="34" charset="-122"/>
-                <a:cs typeface="Arial" pitchFamily="34" charset="-120"/>
-              </a:rPr>
-              <a:t>One tier up:</a:t>
-            </a:r>
-            <a:pPr algn="l" indent="0" marL="0">
-              <a:lnSpc>
-                <a:spcPts val="1620"/>
-              </a:lnSpc>
-              <a:spcAft>
-                <a:spcPts val="300"/>
-              </a:spcAft>
-              <a:buNone/>
-            </a:pPr>
-            <a:r>
               <a:rPr lang="en-US" sz="1200" dirty="0">
                 <a:solidFill>
                   <a:srgbClr val="1C2833"/>
@@ -2452,47 +2735,7 @@
                 <a:ea typeface="Arial" pitchFamily="34" charset="-122"/>
                 <a:cs typeface="Arial" pitchFamily="34" charset="-120"/>
               </a:rPr>
-              <a:t> Add a 100-word </a:t>
-            </a:r>
-            <a:pPr algn="l" indent="0" marL="0">
-              <a:lnSpc>
-                <a:spcPts val="1620"/>
-              </a:lnSpc>
-              <a:spcAft>
-                <a:spcPts val="300"/>
-              </a:spcAft>
-              <a:buNone/>
-            </a:pPr>
-            <a:r>
-              <a:rPr lang="en-US" sz="1200" b="1" dirty="0">
-                <a:solidFill>
-                  <a:srgbClr val="1C2833"/>
-                </a:solidFill>
-                <a:latin typeface="Arial" pitchFamily="34" charset="0"/>
-                <a:ea typeface="Arial" pitchFamily="34" charset="-122"/>
-                <a:cs typeface="Arial" pitchFamily="34" charset="-120"/>
-              </a:rPr>
-              <a:t>methodology note</a:t>
-            </a:r>
-            <a:pPr algn="l" indent="0" marL="0">
-              <a:lnSpc>
-                <a:spcPts val="1620"/>
-              </a:lnSpc>
-              <a:spcAft>
-                <a:spcPts val="300"/>
-              </a:spcAft>
-              <a:buNone/>
-            </a:pPr>
-            <a:r>
-              <a:rPr lang="en-US" sz="1200" dirty="0">
-                <a:solidFill>
-                  <a:srgbClr val="1C2833"/>
-                </a:solidFill>
-                <a:latin typeface="Arial" pitchFamily="34" charset="0"/>
-                <a:ea typeface="Arial" pitchFamily="34" charset="-122"/>
-                <a:cs typeface="Arial" pitchFamily="34" charset="-120"/>
-              </a:rPr>
-              <a:t> as a sixth optional section — explain what you would measure or check more carefully in a future version. This is good practice for the Senior band's critical reflection requirement.</a:t>
+              <a:t>Silent writing. 25 minutes.</a:t>
             </a:r>
             <a:endParaRPr lang="en-US" sz="1200" dirty="0"/>
           </a:p>
@@ -2508,26 +2751,6 @@
               <a:buChar char="•"/>
             </a:pPr>
             <a:r>
-              <a:rPr lang="en-US" sz="1200" b="1" dirty="0">
-                <a:solidFill>
-                  <a:srgbClr val="1C2833"/>
-                </a:solidFill>
-                <a:latin typeface="Arial" pitchFamily="34" charset="0"/>
-                <a:ea typeface="Arial" pitchFamily="34" charset="-122"/>
-                <a:cs typeface="Arial" pitchFamily="34" charset="-120"/>
-              </a:rPr>
-              <a:t>One tier down:</a:t>
-            </a:r>
-            <a:pPr algn="l" indent="0" marL="0">
-              <a:lnSpc>
-                <a:spcPts val="1620"/>
-              </a:lnSpc>
-              <a:spcAft>
-                <a:spcPts val="300"/>
-              </a:spcAft>
-              <a:buNone/>
-            </a:pPr>
-            <a:r>
               <a:rPr lang="en-US" sz="1200" dirty="0">
                 <a:solidFill>
                   <a:srgbClr val="1C2833"/>
@@ -2536,7 +2759,95 @@
                 <a:ea typeface="Arial" pitchFamily="34" charset="-122"/>
                 <a:cs typeface="Arial" pitchFamily="34" charset="-120"/>
               </a:rPr>
-              <a:t> Use the template literally — answer each prompt in one sentence rather than a paragraph. Quality of one sentence beats vague paragraphs.</a:t>
+              <a:t>Students may consult their journal, citation slips, and artefact constantly.</a:t>
+            </a:r>
+            <a:endParaRPr lang="en-US" sz="1200" dirty="0"/>
+          </a:p>
+          <a:p>
+            <a:pPr algn="l" marL="342900" indent="-342900">
+              <a:lnSpc>
+                <a:spcPts val="1620"/>
+              </a:lnSpc>
+              <a:spcAft>
+                <a:spcPts val="300"/>
+              </a:spcAft>
+              <a:buSzPct val="100000"/>
+              <a:buChar char="•"/>
+            </a:pPr>
+            <a:r>
+              <a:rPr lang="en-US" sz="1200" dirty="0">
+                <a:solidFill>
+                  <a:srgbClr val="1C2833"/>
+                </a:solidFill>
+                <a:latin typeface="Arial" pitchFamily="34" charset="0"/>
+                <a:ea typeface="Arial" pitchFamily="34" charset="-122"/>
+                <a:cs typeface="Arial" pitchFamily="34" charset="-120"/>
+              </a:rPr>
+              <a:t>At the 15-minute mark, the teacher prompts: </a:t>
+            </a:r>
+            <a:pPr algn="l" indent="0" marL="0">
+              <a:lnSpc>
+                <a:spcPts val="1620"/>
+              </a:lnSpc>
+              <a:spcAft>
+                <a:spcPts val="300"/>
+              </a:spcAft>
+              <a:buNone/>
+            </a:pPr>
+            <a:r>
+              <a:rPr lang="en-US" sz="1200" i="1" dirty="0">
+                <a:solidFill>
+                  <a:srgbClr val="1C2833"/>
+                </a:solidFill>
+                <a:latin typeface="Arial" pitchFamily="34" charset="0"/>
+                <a:ea typeface="Arial" pitchFamily="34" charset="-122"/>
+                <a:cs typeface="Arial" pitchFamily="34" charset="-120"/>
+              </a:rPr>
+              <a:t>"You should be on Section 3 or later by now. If you're still on Section 1, condense — each section is at most one paragraph."</a:t>
+            </a:r>
+            <a:endParaRPr lang="en-US" sz="1200" dirty="0"/>
+          </a:p>
+          <a:p>
+            <a:pPr algn="l" marL="342900" indent="-342900">
+              <a:lnSpc>
+                <a:spcPts val="1620"/>
+              </a:lnSpc>
+              <a:spcAft>
+                <a:spcPts val="300"/>
+              </a:spcAft>
+              <a:buSzPct val="100000"/>
+              <a:buChar char="•"/>
+            </a:pPr>
+            <a:r>
+              <a:rPr lang="en-US" sz="1200" dirty="0">
+                <a:solidFill>
+                  <a:srgbClr val="1C2833"/>
+                </a:solidFill>
+                <a:latin typeface="Arial" pitchFamily="34" charset="0"/>
+                <a:ea typeface="Arial" pitchFamily="34" charset="-122"/>
+                <a:cs typeface="Arial" pitchFamily="34" charset="-120"/>
+              </a:rPr>
+              <a:t>At the 22-minute mark: </a:t>
+            </a:r>
+            <a:pPr algn="l" indent="0" marL="0">
+              <a:lnSpc>
+                <a:spcPts val="1620"/>
+              </a:lnSpc>
+              <a:spcAft>
+                <a:spcPts val="300"/>
+              </a:spcAft>
+              <a:buNone/>
+            </a:pPr>
+            <a:r>
+              <a:rPr lang="en-US" sz="1200" i="1" dirty="0">
+                <a:solidFill>
+                  <a:srgbClr val="1C2833"/>
+                </a:solidFill>
+                <a:latin typeface="Arial" pitchFamily="34" charset="0"/>
+                <a:ea typeface="Arial" pitchFamily="34" charset="-122"/>
+                <a:cs typeface="Arial" pitchFamily="34" charset="-120"/>
+              </a:rPr>
+              <a:t>"Three minutes left. Whatever you have is what you submit. Finish a sentence and stop."</a:t>
             </a:r>
             <a:endParaRPr lang="en-US" sz="1200" dirty="0"/>
           </a:p>
@@ -2694,7 +3005,7 @@
                 <a:ea typeface="Georgia" pitchFamily="34" charset="-122"/>
                 <a:cs typeface="Georgia" pitchFamily="34" charset="-120"/>
               </a:rPr>
-              <a:t>Teacher notes</a:t>
+              <a:t>Wrap-up (5 min)</a:t>
             </a:r>
             <a:endParaRPr lang="en-US" sz="1800" dirty="0"/>
           </a:p>
@@ -2708,8 +3019,8 @@
         </p:nvSpPr>
         <p:spPr>
           <a:xfrm>
-            <a:off x="406301" y="870942"/>
-            <a:ext cx="8498026" cy="1706166"/>
+            <a:off x="634901" y="883593"/>
+            <a:ext cx="8102798" cy="975122"/>
           </a:xfrm>
           <a:prstGeom prst="rect">
             <a:avLst/>
@@ -2721,17 +3032,15 @@
           <a:bodyPr wrap="square" lIns="0" tIns="0" rIns="0" bIns="0" rtlCol="0" anchor="t"/>
           <a:lstStyle/>
           <a:p>
-            <a:pPr algn="l" indent="0" marL="0">
-              <a:lnSpc>
-                <a:spcPts val="1680"/>
-              </a:lnSpc>
-              <a:spcBef>
-                <a:spcPts val="300"/>
-              </a:spcBef>
-              <a:spcAft>
-                <a:spcPts val="300"/>
-              </a:spcAft>
-              <a:buNone/>
+            <a:pPr algn="l" marL="342900" indent="-342900">
+              <a:lnSpc>
+                <a:spcPts val="1620"/>
+              </a:lnSpc>
+              <a:spcAft>
+                <a:spcPts val="300"/>
+              </a:spcAft>
+              <a:buSzPct val="100000"/>
+              <a:buChar char="•"/>
             </a:pPr>
             <a:r>
               <a:rPr lang="en-US" sz="1200" dirty="0">
@@ -2742,15 +3051,60 @@
                 <a:ea typeface="Arial" pitchFamily="34" charset="-122"/>
                 <a:cs typeface="Arial" pitchFamily="34" charset="-120"/>
               </a:rPr>
-              <a:t>– This is the hardest writing day of the module. Students who built well may now struggle to write about what they built. Sit with hesitant writers for 90 seconds: </a:t>
-            </a:r>
-            <a:pPr algn="l" indent="0" marL="0">
-              <a:lnSpc>
-                <a:spcPts val="1680"/>
-              </a:lnSpc>
-              <a:spcBef>
-                <a:spcPts val="300"/>
-              </a:spcBef>
+              <a:t>Hand documentation into the in-tray.</a:t>
+            </a:r>
+            <a:endParaRPr lang="en-US" sz="1200" dirty="0"/>
+          </a:p>
+          <a:p>
+            <a:pPr algn="l" marL="342900" indent="-342900">
+              <a:lnSpc>
+                <a:spcPts val="1620"/>
+              </a:lnSpc>
+              <a:spcAft>
+                <a:spcPts val="300"/>
+              </a:spcAft>
+              <a:buSzPct val="100000"/>
+              <a:buChar char="•"/>
+            </a:pPr>
+            <a:r>
+              <a:rPr lang="en-US" sz="1200" dirty="0">
+                <a:solidFill>
+                  <a:srgbClr val="1C2833"/>
+                </a:solidFill>
+                <a:latin typeface="Arial" pitchFamily="34" charset="0"/>
+                <a:ea typeface="Arial" pitchFamily="34" charset="-122"/>
+                <a:cs typeface="Arial" pitchFamily="34" charset="-120"/>
+              </a:rPr>
+              <a:t>Journal entry: "Writing this up made me realise ___ ."</a:t>
+            </a:r>
+            <a:endParaRPr lang="en-US" sz="1200" dirty="0"/>
+          </a:p>
+          <a:p>
+            <a:pPr algn="l" marL="342900" indent="-342900">
+              <a:lnSpc>
+                <a:spcPts val="1620"/>
+              </a:lnSpc>
+              <a:spcAft>
+                <a:spcPts val="300"/>
+              </a:spcAft>
+              <a:buSzPct val="100000"/>
+              <a:buChar char="•"/>
+            </a:pPr>
+            <a:r>
+              <a:rPr lang="en-US" sz="1200" dirty="0">
+                <a:solidFill>
+                  <a:srgbClr val="1C2833"/>
+                </a:solidFill>
+                <a:latin typeface="Arial" pitchFamily="34" charset="0"/>
+                <a:ea typeface="Arial" pitchFamily="34" charset="-122"/>
+                <a:cs typeface="Arial" pitchFamily="34" charset="-120"/>
+              </a:rPr>
+              <a:t>Preview Day 9: </a:t>
+            </a:r>
+            <a:pPr algn="l" indent="0" marL="0">
+              <a:lnSpc>
+                <a:spcPts val="1620"/>
+              </a:lnSpc>
               <a:spcAft>
                 <a:spcPts val="300"/>
               </a:spcAft>
@@ -2765,398 +3119,7 @@
                 <a:ea typeface="Arial" pitchFamily="34" charset="-122"/>
                 <a:cs typeface="Arial" pitchFamily="34" charset="-120"/>
               </a:rPr>
-              <a:t>"Tell me what you did Monday."</a:t>
-            </a:r>
-            <a:pPr algn="l" indent="0" marL="0">
-              <a:lnSpc>
-                <a:spcPts val="1680"/>
-              </a:lnSpc>
-              <a:spcBef>
-                <a:spcPts val="300"/>
-              </a:spcBef>
-              <a:spcAft>
-                <a:spcPts val="300"/>
-              </a:spcAft>
-              <a:buNone/>
-            </a:pPr>
-            <a:r>
-              <a:rPr lang="en-US" sz="1200" dirty="0">
-                <a:solidFill>
-                  <a:srgbClr val="1C2833"/>
-                </a:solidFill>
-                <a:latin typeface="Arial" pitchFamily="34" charset="0"/>
-                <a:ea typeface="Arial" pitchFamily="34" charset="-122"/>
-                <a:cs typeface="Arial" pitchFamily="34" charset="-120"/>
-              </a:rPr>
-              <a:t> Then </a:t>
-            </a:r>
-            <a:pPr algn="l" indent="0" marL="0">
-              <a:lnSpc>
-                <a:spcPts val="1680"/>
-              </a:lnSpc>
-              <a:spcBef>
-                <a:spcPts val="300"/>
-              </a:spcBef>
-              <a:spcAft>
-                <a:spcPts val="300"/>
-              </a:spcAft>
-              <a:buNone/>
-            </a:pPr>
-            <a:r>
-              <a:rPr lang="en-US" sz="1200" i="1" dirty="0">
-                <a:solidFill>
-                  <a:srgbClr val="1C2833"/>
-                </a:solidFill>
-                <a:latin typeface="Arial" pitchFamily="34" charset="0"/>
-                <a:ea typeface="Arial" pitchFamily="34" charset="-122"/>
-                <a:cs typeface="Arial" pitchFamily="34" charset="-120"/>
-              </a:rPr>
-              <a:t>"Now tell me Tuesday."</a:t>
-            </a:r>
-            <a:pPr algn="l" indent="0" marL="0">
-              <a:lnSpc>
-                <a:spcPts val="1680"/>
-              </a:lnSpc>
-              <a:spcBef>
-                <a:spcPts val="300"/>
-              </a:spcBef>
-              <a:spcAft>
-                <a:spcPts val="300"/>
-              </a:spcAft>
-              <a:buNone/>
-            </a:pPr>
-            <a:r>
-              <a:rPr lang="en-US" sz="1200" dirty="0">
-                <a:solidFill>
-                  <a:srgbClr val="1C2833"/>
-                </a:solidFill>
-                <a:latin typeface="Arial" pitchFamily="34" charset="0"/>
-                <a:ea typeface="Arial" pitchFamily="34" charset="-122"/>
-                <a:cs typeface="Arial" pitchFamily="34" charset="-120"/>
-              </a:rPr>
-              <a:t> Once they're talking, they can write. – Watch for Section 5 vagueness — </a:t>
-            </a:r>
-            <a:pPr algn="l" indent="0" marL="0">
-              <a:lnSpc>
-                <a:spcPts val="1680"/>
-              </a:lnSpc>
-              <a:spcBef>
-                <a:spcPts val="300"/>
-              </a:spcBef>
-              <a:spcAft>
-                <a:spcPts val="300"/>
-              </a:spcAft>
-              <a:buNone/>
-            </a:pPr>
-            <a:r>
-              <a:rPr lang="en-US" sz="1200" i="1" dirty="0">
-                <a:solidFill>
-                  <a:srgbClr val="1C2833"/>
-                </a:solidFill>
-                <a:latin typeface="Arial" pitchFamily="34" charset="0"/>
-                <a:ea typeface="Arial" pitchFamily="34" charset="-122"/>
-                <a:cs typeface="Arial" pitchFamily="34" charset="-120"/>
-              </a:rPr>
-              <a:t>"I learned a lot"</a:t>
-            </a:r>
-            <a:pPr algn="l" indent="0" marL="0">
-              <a:lnSpc>
-                <a:spcPts val="1680"/>
-              </a:lnSpc>
-              <a:spcBef>
-                <a:spcPts val="300"/>
-              </a:spcBef>
-              <a:spcAft>
-                <a:spcPts val="300"/>
-              </a:spcAft>
-              <a:buNone/>
-            </a:pPr>
-            <a:r>
-              <a:rPr lang="en-US" sz="1200" dirty="0">
-                <a:solidFill>
-                  <a:srgbClr val="1C2833"/>
-                </a:solidFill>
-                <a:latin typeface="Arial" pitchFamily="34" charset="0"/>
-                <a:ea typeface="Arial" pitchFamily="34" charset="-122"/>
-                <a:cs typeface="Arial" pitchFamily="34" charset="-120"/>
-              </a:rPr>
-              <a:t> / </a:t>
-            </a:r>
-            <a:pPr algn="l" indent="0" marL="0">
-              <a:lnSpc>
-                <a:spcPts val="1680"/>
-              </a:lnSpc>
-              <a:spcBef>
-                <a:spcPts val="300"/>
-              </a:spcBef>
-              <a:spcAft>
-                <a:spcPts val="300"/>
-              </a:spcAft>
-              <a:buNone/>
-            </a:pPr>
-            <a:r>
-              <a:rPr lang="en-US" sz="1200" i="1" dirty="0">
-                <a:solidFill>
-                  <a:srgbClr val="1C2833"/>
-                </a:solidFill>
-                <a:latin typeface="Arial" pitchFamily="34" charset="0"/>
-                <a:ea typeface="Arial" pitchFamily="34" charset="-122"/>
-                <a:cs typeface="Arial" pitchFamily="34" charset="-120"/>
-              </a:rPr>
-              <a:t>"It was fun"</a:t>
-            </a:r>
-            <a:pPr algn="l" indent="0" marL="0">
-              <a:lnSpc>
-                <a:spcPts val="1680"/>
-              </a:lnSpc>
-              <a:spcBef>
-                <a:spcPts val="300"/>
-              </a:spcBef>
-              <a:spcAft>
-                <a:spcPts val="300"/>
-              </a:spcAft>
-              <a:buNone/>
-            </a:pPr>
-            <a:r>
-              <a:rPr lang="en-US" sz="1200" dirty="0">
-                <a:solidFill>
-                  <a:srgbClr val="1C2833"/>
-                </a:solidFill>
-                <a:latin typeface="Arial" pitchFamily="34" charset="0"/>
-                <a:ea typeface="Arial" pitchFamily="34" charset="-122"/>
-                <a:cs typeface="Arial" pitchFamily="34" charset="-120"/>
-              </a:rPr>
-              <a:t>. Push: </a:t>
-            </a:r>
-            <a:pPr algn="l" indent="0" marL="0">
-              <a:lnSpc>
-                <a:spcPts val="1680"/>
-              </a:lnSpc>
-              <a:spcBef>
-                <a:spcPts val="300"/>
-              </a:spcBef>
-              <a:spcAft>
-                <a:spcPts val="300"/>
-              </a:spcAft>
-              <a:buNone/>
-            </a:pPr>
-            <a:r>
-              <a:rPr lang="en-US" sz="1200" i="1" dirty="0">
-                <a:solidFill>
-                  <a:srgbClr val="1C2833"/>
-                </a:solidFill>
-                <a:latin typeface="Arial" pitchFamily="34" charset="0"/>
-                <a:ea typeface="Arial" pitchFamily="34" charset="-122"/>
-                <a:cs typeface="Arial" pitchFamily="34" charset="-120"/>
-              </a:rPr>
-              <a:t>"Name a specific thing that worked, and why."</a:t>
-            </a:r>
-            <a:pPr algn="l" indent="0" marL="0">
-              <a:lnSpc>
-                <a:spcPts val="1680"/>
-              </a:lnSpc>
-              <a:spcBef>
-                <a:spcPts val="300"/>
-              </a:spcBef>
-              <a:spcAft>
-                <a:spcPts val="300"/>
-              </a:spcAft>
-              <a:buNone/>
-            </a:pPr>
-            <a:r>
-              <a:rPr lang="en-US" sz="1200" dirty="0">
-                <a:solidFill>
-                  <a:srgbClr val="1C2833"/>
-                </a:solidFill>
-                <a:latin typeface="Arial" pitchFamily="34" charset="0"/>
-                <a:ea typeface="Arial" pitchFamily="34" charset="-122"/>
-                <a:cs typeface="Arial" pitchFamily="34" charset="-120"/>
-              </a:rPr>
-              <a:t> – Project 8 (doṣa self-study) students have a special challenge: their </a:t>
-            </a:r>
-            <a:pPr algn="l" indent="0" marL="0">
-              <a:lnSpc>
-                <a:spcPts val="1680"/>
-              </a:lnSpc>
-              <a:spcBef>
-                <a:spcPts val="300"/>
-              </a:spcBef>
-              <a:spcAft>
-                <a:spcPts val="300"/>
-              </a:spcAft>
-              <a:buNone/>
-            </a:pPr>
-            <a:r>
-              <a:rPr lang="en-US" sz="1200" i="1" dirty="0">
-                <a:solidFill>
-                  <a:srgbClr val="1C2833"/>
-                </a:solidFill>
-                <a:latin typeface="Arial" pitchFamily="34" charset="0"/>
-                <a:ea typeface="Arial" pitchFamily="34" charset="-122"/>
-                <a:cs typeface="Arial" pitchFamily="34" charset="-120"/>
-              </a:rPr>
-              <a:t>artefact</a:t>
-            </a:r>
-            <a:pPr algn="l" indent="0" marL="0">
-              <a:lnSpc>
-                <a:spcPts val="1680"/>
-              </a:lnSpc>
-              <a:spcBef>
-                <a:spcPts val="300"/>
-              </a:spcBef>
-              <a:spcAft>
-                <a:spcPts val="300"/>
-              </a:spcAft>
-              <a:buNone/>
-            </a:pPr>
-            <a:r>
-              <a:rPr lang="en-US" sz="1200" dirty="0">
-                <a:solidFill>
-                  <a:srgbClr val="1C2833"/>
-                </a:solidFill>
-                <a:latin typeface="Arial" pitchFamily="34" charset="0"/>
-                <a:ea typeface="Arial" pitchFamily="34" charset="-122"/>
-                <a:cs typeface="Arial" pitchFamily="34" charset="-120"/>
-              </a:rPr>
-              <a:t> and </a:t>
-            </a:r>
-            <a:pPr algn="l" indent="0" marL="0">
-              <a:lnSpc>
-                <a:spcPts val="1680"/>
-              </a:lnSpc>
-              <a:spcBef>
-                <a:spcPts val="300"/>
-              </a:spcBef>
-              <a:spcAft>
-                <a:spcPts val="300"/>
-              </a:spcAft>
-              <a:buNone/>
-            </a:pPr>
-            <a:r>
-              <a:rPr lang="en-US" sz="1200" i="1" dirty="0">
-                <a:solidFill>
-                  <a:srgbClr val="1C2833"/>
-                </a:solidFill>
-                <a:latin typeface="Arial" pitchFamily="34" charset="0"/>
-                <a:ea typeface="Arial" pitchFamily="34" charset="-122"/>
-                <a:cs typeface="Arial" pitchFamily="34" charset="-120"/>
-              </a:rPr>
-              <a:t>documentation</a:t>
-            </a:r>
-            <a:pPr algn="l" indent="0" marL="0">
-              <a:lnSpc>
-                <a:spcPts val="1680"/>
-              </a:lnSpc>
-              <a:spcBef>
-                <a:spcPts val="300"/>
-              </a:spcBef>
-              <a:spcAft>
-                <a:spcPts val="300"/>
-              </a:spcAft>
-              <a:buNone/>
-            </a:pPr>
-            <a:r>
-              <a:rPr lang="en-US" sz="1200" dirty="0">
-                <a:solidFill>
-                  <a:srgbClr val="1C2833"/>
-                </a:solidFill>
-                <a:latin typeface="Arial" pitchFamily="34" charset="0"/>
-                <a:ea typeface="Arial" pitchFamily="34" charset="-122"/>
-                <a:cs typeface="Arial" pitchFamily="34" charset="-120"/>
-              </a:rPr>
-              <a:t> overlap heavily because the journal is the artefact. For them, Section 4 explains the </a:t>
-            </a:r>
-            <a:pPr algn="l" indent="0" marL="0">
-              <a:lnSpc>
-                <a:spcPts val="1680"/>
-              </a:lnSpc>
-              <a:spcBef>
-                <a:spcPts val="300"/>
-              </a:spcBef>
-              <a:spcAft>
-                <a:spcPts val="300"/>
-              </a:spcAft>
-              <a:buNone/>
-            </a:pPr>
-            <a:r>
-              <a:rPr lang="en-US" sz="1200" i="1" dirty="0">
-                <a:solidFill>
-                  <a:srgbClr val="1C2833"/>
-                </a:solidFill>
-                <a:latin typeface="Arial" pitchFamily="34" charset="0"/>
-                <a:ea typeface="Arial" pitchFamily="34" charset="-122"/>
-                <a:cs typeface="Arial" pitchFamily="34" charset="-120"/>
-              </a:rPr>
-              <a:t>format</a:t>
-            </a:r>
-            <a:pPr algn="l" indent="0" marL="0">
-              <a:lnSpc>
-                <a:spcPts val="1680"/>
-              </a:lnSpc>
-              <a:spcBef>
-                <a:spcPts val="300"/>
-              </a:spcBef>
-              <a:spcAft>
-                <a:spcPts val="300"/>
-              </a:spcAft>
-              <a:buNone/>
-            </a:pPr>
-            <a:r>
-              <a:rPr lang="en-US" sz="1200" dirty="0">
-                <a:solidFill>
-                  <a:srgbClr val="1C2833"/>
-                </a:solidFill>
-                <a:latin typeface="Arial" pitchFamily="34" charset="0"/>
-                <a:ea typeface="Arial" pitchFamily="34" charset="-122"/>
-                <a:cs typeface="Arial" pitchFamily="34" charset="-120"/>
-              </a:rPr>
-              <a:t> of the self-study (e.g. "a 7-day chart with 6 columns: date, sleep hours, appetite, mood, weather, observation"), and Section 5 reflects on what observation patterns they noticed </a:t>
-            </a:r>
-            <a:pPr algn="l" indent="0" marL="0">
-              <a:lnSpc>
-                <a:spcPts val="1680"/>
-              </a:lnSpc>
-              <a:spcBef>
-                <a:spcPts val="300"/>
-              </a:spcBef>
-              <a:spcAft>
-                <a:spcPts val="300"/>
-              </a:spcAft>
-              <a:buNone/>
-            </a:pPr>
-            <a:r>
-              <a:rPr lang="en-US" sz="1200" i="1" dirty="0">
-                <a:solidFill>
-                  <a:srgbClr val="1C2833"/>
-                </a:solidFill>
-                <a:latin typeface="Arial" pitchFamily="34" charset="0"/>
-                <a:ea typeface="Arial" pitchFamily="34" charset="-122"/>
-                <a:cs typeface="Arial" pitchFamily="34" charset="-120"/>
-              </a:rPr>
-              <a:t>without diagnosing themselves</a:t>
-            </a:r>
-            <a:pPr algn="l" indent="0" marL="0">
-              <a:lnSpc>
-                <a:spcPts val="1680"/>
-              </a:lnSpc>
-              <a:spcBef>
-                <a:spcPts val="300"/>
-              </a:spcBef>
-              <a:spcAft>
-                <a:spcPts val="300"/>
-              </a:spcAft>
-              <a:buNone/>
-            </a:pPr>
-            <a:r>
-              <a:rPr lang="en-US" sz="1200" dirty="0">
-                <a:solidFill>
-                  <a:srgbClr val="1C2833"/>
-                </a:solidFill>
-                <a:latin typeface="Arial" pitchFamily="34" charset="0"/>
-                <a:ea typeface="Arial" pitchFamily="34" charset="-122"/>
-                <a:cs typeface="Arial" pitchFamily="34" charset="-120"/>
-              </a:rPr>
-              <a:t>. – Photograph each artefact + documentation pair into a single file per student. This is your marking record.</a:t>
+              <a:t>"Tomorrow you rehearse your share. Bring the artefact and your documentation. You'll get one full run-through with peer feedback."</a:t>
             </a:r>
             <a:endParaRPr lang="en-US" sz="1200" dirty="0"/>
           </a:p>
@@ -3314,7 +3277,7 @@
                 <a:ea typeface="Georgia" pitchFamily="34" charset="-122"/>
                 <a:cs typeface="Georgia" pitchFamily="34" charset="-120"/>
               </a:rPr>
-              <a:t>Citation(s) used in this lesson</a:t>
+              <a:t>Student-facing content</a:t>
             </a:r>
             <a:endParaRPr lang="en-US" sz="1800" dirty="0"/>
           </a:p>
@@ -3328,8 +3291,61 @@
         </p:nvSpPr>
         <p:spPr>
           <a:xfrm>
-            <a:off x="406301" y="870942"/>
-            <a:ext cx="8498026" cy="426541"/>
+            <a:off x="406301" y="883593"/>
+            <a:ext cx="8331398" cy="2726531"/>
+          </a:xfrm>
+          <a:prstGeom prst="rect">
+            <a:avLst/>
+          </a:prstGeom>
+          <a:solidFill>
+            <a:srgbClr val="F4F8F9"/>
+          </a:solidFill>
+          <a:ln/>
+        </p:spPr>
+        <p:txBody>
+          <a:bodyPr wrap="square" rtlCol="0" anchor="ctr"/>
+          <a:lstStyle/>
+          <a:p>
+            <a:pPr indent="0" marL="0">
+              <a:buNone/>
+            </a:pPr>
+            <a:endParaRPr lang="en-US" dirty="0"/>
+          </a:p>
+        </p:txBody>
+      </p:sp>
+      <p:sp>
+        <p:nvSpPr>
+          <p:cNvPr id="5" name="Shape 3"/>
+          <p:cNvSpPr/>
+          <p:nvPr/>
+        </p:nvSpPr>
+        <p:spPr>
+          <a:xfrm>
+            <a:off x="434876" y="883593"/>
+            <a:ext cx="0" cy="2726531"/>
+          </a:xfrm>
+          <a:prstGeom prst="line">
+            <a:avLst/>
+          </a:prstGeom>
+          <a:noFill/>
+          <a:ln w="57150">
+            <a:solidFill>
+              <a:srgbClr val="FE4447"/>
+            </a:solidFill>
+            <a:prstDash val="solid"/>
+          </a:ln>
+        </p:spPr>
+      </p:sp>
+      <p:sp>
+        <p:nvSpPr>
+          <p:cNvPr id="6" name="Text 4"/>
+          <p:cNvSpPr/>
+          <p:nvPr/>
+        </p:nvSpPr>
+        <p:spPr>
+          <a:xfrm>
+            <a:off x="692051" y="1074093"/>
+            <a:ext cx="7973389" cy="230981"/>
           </a:xfrm>
           <a:prstGeom prst="rect">
             <a:avLst/>
@@ -3343,6 +3359,528 @@
           <a:p>
             <a:pPr algn="l" indent="0" marL="0">
               <a:lnSpc>
+                <a:spcPts val="1820"/>
+              </a:lnSpc>
+              <a:spcBef>
+                <a:spcPts val="300"/>
+              </a:spcBef>
+              <a:spcAft>
+                <a:spcPts val="300"/>
+              </a:spcAft>
+              <a:buNone/>
+            </a:pPr>
+            <a:r>
+              <a:rPr lang="en-US" sz="1300" b="1" i="1" dirty="0">
+                <a:solidFill>
+                  <a:srgbClr val="1C2833"/>
+                </a:solidFill>
+                <a:latin typeface="Georgia" pitchFamily="34" charset="0"/>
+                <a:ea typeface="Georgia" pitchFamily="34" charset="-122"/>
+                <a:cs typeface="Georgia" pitchFamily="34" charset="-120"/>
+              </a:rPr>
+              <a:t>Today you write the project up.</a:t>
+            </a:r>
+            <a:endParaRPr lang="en-US" sz="1300" dirty="0"/>
+          </a:p>
+        </p:txBody>
+      </p:sp>
+      <p:sp>
+        <p:nvSpPr>
+          <p:cNvPr id="7" name="Text 5"/>
+          <p:cNvSpPr/>
+          <p:nvPr/>
+        </p:nvSpPr>
+        <p:spPr>
+          <a:xfrm>
+            <a:off x="692051" y="1343174"/>
+            <a:ext cx="7973389" cy="230981"/>
+          </a:xfrm>
+          <a:prstGeom prst="rect">
+            <a:avLst/>
+          </a:prstGeom>
+          <a:noFill/>
+          <a:ln/>
+        </p:spPr>
+        <p:txBody>
+          <a:bodyPr wrap="square" lIns="0" tIns="0" rIns="0" bIns="0" rtlCol="0" anchor="t"/>
+          <a:lstStyle/>
+          <a:p>
+            <a:pPr algn="l" indent="0" marL="0">
+              <a:lnSpc>
+                <a:spcPts val="1820"/>
+              </a:lnSpc>
+              <a:spcBef>
+                <a:spcPts val="300"/>
+              </a:spcBef>
+              <a:spcAft>
+                <a:spcPts val="300"/>
+              </a:spcAft>
+              <a:buNone/>
+            </a:pPr>
+            <a:r>
+              <a:rPr lang="en-US" sz="1300" i="1" dirty="0">
+                <a:solidFill>
+                  <a:srgbClr val="1C2833"/>
+                </a:solidFill>
+                <a:latin typeface="Georgia" pitchFamily="34" charset="0"/>
+                <a:ea typeface="Georgia" pitchFamily="34" charset="-122"/>
+                <a:cs typeface="Georgia" pitchFamily="34" charset="-120"/>
+              </a:rPr>
+              <a:t>Five sections, one paragraph each (Section 3 can be bullets):</a:t>
+            </a:r>
+            <a:endParaRPr lang="en-US" sz="1300" dirty="0"/>
+          </a:p>
+        </p:txBody>
+      </p:sp>
+      <p:sp>
+        <p:nvSpPr>
+          <p:cNvPr id="8" name="Text 6"/>
+          <p:cNvSpPr/>
+          <p:nvPr/>
+        </p:nvSpPr>
+        <p:spPr>
+          <a:xfrm>
+            <a:off x="692051" y="1612255"/>
+            <a:ext cx="7973389" cy="230981"/>
+          </a:xfrm>
+          <a:prstGeom prst="rect">
+            <a:avLst/>
+          </a:prstGeom>
+          <a:noFill/>
+          <a:ln/>
+        </p:spPr>
+        <p:txBody>
+          <a:bodyPr wrap="square" lIns="0" tIns="0" rIns="0" bIns="0" rtlCol="0" anchor="t"/>
+          <a:lstStyle/>
+          <a:p>
+            <a:pPr algn="l" indent="0" marL="0">
+              <a:lnSpc>
+                <a:spcPts val="1820"/>
+              </a:lnSpc>
+              <a:spcBef>
+                <a:spcPts val="300"/>
+              </a:spcBef>
+              <a:spcAft>
+                <a:spcPts val="300"/>
+              </a:spcAft>
+              <a:buNone/>
+            </a:pPr>
+            <a:r>
+              <a:rPr lang="en-US" sz="1300" b="1" i="1" dirty="0">
+                <a:solidFill>
+                  <a:srgbClr val="1C2833"/>
+                </a:solidFill>
+                <a:latin typeface="Georgia" pitchFamily="34" charset="0"/>
+                <a:ea typeface="Georgia" pitchFamily="34" charset="-122"/>
+                <a:cs typeface="Georgia" pitchFamily="34" charset="-120"/>
+              </a:rPr>
+              <a:t>The question.</a:t>
+            </a:r>
+            <a:pPr algn="l" indent="0" marL="0">
+              <a:lnSpc>
+                <a:spcPts val="1820"/>
+              </a:lnSpc>
+              <a:spcBef>
+                <a:spcPts val="300"/>
+              </a:spcBef>
+              <a:spcAft>
+                <a:spcPts val="300"/>
+              </a:spcAft>
+              <a:buNone/>
+            </a:pPr>
+            <a:r>
+              <a:rPr lang="en-US" sz="1300" dirty="0">
+                <a:solidFill>
+                  <a:srgbClr val="1C2833"/>
+                </a:solidFill>
+                <a:latin typeface="Georgia" pitchFamily="34" charset="0"/>
+                <a:ea typeface="Georgia" pitchFamily="34" charset="-122"/>
+                <a:cs typeface="Georgia" pitchFamily="34" charset="-120"/>
+              </a:rPr>
+              <a:t> What did you set out to find / make? Did the question change?</a:t>
+            </a:r>
+            <a:endParaRPr lang="en-US" sz="1300" dirty="0"/>
+          </a:p>
+        </p:txBody>
+      </p:sp>
+      <p:sp>
+        <p:nvSpPr>
+          <p:cNvPr id="9" name="Text 7"/>
+          <p:cNvSpPr/>
+          <p:nvPr/>
+        </p:nvSpPr>
+        <p:spPr>
+          <a:xfrm>
+            <a:off x="692051" y="1881336"/>
+            <a:ext cx="7973389" cy="230981"/>
+          </a:xfrm>
+          <a:prstGeom prst="rect">
+            <a:avLst/>
+          </a:prstGeom>
+          <a:noFill/>
+          <a:ln/>
+        </p:spPr>
+        <p:txBody>
+          <a:bodyPr wrap="square" lIns="0" tIns="0" rIns="0" bIns="0" rtlCol="0" anchor="t"/>
+          <a:lstStyle/>
+          <a:p>
+            <a:pPr algn="l" indent="0" marL="0">
+              <a:lnSpc>
+                <a:spcPts val="1820"/>
+              </a:lnSpc>
+              <a:spcBef>
+                <a:spcPts val="300"/>
+              </a:spcBef>
+              <a:spcAft>
+                <a:spcPts val="300"/>
+              </a:spcAft>
+              <a:buNone/>
+            </a:pPr>
+            <a:r>
+              <a:rPr lang="en-US" sz="1300" b="1" i="1" dirty="0">
+                <a:solidFill>
+                  <a:srgbClr val="1C2833"/>
+                </a:solidFill>
+                <a:latin typeface="Georgia" pitchFamily="34" charset="0"/>
+                <a:ea typeface="Georgia" pitchFamily="34" charset="-122"/>
+                <a:cs typeface="Georgia" pitchFamily="34" charset="-120"/>
+              </a:rPr>
+              <a:t>The process.</a:t>
+            </a:r>
+            <a:pPr algn="l" indent="0" marL="0">
+              <a:lnSpc>
+                <a:spcPts val="1820"/>
+              </a:lnSpc>
+              <a:spcBef>
+                <a:spcPts val="300"/>
+              </a:spcBef>
+              <a:spcAft>
+                <a:spcPts val="300"/>
+              </a:spcAft>
+              <a:buNone/>
+            </a:pPr>
+            <a:r>
+              <a:rPr lang="en-US" sz="1300" dirty="0">
+                <a:solidFill>
+                  <a:srgbClr val="1C2833"/>
+                </a:solidFill>
+                <a:latin typeface="Georgia" pitchFamily="34" charset="0"/>
+                <a:ea typeface="Georgia" pitchFamily="34" charset="-122"/>
+                <a:cs typeface="Georgia" pitchFamily="34" charset="-120"/>
+              </a:rPr>
+              <a:t> What you did across Days 1–7, in order, as a short story.</a:t>
+            </a:r>
+            <a:endParaRPr lang="en-US" sz="1300" dirty="0"/>
+          </a:p>
+        </p:txBody>
+      </p:sp>
+      <p:sp>
+        <p:nvSpPr>
+          <p:cNvPr id="10" name="Text 8"/>
+          <p:cNvSpPr/>
+          <p:nvPr/>
+        </p:nvSpPr>
+        <p:spPr>
+          <a:xfrm>
+            <a:off x="692051" y="2150418"/>
+            <a:ext cx="7973389" cy="230981"/>
+          </a:xfrm>
+          <a:prstGeom prst="rect">
+            <a:avLst/>
+          </a:prstGeom>
+          <a:noFill/>
+          <a:ln/>
+        </p:spPr>
+        <p:txBody>
+          <a:bodyPr wrap="square" lIns="0" tIns="0" rIns="0" bIns="0" rtlCol="0" anchor="t"/>
+          <a:lstStyle/>
+          <a:p>
+            <a:pPr algn="l" indent="0" marL="0">
+              <a:lnSpc>
+                <a:spcPts val="1820"/>
+              </a:lnSpc>
+              <a:spcBef>
+                <a:spcPts val="300"/>
+              </a:spcBef>
+              <a:spcAft>
+                <a:spcPts val="300"/>
+              </a:spcAft>
+              <a:buNone/>
+            </a:pPr>
+            <a:r>
+              <a:rPr lang="en-US" sz="1300" b="1" i="1" dirty="0">
+                <a:solidFill>
+                  <a:srgbClr val="1C2833"/>
+                </a:solidFill>
+                <a:latin typeface="Georgia" pitchFamily="34" charset="0"/>
+                <a:ea typeface="Georgia" pitchFamily="34" charset="-122"/>
+                <a:cs typeface="Georgia" pitchFamily="34" charset="-120"/>
+              </a:rPr>
+              <a:t>The sources.</a:t>
+            </a:r>
+            <a:pPr algn="l" indent="0" marL="0">
+              <a:lnSpc>
+                <a:spcPts val="1820"/>
+              </a:lnSpc>
+              <a:spcBef>
+                <a:spcPts val="300"/>
+              </a:spcBef>
+              <a:spcAft>
+                <a:spcPts val="300"/>
+              </a:spcAft>
+              <a:buNone/>
+            </a:pPr>
+            <a:r>
+              <a:rPr lang="en-US" sz="1300" dirty="0">
+                <a:solidFill>
+                  <a:srgbClr val="1C2833"/>
+                </a:solidFill>
+                <a:latin typeface="Georgia" pitchFamily="34" charset="0"/>
+                <a:ea typeface="Georgia" pitchFamily="34" charset="-122"/>
+                <a:cs typeface="Georgia" pitchFamily="34" charset="-120"/>
+              </a:rPr>
+              <a:t> Each source: identifier + what it contributed.</a:t>
+            </a:r>
+            <a:endParaRPr lang="en-US" sz="1300" dirty="0"/>
+          </a:p>
+        </p:txBody>
+      </p:sp>
+      <p:sp>
+        <p:nvSpPr>
+          <p:cNvPr id="11" name="Text 9"/>
+          <p:cNvSpPr/>
+          <p:nvPr/>
+        </p:nvSpPr>
+        <p:spPr>
+          <a:xfrm>
+            <a:off x="692051" y="2419499"/>
+            <a:ext cx="7973389" cy="230981"/>
+          </a:xfrm>
+          <a:prstGeom prst="rect">
+            <a:avLst/>
+          </a:prstGeom>
+          <a:noFill/>
+          <a:ln/>
+        </p:spPr>
+        <p:txBody>
+          <a:bodyPr wrap="square" lIns="0" tIns="0" rIns="0" bIns="0" rtlCol="0" anchor="t"/>
+          <a:lstStyle/>
+          <a:p>
+            <a:pPr algn="l" indent="0" marL="0">
+              <a:lnSpc>
+                <a:spcPts val="1820"/>
+              </a:lnSpc>
+              <a:spcBef>
+                <a:spcPts val="300"/>
+              </a:spcBef>
+              <a:spcAft>
+                <a:spcPts val="300"/>
+              </a:spcAft>
+              <a:buNone/>
+            </a:pPr>
+            <a:r>
+              <a:rPr lang="en-US" sz="1300" b="1" i="1" dirty="0">
+                <a:solidFill>
+                  <a:srgbClr val="1C2833"/>
+                </a:solidFill>
+                <a:latin typeface="Georgia" pitchFamily="34" charset="0"/>
+                <a:ea typeface="Georgia" pitchFamily="34" charset="-122"/>
+                <a:cs typeface="Georgia" pitchFamily="34" charset="-120"/>
+              </a:rPr>
+              <a:t>The artefact.</a:t>
+            </a:r>
+            <a:pPr algn="l" indent="0" marL="0">
+              <a:lnSpc>
+                <a:spcPts val="1820"/>
+              </a:lnSpc>
+              <a:spcBef>
+                <a:spcPts val="300"/>
+              </a:spcBef>
+              <a:spcAft>
+                <a:spcPts val="300"/>
+              </a:spcAft>
+              <a:buNone/>
+            </a:pPr>
+            <a:r>
+              <a:rPr lang="en-US" sz="1300" dirty="0">
+                <a:solidFill>
+                  <a:srgbClr val="1C2833"/>
+                </a:solidFill>
+                <a:latin typeface="Georgia" pitchFamily="34" charset="0"/>
+                <a:ea typeface="Georgia" pitchFamily="34" charset="-122"/>
+                <a:cs typeface="Georgia" pitchFamily="34" charset="-120"/>
+              </a:rPr>
+              <a:t> What the final is, in plain words — its size, format, key features.</a:t>
+            </a:r>
+            <a:endParaRPr lang="en-US" sz="1300" dirty="0"/>
+          </a:p>
+        </p:txBody>
+      </p:sp>
+      <p:sp>
+        <p:nvSpPr>
+          <p:cNvPr id="12" name="Text 10"/>
+          <p:cNvSpPr/>
+          <p:nvPr/>
+        </p:nvSpPr>
+        <p:spPr>
+          <a:xfrm>
+            <a:off x="692051" y="2688580"/>
+            <a:ext cx="7973389" cy="230981"/>
+          </a:xfrm>
+          <a:prstGeom prst="rect">
+            <a:avLst/>
+          </a:prstGeom>
+          <a:noFill/>
+          <a:ln/>
+        </p:spPr>
+        <p:txBody>
+          <a:bodyPr wrap="square" lIns="0" tIns="0" rIns="0" bIns="0" rtlCol="0" anchor="t"/>
+          <a:lstStyle/>
+          <a:p>
+            <a:pPr algn="l" indent="0" marL="0">
+              <a:lnSpc>
+                <a:spcPts val="1820"/>
+              </a:lnSpc>
+              <a:spcBef>
+                <a:spcPts val="300"/>
+              </a:spcBef>
+              <a:spcAft>
+                <a:spcPts val="300"/>
+              </a:spcAft>
+              <a:buNone/>
+            </a:pPr>
+            <a:r>
+              <a:rPr lang="en-US" sz="1300" b="1" i="1" dirty="0">
+                <a:solidFill>
+                  <a:srgbClr val="1C2833"/>
+                </a:solidFill>
+                <a:latin typeface="Georgia" pitchFamily="34" charset="0"/>
+                <a:ea typeface="Georgia" pitchFamily="34" charset="-122"/>
+                <a:cs typeface="Georgia" pitchFamily="34" charset="-120"/>
+              </a:rPr>
+              <a:t>The reflection.</a:t>
+            </a:r>
+            <a:pPr algn="l" indent="0" marL="0">
+              <a:lnSpc>
+                <a:spcPts val="1820"/>
+              </a:lnSpc>
+              <a:spcBef>
+                <a:spcPts val="300"/>
+              </a:spcBef>
+              <a:spcAft>
+                <a:spcPts val="300"/>
+              </a:spcAft>
+              <a:buNone/>
+            </a:pPr>
+            <a:r>
+              <a:rPr lang="en-US" sz="1300" dirty="0">
+                <a:solidFill>
+                  <a:srgbClr val="1C2833"/>
+                </a:solidFill>
+                <a:latin typeface="Georgia" pitchFamily="34" charset="0"/>
+                <a:ea typeface="Georgia" pitchFamily="34" charset="-122"/>
+                <a:cs typeface="Georgia" pitchFamily="34" charset="-120"/>
+              </a:rPr>
+              <a:t> What worked, what didn't, what you'd do with three more days.</a:t>
+            </a:r>
+            <a:endParaRPr lang="en-US" sz="1300" dirty="0"/>
+          </a:p>
+        </p:txBody>
+      </p:sp>
+      <p:sp>
+        <p:nvSpPr>
+          <p:cNvPr id="13" name="Text 11"/>
+          <p:cNvSpPr/>
+          <p:nvPr/>
+        </p:nvSpPr>
+        <p:spPr>
+          <a:xfrm>
+            <a:off x="692051" y="2957661"/>
+            <a:ext cx="7973389" cy="461963"/>
+          </a:xfrm>
+          <a:prstGeom prst="rect">
+            <a:avLst/>
+          </a:prstGeom>
+          <a:noFill/>
+          <a:ln/>
+        </p:spPr>
+        <p:txBody>
+          <a:bodyPr wrap="square" lIns="0" tIns="0" rIns="0" bIns="0" rtlCol="0" anchor="t"/>
+          <a:lstStyle/>
+          <a:p>
+            <a:pPr algn="l" indent="0" marL="0">
+              <a:lnSpc>
+                <a:spcPts val="1820"/>
+              </a:lnSpc>
+              <a:spcBef>
+                <a:spcPts val="300"/>
+              </a:spcBef>
+              <a:spcAft>
+                <a:spcPts val="300"/>
+              </a:spcAft>
+              <a:buNone/>
+            </a:pPr>
+            <a:r>
+              <a:rPr lang="en-US" sz="1300" b="1" i="1" dirty="0">
+                <a:solidFill>
+                  <a:srgbClr val="1C2833"/>
+                </a:solidFill>
+                <a:latin typeface="Georgia" pitchFamily="34" charset="0"/>
+                <a:ea typeface="Georgia" pitchFamily="34" charset="-122"/>
+                <a:cs typeface="Georgia" pitchFamily="34" charset="-120"/>
+              </a:rPr>
+              <a:t>The honesty rule:</a:t>
+            </a:r>
+            <a:pPr algn="l" indent="0" marL="0">
+              <a:lnSpc>
+                <a:spcPts val="1820"/>
+              </a:lnSpc>
+              <a:spcBef>
+                <a:spcPts val="300"/>
+              </a:spcBef>
+              <a:spcAft>
+                <a:spcPts val="300"/>
+              </a:spcAft>
+              <a:buNone/>
+            </a:pPr>
+            <a:r>
+              <a:rPr lang="en-US" sz="1300" dirty="0">
+                <a:solidFill>
+                  <a:srgbClr val="1C2833"/>
+                </a:solidFill>
+                <a:latin typeface="Georgia" pitchFamily="34" charset="0"/>
+                <a:ea typeface="Georgia" pitchFamily="34" charset="-122"/>
+                <a:cs typeface="Georgia" pitchFamily="34" charset="-120"/>
+              </a:rPr>
+              <a:t> Section 5 is graded for honesty. A reflection that says "everything went perfectly" loses marks. A reflection that names a specific thing that didn't work, and why, earns full marks.</a:t>
+            </a:r>
+            <a:endParaRPr lang="en-US" sz="1300" dirty="0"/>
+          </a:p>
+        </p:txBody>
+      </p:sp>
+      <p:sp>
+        <p:nvSpPr>
+          <p:cNvPr id="14" name="Text 12"/>
+          <p:cNvSpPr/>
+          <p:nvPr/>
+        </p:nvSpPr>
+        <p:spPr>
+          <a:xfrm>
+            <a:off x="406301" y="4434929"/>
+            <a:ext cx="8498026" cy="213271"/>
+          </a:xfrm>
+          <a:prstGeom prst="rect">
+            <a:avLst/>
+          </a:prstGeom>
+          <a:noFill/>
+          <a:ln/>
+        </p:spPr>
+        <p:txBody>
+          <a:bodyPr wrap="square" lIns="0" tIns="0" rIns="0" bIns="0" rtlCol="0" anchor="t"/>
+          <a:lstStyle/>
+          <a:p>
+            <a:pPr algn="l" indent="0" marL="0">
+              <a:lnSpc>
                 <a:spcPts val="1680"/>
               </a:lnSpc>
               <a:spcBef>
@@ -3362,8 +3900,277 @@
                 <a:ea typeface="Arial" pitchFamily="34" charset="-122"/>
                 <a:cs typeface="Arial" pitchFamily="34" charset="-120"/>
               </a:rPr>
-              <a:t>– The discipline of honest documentation is anchored in the curriculum's broader citation rule from Module 2 onwards: </a:t>
-            </a:r>
+              <a:t>Middle ·  · IKS Curriculum</a:t>
+            </a:r>
+            <a:endParaRPr lang="en-US" sz="1200" dirty="0"/>
+          </a:p>
+        </p:txBody>
+      </p:sp>
+    </p:spTree>
+  </p:cSld>
+  <p:clrMapOvr>
+    <a:masterClrMapping/>
+  </p:clrMapOvr>
+</p:sld>
+</file>
+
+<file path=ppt/slides/slide13.xml><?xml version="1.0" encoding="utf-8"?>
+<p:sld xmlns:a="http://schemas.openxmlformats.org/drawingml/2006/main" xmlns:r="http://schemas.openxmlformats.org/officeDocument/2006/relationships" xmlns:p="http://schemas.openxmlformats.org/presentationml/2006/main">
+  <p:cSld name="Slide 13">
+    <p:bg>
+      <p:bgPr>
+        <a:solidFill>
+          <a:srgbClr val="FFFFFF"/>
+        </a:solidFill>
+      </p:bgPr>
+    </p:bg>
+    <p:spTree>
+      <p:nvGrpSpPr>
+        <p:cNvPr id="1" name=""/>
+        <p:cNvGrpSpPr/>
+        <p:nvPr/>
+      </p:nvGrpSpPr>
+      <p:grpSpPr>
+        <a:xfrm>
+          <a:off x="0" y="0"/>
+          <a:ext cx="0" cy="0"/>
+          <a:chOff x="0" y="0"/>
+          <a:chExt cx="0" cy="0"/>
+        </a:xfrm>
+      </p:grpSpPr>
+      <p:sp>
+        <p:nvSpPr>
+          <p:cNvPr id="2" name="Text 0"/>
+          <p:cNvSpPr/>
+          <p:nvPr/>
+        </p:nvSpPr>
+        <p:spPr>
+          <a:xfrm>
+            <a:off x="0" y="0"/>
+            <a:ext cx="9144000" cy="101501"/>
+          </a:xfrm>
+          <a:prstGeom prst="rect">
+            <a:avLst/>
+          </a:prstGeom>
+          <a:solidFill>
+            <a:srgbClr val="277884"/>
+          </a:solidFill>
+          <a:ln/>
+        </p:spPr>
+        <p:txBody>
+          <a:bodyPr wrap="square" rtlCol="0" anchor="ctr"/>
+          <a:lstStyle/>
+          <a:p>
+            <a:pPr indent="0" marL="0">
+              <a:buNone/>
+            </a:pPr>
+            <a:endParaRPr lang="en-US" dirty="0"/>
+          </a:p>
+        </p:txBody>
+      </p:sp>
+      <p:sp>
+        <p:nvSpPr>
+          <p:cNvPr id="3" name="Text 1"/>
+          <p:cNvSpPr/>
+          <p:nvPr/>
+        </p:nvSpPr>
+        <p:spPr>
+          <a:xfrm>
+            <a:off x="406301" y="457051"/>
+            <a:ext cx="8498026" cy="274290"/>
+          </a:xfrm>
+          <a:prstGeom prst="rect">
+            <a:avLst/>
+          </a:prstGeom>
+          <a:noFill/>
+          <a:ln/>
+        </p:spPr>
+        <p:txBody>
+          <a:bodyPr wrap="square" lIns="0" tIns="0" rIns="0" bIns="0" rtlCol="0" anchor="t"/>
+          <a:lstStyle/>
+          <a:p>
+            <a:pPr algn="l" indent="0" marL="0">
+              <a:lnSpc>
+                <a:spcPts val="2160"/>
+              </a:lnSpc>
+              <a:spcBef>
+                <a:spcPts val="600"/>
+              </a:spcBef>
+              <a:spcAft>
+                <a:spcPts val="800"/>
+              </a:spcAft>
+              <a:buNone/>
+            </a:pPr>
+            <a:r>
+              <a:rPr lang="en-US" sz="1800" b="1" dirty="0">
+                <a:solidFill>
+                  <a:srgbClr val="FE4447"/>
+                </a:solidFill>
+                <a:latin typeface="Georgia" pitchFamily="34" charset="0"/>
+                <a:ea typeface="Georgia" pitchFamily="34" charset="-122"/>
+                <a:cs typeface="Georgia" pitchFamily="34" charset="-120"/>
+              </a:rPr>
+              <a:t>Homework</a:t>
+            </a:r>
+            <a:endParaRPr lang="en-US" sz="1800" dirty="0"/>
+          </a:p>
+        </p:txBody>
+      </p:sp>
+      <p:sp>
+        <p:nvSpPr>
+          <p:cNvPr id="4" name="Text 2"/>
+          <p:cNvSpPr/>
+          <p:nvPr/>
+        </p:nvSpPr>
+        <p:spPr>
+          <a:xfrm>
+            <a:off x="634901" y="883593"/>
+            <a:ext cx="8102798" cy="975122"/>
+          </a:xfrm>
+          <a:prstGeom prst="rect">
+            <a:avLst/>
+          </a:prstGeom>
+          <a:noFill/>
+          <a:ln/>
+        </p:spPr>
+        <p:txBody>
+          <a:bodyPr wrap="square" lIns="0" tIns="0" rIns="0" bIns="0" rtlCol="0" anchor="t"/>
+          <a:lstStyle/>
+          <a:p>
+            <a:pPr algn="l" marL="342900" indent="-342900">
+              <a:lnSpc>
+                <a:spcPts val="1620"/>
+              </a:lnSpc>
+              <a:spcAft>
+                <a:spcPts val="300"/>
+              </a:spcAft>
+              <a:buSzPct val="100000"/>
+              <a:buChar char="•"/>
+            </a:pPr>
+            <a:r>
+              <a:rPr lang="en-US" sz="1200" dirty="0">
+                <a:solidFill>
+                  <a:srgbClr val="1C2833"/>
+                </a:solidFill>
+                <a:latin typeface="Arial" pitchFamily="34" charset="0"/>
+                <a:ea typeface="Arial" pitchFamily="34" charset="-122"/>
+                <a:cs typeface="Arial" pitchFamily="34" charset="-120"/>
+              </a:rPr>
+              <a:t>Read your documentation aloud to a family member tonight. Ask: </a:t>
+            </a:r>
+            <a:pPr algn="l" indent="0" marL="0">
+              <a:lnSpc>
+                <a:spcPts val="1620"/>
+              </a:lnSpc>
+              <a:spcAft>
+                <a:spcPts val="300"/>
+              </a:spcAft>
+              <a:buNone/>
+            </a:pPr>
+            <a:r>
+              <a:rPr lang="en-US" sz="1200" i="1" dirty="0">
+                <a:solidFill>
+                  <a:srgbClr val="1C2833"/>
+                </a:solidFill>
+                <a:latin typeface="Arial" pitchFamily="34" charset="0"/>
+                <a:ea typeface="Arial" pitchFamily="34" charset="-122"/>
+                <a:cs typeface="Arial" pitchFamily="34" charset="-120"/>
+              </a:rPr>
+              <a:t>"Does this make sense to someone who wasn't in the class?"</a:t>
+            </a:r>
+            <a:pPr algn="l" indent="0" marL="0">
+              <a:lnSpc>
+                <a:spcPts val="1620"/>
+              </a:lnSpc>
+              <a:spcAft>
+                <a:spcPts val="300"/>
+              </a:spcAft>
+              <a:buNone/>
+            </a:pPr>
+            <a:r>
+              <a:rPr lang="en-US" sz="1200" dirty="0">
+                <a:solidFill>
+                  <a:srgbClr val="1C2833"/>
+                </a:solidFill>
+                <a:latin typeface="Arial" pitchFamily="34" charset="0"/>
+                <a:ea typeface="Arial" pitchFamily="34" charset="-122"/>
+                <a:cs typeface="Arial" pitchFamily="34" charset="-120"/>
+              </a:rPr>
+              <a:t> Note the answer.</a:t>
+            </a:r>
+            <a:endParaRPr lang="en-US" sz="1200" dirty="0"/>
+          </a:p>
+          <a:p>
+            <a:pPr algn="l" marL="342900" indent="-342900">
+              <a:lnSpc>
+                <a:spcPts val="1620"/>
+              </a:lnSpc>
+              <a:spcAft>
+                <a:spcPts val="300"/>
+              </a:spcAft>
+              <a:buSzPct val="100000"/>
+              <a:buChar char="•"/>
+            </a:pPr>
+            <a:r>
+              <a:rPr lang="en-US" sz="1200" dirty="0">
+                <a:solidFill>
+                  <a:srgbClr val="1C2833"/>
+                </a:solidFill>
+                <a:latin typeface="Arial" pitchFamily="34" charset="0"/>
+                <a:ea typeface="Arial" pitchFamily="34" charset="-122"/>
+                <a:cs typeface="Arial" pitchFamily="34" charset="-120"/>
+              </a:rPr>
+              <a:t>If anything didn't make sense, fix it before Day 9.</a:t>
+            </a:r>
+            <a:endParaRPr lang="en-US" sz="1200" dirty="0"/>
+          </a:p>
+          <a:p>
+            <a:pPr algn="l" marL="342900" indent="-342900">
+              <a:lnSpc>
+                <a:spcPts val="1620"/>
+              </a:lnSpc>
+              <a:spcAft>
+                <a:spcPts val="300"/>
+              </a:spcAft>
+              <a:buSzPct val="100000"/>
+              <a:buChar char="•"/>
+            </a:pPr>
+            <a:r>
+              <a:rPr lang="en-US" sz="1200" dirty="0">
+                <a:solidFill>
+                  <a:srgbClr val="1C2833"/>
+                </a:solidFill>
+                <a:latin typeface="Arial" pitchFamily="34" charset="0"/>
+                <a:ea typeface="Arial" pitchFamily="34" charset="-122"/>
+                <a:cs typeface="Arial" pitchFamily="34" charset="-120"/>
+              </a:rPr>
+              <a:t>Bring documentation + artefact tomorrow for rehearsal.</a:t>
+            </a:r>
+            <a:endParaRPr lang="en-US" sz="1200" dirty="0"/>
+          </a:p>
+        </p:txBody>
+      </p:sp>
+      <p:sp>
+        <p:nvSpPr>
+          <p:cNvPr id="5" name="Text 3"/>
+          <p:cNvSpPr/>
+          <p:nvPr/>
+        </p:nvSpPr>
+        <p:spPr>
+          <a:xfrm>
+            <a:off x="406301" y="4434929"/>
+            <a:ext cx="8498026" cy="213271"/>
+          </a:xfrm>
+          <a:prstGeom prst="rect">
+            <a:avLst/>
+          </a:prstGeom>
+          <a:noFill/>
+          <a:ln/>
+        </p:spPr>
+        <p:txBody>
+          <a:bodyPr wrap="square" lIns="0" tIns="0" rIns="0" bIns="0" rtlCol="0" anchor="t"/>
+          <a:lstStyle/>
+          <a:p>
             <a:pPr algn="l" indent="0" marL="0">
               <a:lnSpc>
                 <a:spcPts val="1680"/>
@@ -3371,6 +4178,1286 @@
               <a:spcBef>
                 <a:spcPts val="300"/>
               </a:spcBef>
+              <a:spcAft>
+                <a:spcPts val="300"/>
+              </a:spcAft>
+              <a:buNone/>
+            </a:pPr>
+            <a:r>
+              <a:rPr lang="en-US" sz="1200" dirty="0">
+                <a:solidFill>
+                  <a:srgbClr val="1C2833"/>
+                </a:solidFill>
+                <a:latin typeface="Arial" pitchFamily="34" charset="0"/>
+                <a:ea typeface="Arial" pitchFamily="34" charset="-122"/>
+                <a:cs typeface="Arial" pitchFamily="34" charset="-120"/>
+              </a:rPr>
+              <a:t>Middle ·  · IKS Curriculum</a:t>
+            </a:r>
+            <a:endParaRPr lang="en-US" sz="1200" dirty="0"/>
+          </a:p>
+        </p:txBody>
+      </p:sp>
+    </p:spTree>
+  </p:cSld>
+  <p:clrMapOvr>
+    <a:masterClrMapping/>
+  </p:clrMapOvr>
+</p:sld>
+</file>
+
+<file path=ppt/slides/slide14.xml><?xml version="1.0" encoding="utf-8"?>
+<p:sld xmlns:a="http://schemas.openxmlformats.org/drawingml/2006/main" xmlns:r="http://schemas.openxmlformats.org/officeDocument/2006/relationships" xmlns:p="http://schemas.openxmlformats.org/presentationml/2006/main">
+  <p:cSld name="Slide 14">
+    <p:bg>
+      <p:bgPr>
+        <a:solidFill>
+          <a:srgbClr val="FFFFFF"/>
+        </a:solidFill>
+      </p:bgPr>
+    </p:bg>
+    <p:spTree>
+      <p:nvGrpSpPr>
+        <p:cNvPr id="1" name=""/>
+        <p:cNvGrpSpPr/>
+        <p:nvPr/>
+      </p:nvGrpSpPr>
+      <p:grpSpPr>
+        <a:xfrm>
+          <a:off x="0" y="0"/>
+          <a:ext cx="0" cy="0"/>
+          <a:chOff x="0" y="0"/>
+          <a:chExt cx="0" cy="0"/>
+        </a:xfrm>
+      </p:grpSpPr>
+      <p:sp>
+        <p:nvSpPr>
+          <p:cNvPr id="2" name="Text 0"/>
+          <p:cNvSpPr/>
+          <p:nvPr/>
+        </p:nvSpPr>
+        <p:spPr>
+          <a:xfrm>
+            <a:off x="0" y="0"/>
+            <a:ext cx="9144000" cy="101501"/>
+          </a:xfrm>
+          <a:prstGeom prst="rect">
+            <a:avLst/>
+          </a:prstGeom>
+          <a:solidFill>
+            <a:srgbClr val="277884"/>
+          </a:solidFill>
+          <a:ln/>
+        </p:spPr>
+        <p:txBody>
+          <a:bodyPr wrap="square" rtlCol="0" anchor="ctr"/>
+          <a:lstStyle/>
+          <a:p>
+            <a:pPr indent="0" marL="0">
+              <a:buNone/>
+            </a:pPr>
+            <a:endParaRPr lang="en-US" dirty="0"/>
+          </a:p>
+        </p:txBody>
+      </p:sp>
+      <p:sp>
+        <p:nvSpPr>
+          <p:cNvPr id="3" name="Text 1"/>
+          <p:cNvSpPr/>
+          <p:nvPr/>
+        </p:nvSpPr>
+        <p:spPr>
+          <a:xfrm>
+            <a:off x="406301" y="457051"/>
+            <a:ext cx="8498026" cy="274290"/>
+          </a:xfrm>
+          <a:prstGeom prst="rect">
+            <a:avLst/>
+          </a:prstGeom>
+          <a:noFill/>
+          <a:ln/>
+        </p:spPr>
+        <p:txBody>
+          <a:bodyPr wrap="square" lIns="0" tIns="0" rIns="0" bIns="0" rtlCol="0" anchor="t"/>
+          <a:lstStyle/>
+          <a:p>
+            <a:pPr algn="l" indent="0" marL="0">
+              <a:lnSpc>
+                <a:spcPts val="2160"/>
+              </a:lnSpc>
+              <a:spcBef>
+                <a:spcPts val="600"/>
+              </a:spcBef>
+              <a:spcAft>
+                <a:spcPts val="800"/>
+              </a:spcAft>
+              <a:buNone/>
+            </a:pPr>
+            <a:r>
+              <a:rPr lang="en-US" sz="1800" b="1" dirty="0">
+                <a:solidFill>
+                  <a:srgbClr val="FE4447"/>
+                </a:solidFill>
+                <a:latin typeface="Georgia" pitchFamily="34" charset="0"/>
+                <a:ea typeface="Georgia" pitchFamily="34" charset="-122"/>
+                <a:cs typeface="Georgia" pitchFamily="34" charset="-120"/>
+              </a:rPr>
+              <a:t>Differentiation</a:t>
+            </a:r>
+            <a:endParaRPr lang="en-US" sz="1800" dirty="0"/>
+          </a:p>
+        </p:txBody>
+      </p:sp>
+      <p:sp>
+        <p:nvSpPr>
+          <p:cNvPr id="4" name="Text 2"/>
+          <p:cNvSpPr/>
+          <p:nvPr/>
+        </p:nvSpPr>
+        <p:spPr>
+          <a:xfrm>
+            <a:off x="634901" y="883593"/>
+            <a:ext cx="8102798" cy="937022"/>
+          </a:xfrm>
+          <a:prstGeom prst="rect">
+            <a:avLst/>
+          </a:prstGeom>
+          <a:noFill/>
+          <a:ln/>
+        </p:spPr>
+        <p:txBody>
+          <a:bodyPr wrap="square" lIns="0" tIns="0" rIns="0" bIns="0" rtlCol="0" anchor="t"/>
+          <a:lstStyle/>
+          <a:p>
+            <a:pPr algn="l" marL="342900" indent="-342900">
+              <a:lnSpc>
+                <a:spcPts val="1620"/>
+              </a:lnSpc>
+              <a:spcAft>
+                <a:spcPts val="300"/>
+              </a:spcAft>
+              <a:buSzPct val="100000"/>
+              <a:buChar char="•"/>
+            </a:pPr>
+            <a:r>
+              <a:rPr lang="en-US" sz="1200" b="1" dirty="0">
+                <a:solidFill>
+                  <a:srgbClr val="1C2833"/>
+                </a:solidFill>
+                <a:latin typeface="Arial" pitchFamily="34" charset="0"/>
+                <a:ea typeface="Arial" pitchFamily="34" charset="-122"/>
+                <a:cs typeface="Arial" pitchFamily="34" charset="-120"/>
+              </a:rPr>
+              <a:t>One tier up:</a:t>
+            </a:r>
+            <a:pPr algn="l" indent="0" marL="0">
+              <a:lnSpc>
+                <a:spcPts val="1620"/>
+              </a:lnSpc>
+              <a:spcAft>
+                <a:spcPts val="300"/>
+              </a:spcAft>
+              <a:buNone/>
+            </a:pPr>
+            <a:r>
+              <a:rPr lang="en-US" sz="1200" dirty="0">
+                <a:solidFill>
+                  <a:srgbClr val="1C2833"/>
+                </a:solidFill>
+                <a:latin typeface="Arial" pitchFamily="34" charset="0"/>
+                <a:ea typeface="Arial" pitchFamily="34" charset="-122"/>
+                <a:cs typeface="Arial" pitchFamily="34" charset="-120"/>
+              </a:rPr>
+              <a:t> Add a 100-word </a:t>
+            </a:r>
+            <a:pPr algn="l" indent="0" marL="0">
+              <a:lnSpc>
+                <a:spcPts val="1620"/>
+              </a:lnSpc>
+              <a:spcAft>
+                <a:spcPts val="300"/>
+              </a:spcAft>
+              <a:buNone/>
+            </a:pPr>
+            <a:r>
+              <a:rPr lang="en-US" sz="1200" b="1" dirty="0">
+                <a:solidFill>
+                  <a:srgbClr val="1C2833"/>
+                </a:solidFill>
+                <a:latin typeface="Arial" pitchFamily="34" charset="0"/>
+                <a:ea typeface="Arial" pitchFamily="34" charset="-122"/>
+                <a:cs typeface="Arial" pitchFamily="34" charset="-120"/>
+              </a:rPr>
+              <a:t>methodology note</a:t>
+            </a:r>
+            <a:pPr algn="l" indent="0" marL="0">
+              <a:lnSpc>
+                <a:spcPts val="1620"/>
+              </a:lnSpc>
+              <a:spcAft>
+                <a:spcPts val="300"/>
+              </a:spcAft>
+              <a:buNone/>
+            </a:pPr>
+            <a:r>
+              <a:rPr lang="en-US" sz="1200" dirty="0">
+                <a:solidFill>
+                  <a:srgbClr val="1C2833"/>
+                </a:solidFill>
+                <a:latin typeface="Arial" pitchFamily="34" charset="0"/>
+                <a:ea typeface="Arial" pitchFamily="34" charset="-122"/>
+                <a:cs typeface="Arial" pitchFamily="34" charset="-120"/>
+              </a:rPr>
+              <a:t> as a sixth optional section — explain what you would measure or check more carefully in a future version. This is good practice for the Senior band's critical reflection requirement.</a:t>
+            </a:r>
+            <a:endParaRPr lang="en-US" sz="1200" dirty="0"/>
+          </a:p>
+          <a:p>
+            <a:pPr algn="l" marL="342900" indent="-342900">
+              <a:lnSpc>
+                <a:spcPts val="1620"/>
+              </a:lnSpc>
+              <a:spcAft>
+                <a:spcPts val="300"/>
+              </a:spcAft>
+              <a:buSzPct val="100000"/>
+              <a:buChar char="•"/>
+            </a:pPr>
+            <a:r>
+              <a:rPr lang="en-US" sz="1200" b="1" dirty="0">
+                <a:solidFill>
+                  <a:srgbClr val="1C2833"/>
+                </a:solidFill>
+                <a:latin typeface="Arial" pitchFamily="34" charset="0"/>
+                <a:ea typeface="Arial" pitchFamily="34" charset="-122"/>
+                <a:cs typeface="Arial" pitchFamily="34" charset="-120"/>
+              </a:rPr>
+              <a:t>One tier down:</a:t>
+            </a:r>
+            <a:pPr algn="l" indent="0" marL="0">
+              <a:lnSpc>
+                <a:spcPts val="1620"/>
+              </a:lnSpc>
+              <a:spcAft>
+                <a:spcPts val="300"/>
+              </a:spcAft>
+              <a:buNone/>
+            </a:pPr>
+            <a:r>
+              <a:rPr lang="en-US" sz="1200" dirty="0">
+                <a:solidFill>
+                  <a:srgbClr val="1C2833"/>
+                </a:solidFill>
+                <a:latin typeface="Arial" pitchFamily="34" charset="0"/>
+                <a:ea typeface="Arial" pitchFamily="34" charset="-122"/>
+                <a:cs typeface="Arial" pitchFamily="34" charset="-120"/>
+              </a:rPr>
+              <a:t> Use the template literally — answer each prompt in one sentence rather than a paragraph. Quality of one sentence beats vague paragraphs.</a:t>
+            </a:r>
+            <a:endParaRPr lang="en-US" sz="1200" dirty="0"/>
+          </a:p>
+        </p:txBody>
+      </p:sp>
+      <p:sp>
+        <p:nvSpPr>
+          <p:cNvPr id="5" name="Text 3"/>
+          <p:cNvSpPr/>
+          <p:nvPr/>
+        </p:nvSpPr>
+        <p:spPr>
+          <a:xfrm>
+            <a:off x="406301" y="4434929"/>
+            <a:ext cx="8498026" cy="213271"/>
+          </a:xfrm>
+          <a:prstGeom prst="rect">
+            <a:avLst/>
+          </a:prstGeom>
+          <a:noFill/>
+          <a:ln/>
+        </p:spPr>
+        <p:txBody>
+          <a:bodyPr wrap="square" lIns="0" tIns="0" rIns="0" bIns="0" rtlCol="0" anchor="t"/>
+          <a:lstStyle/>
+          <a:p>
+            <a:pPr algn="l" indent="0" marL="0">
+              <a:lnSpc>
+                <a:spcPts val="1680"/>
+              </a:lnSpc>
+              <a:spcBef>
+                <a:spcPts val="300"/>
+              </a:spcBef>
+              <a:spcAft>
+                <a:spcPts val="300"/>
+              </a:spcAft>
+              <a:buNone/>
+            </a:pPr>
+            <a:r>
+              <a:rPr lang="en-US" sz="1200" dirty="0">
+                <a:solidFill>
+                  <a:srgbClr val="1C2833"/>
+                </a:solidFill>
+                <a:latin typeface="Arial" pitchFamily="34" charset="0"/>
+                <a:ea typeface="Arial" pitchFamily="34" charset="-122"/>
+                <a:cs typeface="Arial" pitchFamily="34" charset="-120"/>
+              </a:rPr>
+              <a:t>Middle ·  · IKS Curriculum</a:t>
+            </a:r>
+            <a:endParaRPr lang="en-US" sz="1200" dirty="0"/>
+          </a:p>
+        </p:txBody>
+      </p:sp>
+    </p:spTree>
+  </p:cSld>
+  <p:clrMapOvr>
+    <a:masterClrMapping/>
+  </p:clrMapOvr>
+</p:sld>
+</file>
+
+<file path=ppt/slides/slide15.xml><?xml version="1.0" encoding="utf-8"?>
+<p:sld xmlns:a="http://schemas.openxmlformats.org/drawingml/2006/main" xmlns:r="http://schemas.openxmlformats.org/officeDocument/2006/relationships" xmlns:p="http://schemas.openxmlformats.org/presentationml/2006/main">
+  <p:cSld name="Slide 15">
+    <p:bg>
+      <p:bgPr>
+        <a:solidFill>
+          <a:srgbClr val="FFFFFF"/>
+        </a:solidFill>
+      </p:bgPr>
+    </p:bg>
+    <p:spTree>
+      <p:nvGrpSpPr>
+        <p:cNvPr id="1" name=""/>
+        <p:cNvGrpSpPr/>
+        <p:nvPr/>
+      </p:nvGrpSpPr>
+      <p:grpSpPr>
+        <a:xfrm>
+          <a:off x="0" y="0"/>
+          <a:ext cx="0" cy="0"/>
+          <a:chOff x="0" y="0"/>
+          <a:chExt cx="0" cy="0"/>
+        </a:xfrm>
+      </p:grpSpPr>
+      <p:sp>
+        <p:nvSpPr>
+          <p:cNvPr id="2" name="Text 0"/>
+          <p:cNvSpPr/>
+          <p:nvPr/>
+        </p:nvSpPr>
+        <p:spPr>
+          <a:xfrm>
+            <a:off x="0" y="0"/>
+            <a:ext cx="9144000" cy="101501"/>
+          </a:xfrm>
+          <a:prstGeom prst="rect">
+            <a:avLst/>
+          </a:prstGeom>
+          <a:solidFill>
+            <a:srgbClr val="277884"/>
+          </a:solidFill>
+          <a:ln/>
+        </p:spPr>
+        <p:txBody>
+          <a:bodyPr wrap="square" rtlCol="0" anchor="ctr"/>
+          <a:lstStyle/>
+          <a:p>
+            <a:pPr indent="0" marL="0">
+              <a:buNone/>
+            </a:pPr>
+            <a:endParaRPr lang="en-US" dirty="0"/>
+          </a:p>
+        </p:txBody>
+      </p:sp>
+      <p:sp>
+        <p:nvSpPr>
+          <p:cNvPr id="3" name="Text 1"/>
+          <p:cNvSpPr/>
+          <p:nvPr/>
+        </p:nvSpPr>
+        <p:spPr>
+          <a:xfrm>
+            <a:off x="406301" y="457051"/>
+            <a:ext cx="8498026" cy="274290"/>
+          </a:xfrm>
+          <a:prstGeom prst="rect">
+            <a:avLst/>
+          </a:prstGeom>
+          <a:noFill/>
+          <a:ln/>
+        </p:spPr>
+        <p:txBody>
+          <a:bodyPr wrap="square" lIns="0" tIns="0" rIns="0" bIns="0" rtlCol="0" anchor="t"/>
+          <a:lstStyle/>
+          <a:p>
+            <a:pPr algn="l" indent="0" marL="0">
+              <a:lnSpc>
+                <a:spcPts val="2160"/>
+              </a:lnSpc>
+              <a:spcBef>
+                <a:spcPts val="600"/>
+              </a:spcBef>
+              <a:spcAft>
+                <a:spcPts val="800"/>
+              </a:spcAft>
+              <a:buNone/>
+            </a:pPr>
+            <a:r>
+              <a:rPr lang="en-US" sz="1800" b="1" dirty="0">
+                <a:solidFill>
+                  <a:srgbClr val="FE4447"/>
+                </a:solidFill>
+                <a:latin typeface="Georgia" pitchFamily="34" charset="0"/>
+                <a:ea typeface="Georgia" pitchFamily="34" charset="-122"/>
+                <a:cs typeface="Georgia" pitchFamily="34" charset="-120"/>
+              </a:rPr>
+              <a:t>Teacher notes</a:t>
+            </a:r>
+            <a:endParaRPr lang="en-US" sz="1800" dirty="0"/>
+          </a:p>
+        </p:txBody>
+      </p:sp>
+      <p:sp>
+        <p:nvSpPr>
+          <p:cNvPr id="4" name="Text 2"/>
+          <p:cNvSpPr/>
+          <p:nvPr/>
+        </p:nvSpPr>
+        <p:spPr>
+          <a:xfrm>
+            <a:off x="634901" y="883593"/>
+            <a:ext cx="8102798" cy="937022"/>
+          </a:xfrm>
+          <a:prstGeom prst="rect">
+            <a:avLst/>
+          </a:prstGeom>
+          <a:noFill/>
+          <a:ln/>
+        </p:spPr>
+        <p:txBody>
+          <a:bodyPr wrap="square" lIns="0" tIns="0" rIns="0" bIns="0" rtlCol="0" anchor="t"/>
+          <a:lstStyle/>
+          <a:p>
+            <a:pPr algn="l" marL="342900" indent="-342900">
+              <a:lnSpc>
+                <a:spcPts val="1620"/>
+              </a:lnSpc>
+              <a:spcAft>
+                <a:spcPts val="300"/>
+              </a:spcAft>
+              <a:buSzPct val="100000"/>
+              <a:buChar char="•"/>
+            </a:pPr>
+            <a:r>
+              <a:rPr lang="en-US" sz="1200" dirty="0">
+                <a:solidFill>
+                  <a:srgbClr val="1C2833"/>
+                </a:solidFill>
+                <a:latin typeface="Arial" pitchFamily="34" charset="0"/>
+                <a:ea typeface="Arial" pitchFamily="34" charset="-122"/>
+                <a:cs typeface="Arial" pitchFamily="34" charset="-120"/>
+              </a:rPr>
+              <a:t>This is the hardest writing day of the module. Students who built well may now struggle to write about what they built. Sit with hesitant writers for 90 seconds: </a:t>
+            </a:r>
+            <a:pPr algn="l" indent="0" marL="0">
+              <a:lnSpc>
+                <a:spcPts val="1620"/>
+              </a:lnSpc>
+              <a:spcAft>
+                <a:spcPts val="300"/>
+              </a:spcAft>
+              <a:buNone/>
+            </a:pPr>
+            <a:r>
+              <a:rPr lang="en-US" sz="1200" i="1" dirty="0">
+                <a:solidFill>
+                  <a:srgbClr val="1C2833"/>
+                </a:solidFill>
+                <a:latin typeface="Arial" pitchFamily="34" charset="0"/>
+                <a:ea typeface="Arial" pitchFamily="34" charset="-122"/>
+                <a:cs typeface="Arial" pitchFamily="34" charset="-120"/>
+              </a:rPr>
+              <a:t>"Tell me what you did Monday."</a:t>
+            </a:r>
+            <a:pPr algn="l" indent="0" marL="0">
+              <a:lnSpc>
+                <a:spcPts val="1620"/>
+              </a:lnSpc>
+              <a:spcAft>
+                <a:spcPts val="300"/>
+              </a:spcAft>
+              <a:buNone/>
+            </a:pPr>
+            <a:r>
+              <a:rPr lang="en-US" sz="1200" dirty="0">
+                <a:solidFill>
+                  <a:srgbClr val="1C2833"/>
+                </a:solidFill>
+                <a:latin typeface="Arial" pitchFamily="34" charset="0"/>
+                <a:ea typeface="Arial" pitchFamily="34" charset="-122"/>
+                <a:cs typeface="Arial" pitchFamily="34" charset="-120"/>
+              </a:rPr>
+              <a:t> Then </a:t>
+            </a:r>
+            <a:pPr algn="l" indent="0" marL="0">
+              <a:lnSpc>
+                <a:spcPts val="1620"/>
+              </a:lnSpc>
+              <a:spcAft>
+                <a:spcPts val="300"/>
+              </a:spcAft>
+              <a:buNone/>
+            </a:pPr>
+            <a:r>
+              <a:rPr lang="en-US" sz="1200" i="1" dirty="0">
+                <a:solidFill>
+                  <a:srgbClr val="1C2833"/>
+                </a:solidFill>
+                <a:latin typeface="Arial" pitchFamily="34" charset="0"/>
+                <a:ea typeface="Arial" pitchFamily="34" charset="-122"/>
+                <a:cs typeface="Arial" pitchFamily="34" charset="-120"/>
+              </a:rPr>
+              <a:t>"Now tell me Tuesday."</a:t>
+            </a:r>
+            <a:pPr algn="l" indent="0" marL="0">
+              <a:lnSpc>
+                <a:spcPts val="1620"/>
+              </a:lnSpc>
+              <a:spcAft>
+                <a:spcPts val="300"/>
+              </a:spcAft>
+              <a:buNone/>
+            </a:pPr>
+            <a:r>
+              <a:rPr lang="en-US" sz="1200" dirty="0">
+                <a:solidFill>
+                  <a:srgbClr val="1C2833"/>
+                </a:solidFill>
+                <a:latin typeface="Arial" pitchFamily="34" charset="0"/>
+                <a:ea typeface="Arial" pitchFamily="34" charset="-122"/>
+                <a:cs typeface="Arial" pitchFamily="34" charset="-120"/>
+              </a:rPr>
+              <a:t> Once they're talking, they can write.</a:t>
+            </a:r>
+            <a:endParaRPr lang="en-US" sz="1200" dirty="0"/>
+          </a:p>
+          <a:p>
+            <a:pPr algn="l" marL="342900" indent="-342900">
+              <a:lnSpc>
+                <a:spcPts val="1620"/>
+              </a:lnSpc>
+              <a:spcAft>
+                <a:spcPts val="300"/>
+              </a:spcAft>
+              <a:buSzPct val="100000"/>
+              <a:buChar char="•"/>
+            </a:pPr>
+            <a:r>
+              <a:rPr lang="en-US" sz="1200" dirty="0">
+                <a:solidFill>
+                  <a:srgbClr val="1C2833"/>
+                </a:solidFill>
+                <a:latin typeface="Arial" pitchFamily="34" charset="0"/>
+                <a:ea typeface="Arial" pitchFamily="34" charset="-122"/>
+                <a:cs typeface="Arial" pitchFamily="34" charset="-120"/>
+              </a:rPr>
+              <a:t>Watch for Section 5 vagueness — </a:t>
+            </a:r>
+            <a:pPr algn="l" indent="0" marL="0">
+              <a:lnSpc>
+                <a:spcPts val="1620"/>
+              </a:lnSpc>
+              <a:spcAft>
+                <a:spcPts val="300"/>
+              </a:spcAft>
+              <a:buNone/>
+            </a:pPr>
+            <a:r>
+              <a:rPr lang="en-US" sz="1200" i="1" dirty="0">
+                <a:solidFill>
+                  <a:srgbClr val="1C2833"/>
+                </a:solidFill>
+                <a:latin typeface="Arial" pitchFamily="34" charset="0"/>
+                <a:ea typeface="Arial" pitchFamily="34" charset="-122"/>
+                <a:cs typeface="Arial" pitchFamily="34" charset="-120"/>
+              </a:rPr>
+              <a:t>"I learned a lot"</a:t>
+            </a:r>
+            <a:pPr algn="l" indent="0" marL="0">
+              <a:lnSpc>
+                <a:spcPts val="1620"/>
+              </a:lnSpc>
+              <a:spcAft>
+                <a:spcPts val="300"/>
+              </a:spcAft>
+              <a:buNone/>
+            </a:pPr>
+            <a:r>
+              <a:rPr lang="en-US" sz="1200" dirty="0">
+                <a:solidFill>
+                  <a:srgbClr val="1C2833"/>
+                </a:solidFill>
+                <a:latin typeface="Arial" pitchFamily="34" charset="0"/>
+                <a:ea typeface="Arial" pitchFamily="34" charset="-122"/>
+                <a:cs typeface="Arial" pitchFamily="34" charset="-120"/>
+              </a:rPr>
+              <a:t> / </a:t>
+            </a:r>
+            <a:pPr algn="l" indent="0" marL="0">
+              <a:lnSpc>
+                <a:spcPts val="1620"/>
+              </a:lnSpc>
+              <a:spcAft>
+                <a:spcPts val="300"/>
+              </a:spcAft>
+              <a:buNone/>
+            </a:pPr>
+            <a:r>
+              <a:rPr lang="en-US" sz="1200" i="1" dirty="0">
+                <a:solidFill>
+                  <a:srgbClr val="1C2833"/>
+                </a:solidFill>
+                <a:latin typeface="Arial" pitchFamily="34" charset="0"/>
+                <a:ea typeface="Arial" pitchFamily="34" charset="-122"/>
+                <a:cs typeface="Arial" pitchFamily="34" charset="-120"/>
+              </a:rPr>
+              <a:t>"It was fun"</a:t>
+            </a:r>
+            <a:pPr algn="l" indent="0" marL="0">
+              <a:lnSpc>
+                <a:spcPts val="1620"/>
+              </a:lnSpc>
+              <a:spcAft>
+                <a:spcPts val="300"/>
+              </a:spcAft>
+              <a:buNone/>
+            </a:pPr>
+            <a:r>
+              <a:rPr lang="en-US" sz="1200" dirty="0">
+                <a:solidFill>
+                  <a:srgbClr val="1C2833"/>
+                </a:solidFill>
+                <a:latin typeface="Arial" pitchFamily="34" charset="0"/>
+                <a:ea typeface="Arial" pitchFamily="34" charset="-122"/>
+                <a:cs typeface="Arial" pitchFamily="34" charset="-120"/>
+              </a:rPr>
+              <a:t>. Push: </a:t>
+            </a:r>
+            <a:pPr algn="l" indent="0" marL="0">
+              <a:lnSpc>
+                <a:spcPts val="1620"/>
+              </a:lnSpc>
+              <a:spcAft>
+                <a:spcPts val="300"/>
+              </a:spcAft>
+              <a:buNone/>
+            </a:pPr>
+            <a:r>
+              <a:rPr lang="en-US" sz="1200" i="1" dirty="0">
+                <a:solidFill>
+                  <a:srgbClr val="1C2833"/>
+                </a:solidFill>
+                <a:latin typeface="Arial" pitchFamily="34" charset="0"/>
+                <a:ea typeface="Arial" pitchFamily="34" charset="-122"/>
+                <a:cs typeface="Arial" pitchFamily="34" charset="-120"/>
+              </a:rPr>
+              <a:t>"Name a specific thing that worked, and why."</a:t>
+            </a:r>
+            <a:endParaRPr lang="en-US" sz="1200" dirty="0"/>
+          </a:p>
+        </p:txBody>
+      </p:sp>
+      <p:sp>
+        <p:nvSpPr>
+          <p:cNvPr id="5" name="Text 3"/>
+          <p:cNvSpPr/>
+          <p:nvPr/>
+        </p:nvSpPr>
+        <p:spPr>
+          <a:xfrm>
+            <a:off x="406301" y="4434929"/>
+            <a:ext cx="8498026" cy="213271"/>
+          </a:xfrm>
+          <a:prstGeom prst="rect">
+            <a:avLst/>
+          </a:prstGeom>
+          <a:noFill/>
+          <a:ln/>
+        </p:spPr>
+        <p:txBody>
+          <a:bodyPr wrap="square" lIns="0" tIns="0" rIns="0" bIns="0" rtlCol="0" anchor="t"/>
+          <a:lstStyle/>
+          <a:p>
+            <a:pPr algn="l" indent="0" marL="0">
+              <a:lnSpc>
+                <a:spcPts val="1680"/>
+              </a:lnSpc>
+              <a:spcBef>
+                <a:spcPts val="300"/>
+              </a:spcBef>
+              <a:spcAft>
+                <a:spcPts val="300"/>
+              </a:spcAft>
+              <a:buNone/>
+            </a:pPr>
+            <a:r>
+              <a:rPr lang="en-US" sz="1200" dirty="0">
+                <a:solidFill>
+                  <a:srgbClr val="1C2833"/>
+                </a:solidFill>
+                <a:latin typeface="Arial" pitchFamily="34" charset="0"/>
+                <a:ea typeface="Arial" pitchFamily="34" charset="-122"/>
+                <a:cs typeface="Arial" pitchFamily="34" charset="-120"/>
+              </a:rPr>
+              <a:t>Middle ·  · IKS Curriculum</a:t>
+            </a:r>
+            <a:endParaRPr lang="en-US" sz="1200" dirty="0"/>
+          </a:p>
+        </p:txBody>
+      </p:sp>
+    </p:spTree>
+  </p:cSld>
+  <p:clrMapOvr>
+    <a:masterClrMapping/>
+  </p:clrMapOvr>
+</p:sld>
+</file>
+
+<file path=ppt/slides/slide16.xml><?xml version="1.0" encoding="utf-8"?>
+<p:sld xmlns:a="http://schemas.openxmlformats.org/drawingml/2006/main" xmlns:r="http://schemas.openxmlformats.org/officeDocument/2006/relationships" xmlns:p="http://schemas.openxmlformats.org/presentationml/2006/main">
+  <p:cSld name="Slide 16">
+    <p:bg>
+      <p:bgPr>
+        <a:solidFill>
+          <a:srgbClr val="FFFFFF"/>
+        </a:solidFill>
+      </p:bgPr>
+    </p:bg>
+    <p:spTree>
+      <p:nvGrpSpPr>
+        <p:cNvPr id="1" name=""/>
+        <p:cNvGrpSpPr/>
+        <p:nvPr/>
+      </p:nvGrpSpPr>
+      <p:grpSpPr>
+        <a:xfrm>
+          <a:off x="0" y="0"/>
+          <a:ext cx="0" cy="0"/>
+          <a:chOff x="0" y="0"/>
+          <a:chExt cx="0" cy="0"/>
+        </a:xfrm>
+      </p:grpSpPr>
+      <p:sp>
+        <p:nvSpPr>
+          <p:cNvPr id="2" name="Text 0"/>
+          <p:cNvSpPr/>
+          <p:nvPr/>
+        </p:nvSpPr>
+        <p:spPr>
+          <a:xfrm>
+            <a:off x="0" y="0"/>
+            <a:ext cx="9144000" cy="101501"/>
+          </a:xfrm>
+          <a:prstGeom prst="rect">
+            <a:avLst/>
+          </a:prstGeom>
+          <a:solidFill>
+            <a:srgbClr val="277884"/>
+          </a:solidFill>
+          <a:ln/>
+        </p:spPr>
+        <p:txBody>
+          <a:bodyPr wrap="square" rtlCol="0" anchor="ctr"/>
+          <a:lstStyle/>
+          <a:p>
+            <a:pPr indent="0" marL="0">
+              <a:buNone/>
+            </a:pPr>
+            <a:endParaRPr lang="en-US" dirty="0"/>
+          </a:p>
+        </p:txBody>
+      </p:sp>
+      <p:sp>
+        <p:nvSpPr>
+          <p:cNvPr id="3" name="Text 1"/>
+          <p:cNvSpPr/>
+          <p:nvPr/>
+        </p:nvSpPr>
+        <p:spPr>
+          <a:xfrm>
+            <a:off x="406301" y="457051"/>
+            <a:ext cx="8498026" cy="274290"/>
+          </a:xfrm>
+          <a:prstGeom prst="rect">
+            <a:avLst/>
+          </a:prstGeom>
+          <a:noFill/>
+          <a:ln/>
+        </p:spPr>
+        <p:txBody>
+          <a:bodyPr wrap="square" lIns="0" tIns="0" rIns="0" bIns="0" rtlCol="0" anchor="t"/>
+          <a:lstStyle/>
+          <a:p>
+            <a:pPr algn="l" indent="0" marL="0">
+              <a:lnSpc>
+                <a:spcPts val="2160"/>
+              </a:lnSpc>
+              <a:spcBef>
+                <a:spcPts val="600"/>
+              </a:spcBef>
+              <a:spcAft>
+                <a:spcPts val="800"/>
+              </a:spcAft>
+              <a:buNone/>
+            </a:pPr>
+            <a:r>
+              <a:rPr lang="en-US" sz="1800" b="1" dirty="0">
+                <a:solidFill>
+                  <a:srgbClr val="FE4447"/>
+                </a:solidFill>
+                <a:latin typeface="Georgia" pitchFamily="34" charset="0"/>
+                <a:ea typeface="Georgia" pitchFamily="34" charset="-122"/>
+                <a:cs typeface="Georgia" pitchFamily="34" charset="-120"/>
+              </a:rPr>
+              <a:t>Teacher notes (cont.)</a:t>
+            </a:r>
+            <a:endParaRPr lang="en-US" sz="1800" dirty="0"/>
+          </a:p>
+        </p:txBody>
+      </p:sp>
+      <p:sp>
+        <p:nvSpPr>
+          <p:cNvPr id="4" name="Text 2"/>
+          <p:cNvSpPr/>
+          <p:nvPr/>
+        </p:nvSpPr>
+        <p:spPr>
+          <a:xfrm>
+            <a:off x="634901" y="883593"/>
+            <a:ext cx="8102798" cy="1142702"/>
+          </a:xfrm>
+          <a:prstGeom prst="rect">
+            <a:avLst/>
+          </a:prstGeom>
+          <a:noFill/>
+          <a:ln/>
+        </p:spPr>
+        <p:txBody>
+          <a:bodyPr wrap="square" lIns="0" tIns="0" rIns="0" bIns="0" rtlCol="0" anchor="t"/>
+          <a:lstStyle/>
+          <a:p>
+            <a:pPr algn="l" marL="342900" indent="-342900">
+              <a:lnSpc>
+                <a:spcPts val="1620"/>
+              </a:lnSpc>
+              <a:spcAft>
+                <a:spcPts val="300"/>
+              </a:spcAft>
+              <a:buSzPct val="100000"/>
+              <a:buChar char="•"/>
+            </a:pPr>
+            <a:r>
+              <a:rPr lang="en-US" sz="1200" dirty="0">
+                <a:solidFill>
+                  <a:srgbClr val="1C2833"/>
+                </a:solidFill>
+                <a:latin typeface="Arial" pitchFamily="34" charset="0"/>
+                <a:ea typeface="Arial" pitchFamily="34" charset="-122"/>
+                <a:cs typeface="Arial" pitchFamily="34" charset="-120"/>
+              </a:rPr>
+              <a:t>Project 8 (doṣa self-study) students have a special challenge: their </a:t>
+            </a:r>
+            <a:pPr algn="l" indent="0" marL="0">
+              <a:lnSpc>
+                <a:spcPts val="1620"/>
+              </a:lnSpc>
+              <a:spcAft>
+                <a:spcPts val="300"/>
+              </a:spcAft>
+              <a:buNone/>
+            </a:pPr>
+            <a:r>
+              <a:rPr lang="en-US" sz="1200" i="1" dirty="0">
+                <a:solidFill>
+                  <a:srgbClr val="1C2833"/>
+                </a:solidFill>
+                <a:latin typeface="Arial" pitchFamily="34" charset="0"/>
+                <a:ea typeface="Arial" pitchFamily="34" charset="-122"/>
+                <a:cs typeface="Arial" pitchFamily="34" charset="-120"/>
+              </a:rPr>
+              <a:t>artefact</a:t>
+            </a:r>
+            <a:pPr algn="l" indent="0" marL="0">
+              <a:lnSpc>
+                <a:spcPts val="1620"/>
+              </a:lnSpc>
+              <a:spcAft>
+                <a:spcPts val="300"/>
+              </a:spcAft>
+              <a:buNone/>
+            </a:pPr>
+            <a:r>
+              <a:rPr lang="en-US" sz="1200" dirty="0">
+                <a:solidFill>
+                  <a:srgbClr val="1C2833"/>
+                </a:solidFill>
+                <a:latin typeface="Arial" pitchFamily="34" charset="0"/>
+                <a:ea typeface="Arial" pitchFamily="34" charset="-122"/>
+                <a:cs typeface="Arial" pitchFamily="34" charset="-120"/>
+              </a:rPr>
+              <a:t> and </a:t>
+            </a:r>
+            <a:pPr algn="l" indent="0" marL="0">
+              <a:lnSpc>
+                <a:spcPts val="1620"/>
+              </a:lnSpc>
+              <a:spcAft>
+                <a:spcPts val="300"/>
+              </a:spcAft>
+              <a:buNone/>
+            </a:pPr>
+            <a:r>
+              <a:rPr lang="en-US" sz="1200" i="1" dirty="0">
+                <a:solidFill>
+                  <a:srgbClr val="1C2833"/>
+                </a:solidFill>
+                <a:latin typeface="Arial" pitchFamily="34" charset="0"/>
+                <a:ea typeface="Arial" pitchFamily="34" charset="-122"/>
+                <a:cs typeface="Arial" pitchFamily="34" charset="-120"/>
+              </a:rPr>
+              <a:t>documentation</a:t>
+            </a:r>
+            <a:pPr algn="l" indent="0" marL="0">
+              <a:lnSpc>
+                <a:spcPts val="1620"/>
+              </a:lnSpc>
+              <a:spcAft>
+                <a:spcPts val="300"/>
+              </a:spcAft>
+              <a:buNone/>
+            </a:pPr>
+            <a:r>
+              <a:rPr lang="en-US" sz="1200" dirty="0">
+                <a:solidFill>
+                  <a:srgbClr val="1C2833"/>
+                </a:solidFill>
+                <a:latin typeface="Arial" pitchFamily="34" charset="0"/>
+                <a:ea typeface="Arial" pitchFamily="34" charset="-122"/>
+                <a:cs typeface="Arial" pitchFamily="34" charset="-120"/>
+              </a:rPr>
+              <a:t> overlap heavily because the journal is the artefact. For them, Section 4 explains the </a:t>
+            </a:r>
+            <a:pPr algn="l" indent="0" marL="0">
+              <a:lnSpc>
+                <a:spcPts val="1620"/>
+              </a:lnSpc>
+              <a:spcAft>
+                <a:spcPts val="300"/>
+              </a:spcAft>
+              <a:buNone/>
+            </a:pPr>
+            <a:r>
+              <a:rPr lang="en-US" sz="1200" i="1" dirty="0">
+                <a:solidFill>
+                  <a:srgbClr val="1C2833"/>
+                </a:solidFill>
+                <a:latin typeface="Arial" pitchFamily="34" charset="0"/>
+                <a:ea typeface="Arial" pitchFamily="34" charset="-122"/>
+                <a:cs typeface="Arial" pitchFamily="34" charset="-120"/>
+              </a:rPr>
+              <a:t>format</a:t>
+            </a:r>
+            <a:pPr algn="l" indent="0" marL="0">
+              <a:lnSpc>
+                <a:spcPts val="1620"/>
+              </a:lnSpc>
+              <a:spcAft>
+                <a:spcPts val="300"/>
+              </a:spcAft>
+              <a:buNone/>
+            </a:pPr>
+            <a:r>
+              <a:rPr lang="en-US" sz="1200" dirty="0">
+                <a:solidFill>
+                  <a:srgbClr val="1C2833"/>
+                </a:solidFill>
+                <a:latin typeface="Arial" pitchFamily="34" charset="0"/>
+                <a:ea typeface="Arial" pitchFamily="34" charset="-122"/>
+                <a:cs typeface="Arial" pitchFamily="34" charset="-120"/>
+              </a:rPr>
+              <a:t> of the self-study (e.g. "a 7-day chart with 6 columns: date, sleep hours, appetite, mood, weather, observation"), and Section 5 reflects on what observation patterns they noticed </a:t>
+            </a:r>
+            <a:pPr algn="l" indent="0" marL="0">
+              <a:lnSpc>
+                <a:spcPts val="1620"/>
+              </a:lnSpc>
+              <a:spcAft>
+                <a:spcPts val="300"/>
+              </a:spcAft>
+              <a:buNone/>
+            </a:pPr>
+            <a:r>
+              <a:rPr lang="en-US" sz="1200" i="1" dirty="0">
+                <a:solidFill>
+                  <a:srgbClr val="1C2833"/>
+                </a:solidFill>
+                <a:latin typeface="Arial" pitchFamily="34" charset="0"/>
+                <a:ea typeface="Arial" pitchFamily="34" charset="-122"/>
+                <a:cs typeface="Arial" pitchFamily="34" charset="-120"/>
+              </a:rPr>
+              <a:t>without diagnosing themselves</a:t>
+            </a:r>
+            <a:pPr algn="l" indent="0" marL="0">
+              <a:lnSpc>
+                <a:spcPts val="1620"/>
+              </a:lnSpc>
+              <a:spcAft>
+                <a:spcPts val="300"/>
+              </a:spcAft>
+              <a:buNone/>
+            </a:pPr>
+            <a:r>
+              <a:rPr lang="en-US" sz="1200" dirty="0">
+                <a:solidFill>
+                  <a:srgbClr val="1C2833"/>
+                </a:solidFill>
+                <a:latin typeface="Arial" pitchFamily="34" charset="0"/>
+                <a:ea typeface="Arial" pitchFamily="34" charset="-122"/>
+                <a:cs typeface="Arial" pitchFamily="34" charset="-120"/>
+              </a:rPr>
+              <a:t>.</a:t>
+            </a:r>
+            <a:endParaRPr lang="en-US" sz="1200" dirty="0"/>
+          </a:p>
+          <a:p>
+            <a:pPr algn="l" marL="342900" indent="-342900">
+              <a:lnSpc>
+                <a:spcPts val="1620"/>
+              </a:lnSpc>
+              <a:spcAft>
+                <a:spcPts val="300"/>
+              </a:spcAft>
+              <a:buSzPct val="100000"/>
+              <a:buChar char="•"/>
+            </a:pPr>
+            <a:r>
+              <a:rPr lang="en-US" sz="1200" dirty="0">
+                <a:solidFill>
+                  <a:srgbClr val="1C2833"/>
+                </a:solidFill>
+                <a:latin typeface="Arial" pitchFamily="34" charset="0"/>
+                <a:ea typeface="Arial" pitchFamily="34" charset="-122"/>
+                <a:cs typeface="Arial" pitchFamily="34" charset="-120"/>
+              </a:rPr>
+              <a:t>Photograph each artefact + documentation pair into a single file per student. This is your marking record.</a:t>
+            </a:r>
+            <a:endParaRPr lang="en-US" sz="1200" dirty="0"/>
+          </a:p>
+        </p:txBody>
+      </p:sp>
+      <p:sp>
+        <p:nvSpPr>
+          <p:cNvPr id="5" name="Text 3"/>
+          <p:cNvSpPr/>
+          <p:nvPr/>
+        </p:nvSpPr>
+        <p:spPr>
+          <a:xfrm>
+            <a:off x="406301" y="4434929"/>
+            <a:ext cx="8498026" cy="213271"/>
+          </a:xfrm>
+          <a:prstGeom prst="rect">
+            <a:avLst/>
+          </a:prstGeom>
+          <a:noFill/>
+          <a:ln/>
+        </p:spPr>
+        <p:txBody>
+          <a:bodyPr wrap="square" lIns="0" tIns="0" rIns="0" bIns="0" rtlCol="0" anchor="t"/>
+          <a:lstStyle/>
+          <a:p>
+            <a:pPr algn="l" indent="0" marL="0">
+              <a:lnSpc>
+                <a:spcPts val="1680"/>
+              </a:lnSpc>
+              <a:spcBef>
+                <a:spcPts val="300"/>
+              </a:spcBef>
+              <a:spcAft>
+                <a:spcPts val="300"/>
+              </a:spcAft>
+              <a:buNone/>
+            </a:pPr>
+            <a:r>
+              <a:rPr lang="en-US" sz="1200" dirty="0">
+                <a:solidFill>
+                  <a:srgbClr val="1C2833"/>
+                </a:solidFill>
+                <a:latin typeface="Arial" pitchFamily="34" charset="0"/>
+                <a:ea typeface="Arial" pitchFamily="34" charset="-122"/>
+                <a:cs typeface="Arial" pitchFamily="34" charset="-120"/>
+              </a:rPr>
+              <a:t>Middle ·  · IKS Curriculum</a:t>
+            </a:r>
+            <a:endParaRPr lang="en-US" sz="1200" dirty="0"/>
+          </a:p>
+        </p:txBody>
+      </p:sp>
+    </p:spTree>
+  </p:cSld>
+  <p:clrMapOvr>
+    <a:masterClrMapping/>
+  </p:clrMapOvr>
+</p:sld>
+</file>
+
+<file path=ppt/slides/slide17.xml><?xml version="1.0" encoding="utf-8"?>
+<p:sld xmlns:a="http://schemas.openxmlformats.org/drawingml/2006/main" xmlns:r="http://schemas.openxmlformats.org/officeDocument/2006/relationships" xmlns:p="http://schemas.openxmlformats.org/presentationml/2006/main">
+  <p:cSld name="Slide 17">
+    <p:bg>
+      <p:bgPr>
+        <a:solidFill>
+          <a:srgbClr val="FFFFFF"/>
+        </a:solidFill>
+      </p:bgPr>
+    </p:bg>
+    <p:spTree>
+      <p:nvGrpSpPr>
+        <p:cNvPr id="1" name=""/>
+        <p:cNvGrpSpPr/>
+        <p:nvPr/>
+      </p:nvGrpSpPr>
+      <p:grpSpPr>
+        <a:xfrm>
+          <a:off x="0" y="0"/>
+          <a:ext cx="0" cy="0"/>
+          <a:chOff x="0" y="0"/>
+          <a:chExt cx="0" cy="0"/>
+        </a:xfrm>
+      </p:grpSpPr>
+      <p:sp>
+        <p:nvSpPr>
+          <p:cNvPr id="2" name="Text 0"/>
+          <p:cNvSpPr/>
+          <p:nvPr/>
+        </p:nvSpPr>
+        <p:spPr>
+          <a:xfrm>
+            <a:off x="0" y="0"/>
+            <a:ext cx="9144000" cy="101501"/>
+          </a:xfrm>
+          <a:prstGeom prst="rect">
+            <a:avLst/>
+          </a:prstGeom>
+          <a:solidFill>
+            <a:srgbClr val="277884"/>
+          </a:solidFill>
+          <a:ln/>
+        </p:spPr>
+        <p:txBody>
+          <a:bodyPr wrap="square" rtlCol="0" anchor="ctr"/>
+          <a:lstStyle/>
+          <a:p>
+            <a:pPr indent="0" marL="0">
+              <a:buNone/>
+            </a:pPr>
+            <a:endParaRPr lang="en-US" dirty="0"/>
+          </a:p>
+        </p:txBody>
+      </p:sp>
+      <p:sp>
+        <p:nvSpPr>
+          <p:cNvPr id="3" name="Text 1"/>
+          <p:cNvSpPr/>
+          <p:nvPr/>
+        </p:nvSpPr>
+        <p:spPr>
+          <a:xfrm>
+            <a:off x="406301" y="457051"/>
+            <a:ext cx="8498026" cy="274290"/>
+          </a:xfrm>
+          <a:prstGeom prst="rect">
+            <a:avLst/>
+          </a:prstGeom>
+          <a:noFill/>
+          <a:ln/>
+        </p:spPr>
+        <p:txBody>
+          <a:bodyPr wrap="square" lIns="0" tIns="0" rIns="0" bIns="0" rtlCol="0" anchor="t"/>
+          <a:lstStyle/>
+          <a:p>
+            <a:pPr algn="l" indent="0" marL="0">
+              <a:lnSpc>
+                <a:spcPts val="2160"/>
+              </a:lnSpc>
+              <a:spcBef>
+                <a:spcPts val="600"/>
+              </a:spcBef>
+              <a:spcAft>
+                <a:spcPts val="800"/>
+              </a:spcAft>
+              <a:buNone/>
+            </a:pPr>
+            <a:r>
+              <a:rPr lang="en-US" sz="1800" b="1" dirty="0">
+                <a:solidFill>
+                  <a:srgbClr val="FE4447"/>
+                </a:solidFill>
+                <a:latin typeface="Georgia" pitchFamily="34" charset="0"/>
+                <a:ea typeface="Georgia" pitchFamily="34" charset="-122"/>
+                <a:cs typeface="Georgia" pitchFamily="34" charset="-120"/>
+              </a:rPr>
+              <a:t>Citation(s) used in this lesson</a:t>
+            </a:r>
+            <a:endParaRPr lang="en-US" sz="1800" dirty="0"/>
+          </a:p>
+        </p:txBody>
+      </p:sp>
+      <p:sp>
+        <p:nvSpPr>
+          <p:cNvPr id="4" name="Text 2"/>
+          <p:cNvSpPr/>
+          <p:nvPr/>
+        </p:nvSpPr>
+        <p:spPr>
+          <a:xfrm>
+            <a:off x="634901" y="883593"/>
+            <a:ext cx="8102798" cy="487561"/>
+          </a:xfrm>
+          <a:prstGeom prst="rect">
+            <a:avLst/>
+          </a:prstGeom>
+          <a:noFill/>
+          <a:ln/>
+        </p:spPr>
+        <p:txBody>
+          <a:bodyPr wrap="square" lIns="0" tIns="0" rIns="0" bIns="0" rtlCol="0" anchor="t"/>
+          <a:lstStyle/>
+          <a:p>
+            <a:pPr algn="l" marL="342900" indent="-342900">
+              <a:lnSpc>
+                <a:spcPts val="1620"/>
+              </a:lnSpc>
+              <a:spcAft>
+                <a:spcPts val="300"/>
+              </a:spcAft>
+              <a:buSzPct val="100000"/>
+              <a:buChar char="•"/>
+            </a:pPr>
+            <a:r>
+              <a:rPr lang="en-US" sz="1200" dirty="0">
+                <a:solidFill>
+                  <a:srgbClr val="1C2833"/>
+                </a:solidFill>
+                <a:latin typeface="Arial" pitchFamily="34" charset="0"/>
+                <a:ea typeface="Arial" pitchFamily="34" charset="-122"/>
+                <a:cs typeface="Arial" pitchFamily="34" charset="-120"/>
+              </a:rPr>
+              <a:t>The discipline of honest documentation is anchored in the curriculum's broader citation rule from Module 2 onwards: </a:t>
+            </a:r>
+            <a:pPr algn="l" indent="0" marL="0">
+              <a:lnSpc>
+                <a:spcPts val="1620"/>
+              </a:lnSpc>
               <a:spcAft>
                 <a:spcPts val="300"/>
               </a:spcAft>
@@ -3543,7 +5630,7 @@
                 <a:ea typeface="Georgia" pitchFamily="34" charset="-122"/>
                 <a:cs typeface="Georgia" pitchFamily="34" charset="-120"/>
               </a:rPr>
-              <a:t>Materials</a:t>
+              <a:t>Learning objective</a:t>
             </a:r>
             <a:endParaRPr lang="en-US" sz="1800" dirty="0"/>
           </a:p>
@@ -3591,7 +5678,7 @@
                 <a:ea typeface="Arial" pitchFamily="34" charset="-122"/>
                 <a:cs typeface="Arial" pitchFamily="34" charset="-120"/>
               </a:rPr>
-              <a:t>– Project journal (with daily entries from Days 1–7) – Citation slips – The artefact (mostly finished from Day 7) – A4 sheets (lined or plain), pen – Printed </a:t>
+              <a:t>By the end of this lesson, students will have written a </a:t>
             </a:r>
             <a:pPr algn="l" indent="0" marL="0">
               <a:lnSpc>
@@ -3614,7 +5701,7 @@
                 <a:ea typeface="Arial" pitchFamily="34" charset="-122"/>
                 <a:cs typeface="Arial" pitchFamily="34" charset="-120"/>
               </a:rPr>
-              <a:t>Documentation Template</a:t>
+              <a:t>one-to-two-page documentation</a:t>
             </a:r>
             <a:pPr algn="l" indent="0" marL="0">
               <a:lnSpc>
@@ -3637,7 +5724,7 @@
                 <a:ea typeface="Arial" pitchFamily="34" charset="-122"/>
                 <a:cs typeface="Arial" pitchFamily="34" charset="-120"/>
               </a:rPr>
-              <a:t> (see below)</a:t>
+              <a:t> that captures the process, the sources, the final artefact's key features, and a short honest reflection on what worked and what didn't.</a:t>
             </a:r>
             <a:endParaRPr lang="en-US" sz="1200" dirty="0"/>
           </a:p>
@@ -3795,7 +5882,7 @@
                 <a:ea typeface="Georgia" pitchFamily="34" charset="-122"/>
                 <a:cs typeface="Georgia" pitchFamily="34" charset="-120"/>
               </a:rPr>
-              <a:t>Lesson flow</a:t>
+              <a:t>Materials</a:t>
             </a:r>
             <a:endParaRPr lang="en-US" sz="1800" dirty="0"/>
           </a:p>
@@ -3804,6 +5891,188 @@
       <p:sp>
         <p:nvSpPr>
           <p:cNvPr id="4" name="Text 2"/>
+          <p:cNvSpPr/>
+          <p:nvPr/>
+        </p:nvSpPr>
+        <p:spPr>
+          <a:xfrm>
+            <a:off x="634901" y="883593"/>
+            <a:ext cx="8102798" cy="1257002"/>
+          </a:xfrm>
+          <a:prstGeom prst="rect">
+            <a:avLst/>
+          </a:prstGeom>
+          <a:noFill/>
+          <a:ln/>
+        </p:spPr>
+        <p:txBody>
+          <a:bodyPr wrap="square" lIns="0" tIns="0" rIns="0" bIns="0" rtlCol="0" anchor="t"/>
+          <a:lstStyle/>
+          <a:p>
+            <a:pPr algn="l" marL="342900" indent="-342900">
+              <a:lnSpc>
+                <a:spcPts val="1620"/>
+              </a:lnSpc>
+              <a:spcAft>
+                <a:spcPts val="300"/>
+              </a:spcAft>
+              <a:buSzPct val="100000"/>
+              <a:buChar char="•"/>
+            </a:pPr>
+            <a:r>
+              <a:rPr lang="en-US" sz="1200" dirty="0">
+                <a:solidFill>
+                  <a:srgbClr val="1C2833"/>
+                </a:solidFill>
+                <a:latin typeface="Arial" pitchFamily="34" charset="0"/>
+                <a:ea typeface="Arial" pitchFamily="34" charset="-122"/>
+                <a:cs typeface="Arial" pitchFamily="34" charset="-120"/>
+              </a:rPr>
+              <a:t>Project journal (with daily entries from Days 1–7)</a:t>
+            </a:r>
+            <a:endParaRPr lang="en-US" sz="1200" dirty="0"/>
+          </a:p>
+          <a:p>
+            <a:pPr algn="l" marL="342900" indent="-342900">
+              <a:lnSpc>
+                <a:spcPts val="1620"/>
+              </a:lnSpc>
+              <a:spcAft>
+                <a:spcPts val="300"/>
+              </a:spcAft>
+              <a:buSzPct val="100000"/>
+              <a:buChar char="•"/>
+            </a:pPr>
+            <a:r>
+              <a:rPr lang="en-US" sz="1200" dirty="0">
+                <a:solidFill>
+                  <a:srgbClr val="1C2833"/>
+                </a:solidFill>
+                <a:latin typeface="Arial" pitchFamily="34" charset="0"/>
+                <a:ea typeface="Arial" pitchFamily="34" charset="-122"/>
+                <a:cs typeface="Arial" pitchFamily="34" charset="-120"/>
+              </a:rPr>
+              <a:t>Citation slips</a:t>
+            </a:r>
+            <a:endParaRPr lang="en-US" sz="1200" dirty="0"/>
+          </a:p>
+          <a:p>
+            <a:pPr algn="l" marL="342900" indent="-342900">
+              <a:lnSpc>
+                <a:spcPts val="1620"/>
+              </a:lnSpc>
+              <a:spcAft>
+                <a:spcPts val="300"/>
+              </a:spcAft>
+              <a:buSzPct val="100000"/>
+              <a:buChar char="•"/>
+            </a:pPr>
+            <a:r>
+              <a:rPr lang="en-US" sz="1200" dirty="0">
+                <a:solidFill>
+                  <a:srgbClr val="1C2833"/>
+                </a:solidFill>
+                <a:latin typeface="Arial" pitchFamily="34" charset="0"/>
+                <a:ea typeface="Arial" pitchFamily="34" charset="-122"/>
+                <a:cs typeface="Arial" pitchFamily="34" charset="-120"/>
+              </a:rPr>
+              <a:t>The artefact (mostly finished from Day 7)</a:t>
+            </a:r>
+            <a:endParaRPr lang="en-US" sz="1200" dirty="0"/>
+          </a:p>
+          <a:p>
+            <a:pPr algn="l" marL="342900" indent="-342900">
+              <a:lnSpc>
+                <a:spcPts val="1620"/>
+              </a:lnSpc>
+              <a:spcAft>
+                <a:spcPts val="300"/>
+              </a:spcAft>
+              <a:buSzPct val="100000"/>
+              <a:buChar char="•"/>
+            </a:pPr>
+            <a:r>
+              <a:rPr lang="en-US" sz="1200" dirty="0">
+                <a:solidFill>
+                  <a:srgbClr val="1C2833"/>
+                </a:solidFill>
+                <a:latin typeface="Arial" pitchFamily="34" charset="0"/>
+                <a:ea typeface="Arial" pitchFamily="34" charset="-122"/>
+                <a:cs typeface="Arial" pitchFamily="34" charset="-120"/>
+              </a:rPr>
+              <a:t>A4 sheets (lined or plain), pen</a:t>
+            </a:r>
+            <a:endParaRPr lang="en-US" sz="1200" dirty="0"/>
+          </a:p>
+          <a:p>
+            <a:pPr algn="l" marL="342900" indent="-342900">
+              <a:lnSpc>
+                <a:spcPts val="1620"/>
+              </a:lnSpc>
+              <a:spcAft>
+                <a:spcPts val="300"/>
+              </a:spcAft>
+              <a:buSzPct val="100000"/>
+              <a:buChar char="•"/>
+            </a:pPr>
+            <a:r>
+              <a:rPr lang="en-US" sz="1200" dirty="0">
+                <a:solidFill>
+                  <a:srgbClr val="1C2833"/>
+                </a:solidFill>
+                <a:latin typeface="Arial" pitchFamily="34" charset="0"/>
+                <a:ea typeface="Arial" pitchFamily="34" charset="-122"/>
+                <a:cs typeface="Arial" pitchFamily="34" charset="-120"/>
+              </a:rPr>
+              <a:t>Printed </a:t>
+            </a:r>
+            <a:pPr algn="l" indent="0" marL="0">
+              <a:lnSpc>
+                <a:spcPts val="1620"/>
+              </a:lnSpc>
+              <a:spcAft>
+                <a:spcPts val="300"/>
+              </a:spcAft>
+              <a:buNone/>
+            </a:pPr>
+            <a:r>
+              <a:rPr lang="en-US" sz="1200" b="1" dirty="0">
+                <a:solidFill>
+                  <a:srgbClr val="1C2833"/>
+                </a:solidFill>
+                <a:latin typeface="Arial" pitchFamily="34" charset="0"/>
+                <a:ea typeface="Arial" pitchFamily="34" charset="-122"/>
+                <a:cs typeface="Arial" pitchFamily="34" charset="-120"/>
+              </a:rPr>
+              <a:t>Documentation Template</a:t>
+            </a:r>
+            <a:pPr algn="l" indent="0" marL="0">
+              <a:lnSpc>
+                <a:spcPts val="1620"/>
+              </a:lnSpc>
+              <a:spcAft>
+                <a:spcPts val="300"/>
+              </a:spcAft>
+              <a:buNone/>
+            </a:pPr>
+            <a:r>
+              <a:rPr lang="en-US" sz="1200" dirty="0">
+                <a:solidFill>
+                  <a:srgbClr val="1C2833"/>
+                </a:solidFill>
+                <a:latin typeface="Arial" pitchFamily="34" charset="0"/>
+                <a:ea typeface="Arial" pitchFamily="34" charset="-122"/>
+                <a:cs typeface="Arial" pitchFamily="34" charset="-120"/>
+              </a:rPr>
+              <a:t> (see below)</a:t>
+            </a:r>
+            <a:endParaRPr lang="en-US" sz="1200" dirty="0"/>
+          </a:p>
+        </p:txBody>
+      </p:sp>
+      <p:sp>
+        <p:nvSpPr>
+          <p:cNvPr id="5" name="Text 3"/>
           <p:cNvSpPr/>
           <p:nvPr/>
         </p:nvSpPr>
@@ -3953,7 +6222,7 @@
                 <a:ea typeface="Georgia" pitchFamily="34" charset="-122"/>
                 <a:cs typeface="Georgia" pitchFamily="34" charset="-120"/>
               </a:rPr>
-              <a:t>Warm-up (5 min)</a:t>
+              <a:t>Lesson flow</a:t>
             </a:r>
             <a:endParaRPr lang="en-US" sz="1800" dirty="0"/>
           </a:p>
@@ -3962,146 +6231,6 @@
       <p:sp>
         <p:nvSpPr>
           <p:cNvPr id="4" name="Text 2"/>
-          <p:cNvSpPr/>
-          <p:nvPr/>
-        </p:nvSpPr>
-        <p:spPr>
-          <a:xfrm>
-            <a:off x="406301" y="870942"/>
-            <a:ext cx="8498026" cy="426541"/>
-          </a:xfrm>
-          <a:prstGeom prst="rect">
-            <a:avLst/>
-          </a:prstGeom>
-          <a:noFill/>
-          <a:ln/>
-        </p:spPr>
-        <p:txBody>
-          <a:bodyPr wrap="square" lIns="0" tIns="0" rIns="0" bIns="0" rtlCol="0" anchor="t"/>
-          <a:lstStyle/>
-          <a:p>
-            <a:pPr algn="l" indent="0" marL="0">
-              <a:lnSpc>
-                <a:spcPts val="1680"/>
-              </a:lnSpc>
-              <a:spcBef>
-                <a:spcPts val="300"/>
-              </a:spcBef>
-              <a:spcAft>
-                <a:spcPts val="300"/>
-              </a:spcAft>
-              <a:buNone/>
-            </a:pPr>
-            <a:r>
-              <a:rPr lang="en-US" sz="1200" dirty="0">
-                <a:solidFill>
-                  <a:srgbClr val="1C2833"/>
-                </a:solidFill>
-                <a:latin typeface="Arial" pitchFamily="34" charset="0"/>
-                <a:ea typeface="Arial" pitchFamily="34" charset="-122"/>
-                <a:cs typeface="Arial" pitchFamily="34" charset="-120"/>
-              </a:rPr>
-              <a:t>– Daily prompt: </a:t>
-            </a:r>
-            <a:pPr algn="l" indent="0" marL="0">
-              <a:lnSpc>
-                <a:spcPts val="1680"/>
-              </a:lnSpc>
-              <a:spcBef>
-                <a:spcPts val="300"/>
-              </a:spcBef>
-              <a:spcAft>
-                <a:spcPts val="300"/>
-              </a:spcAft>
-              <a:buNone/>
-            </a:pPr>
-            <a:r>
-              <a:rPr lang="en-US" sz="1200" i="1" dirty="0">
-                <a:solidFill>
-                  <a:srgbClr val="1C2833"/>
-                </a:solidFill>
-                <a:latin typeface="Arial" pitchFamily="34" charset="0"/>
-                <a:ea typeface="Arial" pitchFamily="34" charset="-122"/>
-                <a:cs typeface="Arial" pitchFamily="34" charset="-120"/>
-              </a:rPr>
-              <a:t>"What's one decision you made this module that you'd make differently if you started over?"</a:t>
-            </a:r>
-            <a:pPr algn="l" indent="0" marL="0">
-              <a:lnSpc>
-                <a:spcPts val="1680"/>
-              </a:lnSpc>
-              <a:spcBef>
-                <a:spcPts val="300"/>
-              </a:spcBef>
-              <a:spcAft>
-                <a:spcPts val="300"/>
-              </a:spcAft>
-              <a:buNone/>
-            </a:pPr>
-            <a:r>
-              <a:rPr lang="en-US" sz="1200" dirty="0">
-                <a:solidFill>
-                  <a:srgbClr val="1C2833"/>
-                </a:solidFill>
-                <a:latin typeface="Arial" pitchFamily="34" charset="0"/>
-                <a:ea typeface="Arial" pitchFamily="34" charset="-122"/>
-                <a:cs typeface="Arial" pitchFamily="34" charset="-120"/>
-              </a:rPr>
-              <a:t> — 3 students share.</a:t>
-            </a:r>
-            <a:endParaRPr lang="en-US" sz="1200" dirty="0"/>
-          </a:p>
-        </p:txBody>
-      </p:sp>
-      <p:sp>
-        <p:nvSpPr>
-          <p:cNvPr id="5" name="Text 3"/>
-          <p:cNvSpPr/>
-          <p:nvPr/>
-        </p:nvSpPr>
-        <p:spPr>
-          <a:xfrm>
-            <a:off x="634901" y="1386334"/>
-            <a:ext cx="8102798" cy="487561"/>
-          </a:xfrm>
-          <a:prstGeom prst="rect">
-            <a:avLst/>
-          </a:prstGeom>
-          <a:noFill/>
-          <a:ln/>
-        </p:spPr>
-        <p:txBody>
-          <a:bodyPr wrap="square" lIns="0" tIns="0" rIns="0" bIns="0" rtlCol="0" anchor="t"/>
-          <a:lstStyle/>
-          <a:p>
-            <a:pPr algn="l" marL="342900" indent="-342900">
-              <a:lnSpc>
-                <a:spcPts val="1620"/>
-              </a:lnSpc>
-              <a:spcAft>
-                <a:spcPts val="300"/>
-              </a:spcAft>
-              <a:buSzPct val="100000"/>
-              <a:buChar char="•"/>
-            </a:pPr>
-            <a:r>
-              <a:rPr lang="en-US" sz="1200" i="1" dirty="0">
-                <a:solidFill>
-                  <a:srgbClr val="1C2833"/>
-                </a:solidFill>
-                <a:latin typeface="Arial" pitchFamily="34" charset="0"/>
-                <a:ea typeface="Arial" pitchFamily="34" charset="-122"/>
-                <a:cs typeface="Arial" pitchFamily="34" charset="-120"/>
-              </a:rPr>
-              <a:t>"Today is documentation. Your project is mostly done. The job today is to write up how you got here — honestly. The rubric specifically rewards honesty about what didn't work."</a:t>
-            </a:r>
-            <a:endParaRPr lang="en-US" sz="1200" dirty="0"/>
-          </a:p>
-        </p:txBody>
-      </p:sp>
-      <p:sp>
-        <p:nvSpPr>
-          <p:cNvPr id="6" name="Text 4"/>
           <p:cNvSpPr/>
           <p:nvPr/>
         </p:nvSpPr>
@@ -4251,7 +6380,7 @@
                 <a:ea typeface="Georgia" pitchFamily="34" charset="-122"/>
                 <a:cs typeface="Georgia" pitchFamily="34" charset="-120"/>
               </a:rPr>
-              <a:t>Core (10 min)</a:t>
+              <a:t>Warm-up (5 min)</a:t>
             </a:r>
             <a:endParaRPr lang="en-US" sz="1800" dirty="0"/>
           </a:p>
@@ -4266,7 +6395,7 @@
         <p:spPr>
           <a:xfrm>
             <a:off x="634901" y="883593"/>
-            <a:ext cx="8102798" cy="281880"/>
+            <a:ext cx="8102798" cy="937022"/>
           </a:xfrm>
           <a:prstGeom prst="rect">
             <a:avLst/>
@@ -4289,26 +6418,6 @@
               <a:buChar char="•"/>
             </a:pPr>
             <a:r>
-              <a:rPr lang="en-US" sz="1200" b="1" dirty="0">
-                <a:solidFill>
-                  <a:srgbClr val="1C2833"/>
-                </a:solidFill>
-                <a:latin typeface="Arial" pitchFamily="34" charset="0"/>
-                <a:ea typeface="Arial" pitchFamily="34" charset="-122"/>
-                <a:cs typeface="Arial" pitchFamily="34" charset="-120"/>
-              </a:rPr>
-              <a:t>Why documentation matters</a:t>
-            </a:r>
-            <a:pPr algn="l" indent="0" marL="0">
-              <a:lnSpc>
-                <a:spcPts val="1620"/>
-              </a:lnSpc>
-              <a:spcAft>
-                <a:spcPts val="300"/>
-              </a:spcAft>
-              <a:buNone/>
-            </a:pPr>
-            <a:r>
               <a:rPr lang="en-US" sz="1200" dirty="0">
                 <a:solidFill>
                   <a:srgbClr val="1C2833"/>
@@ -4317,7 +6426,71 @@
                 <a:ea typeface="Arial" pitchFamily="34" charset="-122"/>
                 <a:cs typeface="Arial" pitchFamily="34" charset="-120"/>
               </a:rPr>
-              <a:t> (3 min). Three reasons:</a:t>
+              <a:t>Daily prompt: </a:t>
+            </a:r>
+            <a:pPr algn="l" indent="0" marL="0">
+              <a:lnSpc>
+                <a:spcPts val="1620"/>
+              </a:lnSpc>
+              <a:spcAft>
+                <a:spcPts val="300"/>
+              </a:spcAft>
+              <a:buNone/>
+            </a:pPr>
+            <a:r>
+              <a:rPr lang="en-US" sz="1200" i="1" dirty="0">
+                <a:solidFill>
+                  <a:srgbClr val="1C2833"/>
+                </a:solidFill>
+                <a:latin typeface="Arial" pitchFamily="34" charset="0"/>
+                <a:ea typeface="Arial" pitchFamily="34" charset="-122"/>
+                <a:cs typeface="Arial" pitchFamily="34" charset="-120"/>
+              </a:rPr>
+              <a:t>"What's one decision you made this module that you'd make differently if you started over?"</a:t>
+            </a:r>
+            <a:pPr algn="l" indent="0" marL="0">
+              <a:lnSpc>
+                <a:spcPts val="1620"/>
+              </a:lnSpc>
+              <a:spcAft>
+                <a:spcPts val="300"/>
+              </a:spcAft>
+              <a:buNone/>
+            </a:pPr>
+            <a:r>
+              <a:rPr lang="en-US" sz="1200" dirty="0">
+                <a:solidFill>
+                  <a:srgbClr val="1C2833"/>
+                </a:solidFill>
+                <a:latin typeface="Arial" pitchFamily="34" charset="0"/>
+                <a:ea typeface="Arial" pitchFamily="34" charset="-122"/>
+                <a:cs typeface="Arial" pitchFamily="34" charset="-120"/>
+              </a:rPr>
+              <a:t> — 3 students share.</a:t>
+            </a:r>
+            <a:endParaRPr lang="en-US" sz="1200" dirty="0"/>
+          </a:p>
+          <a:p>
+            <a:pPr algn="l" marL="342900" indent="-342900">
+              <a:lnSpc>
+                <a:spcPts val="1620"/>
+              </a:lnSpc>
+              <a:spcAft>
+                <a:spcPts val="300"/>
+              </a:spcAft>
+              <a:buSzPct val="100000"/>
+              <a:buChar char="•"/>
+            </a:pPr>
+            <a:r>
+              <a:rPr lang="en-US" sz="1200" i="1" dirty="0">
+                <a:solidFill>
+                  <a:srgbClr val="1C2833"/>
+                </a:solidFill>
+                <a:latin typeface="Arial" pitchFamily="34" charset="0"/>
+                <a:ea typeface="Arial" pitchFamily="34" charset="-122"/>
+                <a:cs typeface="Arial" pitchFamily="34" charset="-120"/>
+              </a:rPr>
+              <a:t>"Today is documentation. Your project is mostly done. The job today is to write up how you got here — honestly. The rubric specifically rewards honesty about what didn't work."</a:t>
             </a:r>
             <a:endParaRPr lang="en-US" sz="1200" dirty="0"/>
           </a:p>
@@ -4331,689 +6504,7 @@
         </p:nvSpPr>
         <p:spPr>
           <a:xfrm>
-            <a:off x="406301" y="1254323"/>
-            <a:ext cx="8498026" cy="426541"/>
-          </a:xfrm>
-          <a:prstGeom prst="rect">
-            <a:avLst/>
-          </a:prstGeom>
-          <a:noFill/>
-          <a:ln/>
-        </p:spPr>
-        <p:txBody>
-          <a:bodyPr wrap="square" lIns="0" tIns="0" rIns="0" bIns="0" rtlCol="0" anchor="t"/>
-          <a:lstStyle/>
-          <a:p>
-            <a:pPr algn="l" indent="0" marL="0">
-              <a:lnSpc>
-                <a:spcPts val="1680"/>
-              </a:lnSpc>
-              <a:spcBef>
-                <a:spcPts val="300"/>
-              </a:spcBef>
-              <a:spcAft>
-                <a:spcPts val="300"/>
-              </a:spcAft>
-              <a:buNone/>
-            </a:pPr>
-            <a:r>
-              <a:rPr lang="en-US" sz="1200" dirty="0">
-                <a:solidFill>
-                  <a:srgbClr val="1C2833"/>
-                </a:solidFill>
-                <a:latin typeface="Arial" pitchFamily="34" charset="0"/>
-                <a:ea typeface="Arial" pitchFamily="34" charset="-122"/>
-                <a:cs typeface="Arial" pitchFamily="34" charset="-120"/>
-              </a:rPr>
-              <a:t>– It's the part the audience can read AFTER your 4-minute share. It outlives the presentation. – It's the record of </a:t>
-            </a:r>
-            <a:pPr algn="l" indent="0" marL="0">
-              <a:lnSpc>
-                <a:spcPts val="1680"/>
-              </a:lnSpc>
-              <a:spcBef>
-                <a:spcPts val="300"/>
-              </a:spcBef>
-              <a:spcAft>
-                <a:spcPts val="300"/>
-              </a:spcAft>
-              <a:buNone/>
-            </a:pPr>
-            <a:r>
-              <a:rPr lang="en-US" sz="1200" i="1" dirty="0">
-                <a:solidFill>
-                  <a:srgbClr val="1C2833"/>
-                </a:solidFill>
-                <a:latin typeface="Arial" pitchFamily="34" charset="0"/>
-                <a:ea typeface="Arial" pitchFamily="34" charset="-122"/>
-                <a:cs typeface="Arial" pitchFamily="34" charset="-120"/>
-              </a:rPr>
-              <a:t>thinking</a:t>
-            </a:r>
-            <a:pPr algn="l" indent="0" marL="0">
-              <a:lnSpc>
-                <a:spcPts val="1680"/>
-              </a:lnSpc>
-              <a:spcBef>
-                <a:spcPts val="300"/>
-              </a:spcBef>
-              <a:spcAft>
-                <a:spcPts val="300"/>
-              </a:spcAft>
-              <a:buNone/>
-            </a:pPr>
-            <a:r>
-              <a:rPr lang="en-US" sz="1200" dirty="0">
-                <a:solidFill>
-                  <a:srgbClr val="1C2833"/>
-                </a:solidFill>
-                <a:latin typeface="Arial" pitchFamily="34" charset="0"/>
-                <a:ea typeface="Arial" pitchFamily="34" charset="-122"/>
-                <a:cs typeface="Arial" pitchFamily="34" charset="-120"/>
-              </a:rPr>
-              <a:t>, not just </a:t>
-            </a:r>
-            <a:pPr algn="l" indent="0" marL="0">
-              <a:lnSpc>
-                <a:spcPts val="1680"/>
-              </a:lnSpc>
-              <a:spcBef>
-                <a:spcPts val="300"/>
-              </a:spcBef>
-              <a:spcAft>
-                <a:spcPts val="300"/>
-              </a:spcAft>
-              <a:buNone/>
-            </a:pPr>
-            <a:r>
-              <a:rPr lang="en-US" sz="1200" i="1" dirty="0">
-                <a:solidFill>
-                  <a:srgbClr val="1C2833"/>
-                </a:solidFill>
-                <a:latin typeface="Arial" pitchFamily="34" charset="0"/>
-                <a:ea typeface="Arial" pitchFamily="34" charset="-122"/>
-                <a:cs typeface="Arial" pitchFamily="34" charset="-120"/>
-              </a:rPr>
-              <a:t>result</a:t>
-            </a:r>
-            <a:pPr algn="l" indent="0" marL="0">
-              <a:lnSpc>
-                <a:spcPts val="1680"/>
-              </a:lnSpc>
-              <a:spcBef>
-                <a:spcPts val="300"/>
-              </a:spcBef>
-              <a:spcAft>
-                <a:spcPts val="300"/>
-              </a:spcAft>
-              <a:buNone/>
-            </a:pPr>
-            <a:r>
-              <a:rPr lang="en-US" sz="1200" dirty="0">
-                <a:solidFill>
-                  <a:srgbClr val="1C2833"/>
-                </a:solidFill>
-                <a:latin typeface="Arial" pitchFamily="34" charset="0"/>
-                <a:ea typeface="Arial" pitchFamily="34" charset="-122"/>
-                <a:cs typeface="Arial" pitchFamily="34" charset="-120"/>
-              </a:rPr>
-              <a:t>. Examiners can see your reasoning. – It's how you learn from this project for the next one.</a:t>
-            </a:r>
-            <a:endParaRPr lang="en-US" sz="1200" dirty="0"/>
-          </a:p>
-        </p:txBody>
-      </p:sp>
-      <p:sp>
-        <p:nvSpPr>
-          <p:cNvPr id="6" name="Text 4"/>
-          <p:cNvSpPr/>
-          <p:nvPr/>
-        </p:nvSpPr>
-        <p:spPr>
-          <a:xfrm>
-            <a:off x="634901" y="1769715"/>
-            <a:ext cx="8102798" cy="281880"/>
-          </a:xfrm>
-          <a:prstGeom prst="rect">
-            <a:avLst/>
-          </a:prstGeom>
-          <a:noFill/>
-          <a:ln/>
-        </p:spPr>
-        <p:txBody>
-          <a:bodyPr wrap="square" lIns="0" tIns="0" rIns="0" bIns="0" rtlCol="0" anchor="t"/>
-          <a:lstStyle/>
-          <a:p>
-            <a:pPr algn="l" marL="342900" indent="-342900">
-              <a:lnSpc>
-                <a:spcPts val="1620"/>
-              </a:lnSpc>
-              <a:spcAft>
-                <a:spcPts val="300"/>
-              </a:spcAft>
-              <a:buSzPct val="100000"/>
-              <a:buChar char="•"/>
-            </a:pPr>
-            <a:r>
-              <a:rPr lang="en-US" sz="1200" b="1" dirty="0">
-                <a:solidFill>
-                  <a:srgbClr val="1C2833"/>
-                </a:solidFill>
-                <a:latin typeface="Arial" pitchFamily="34" charset="0"/>
-                <a:ea typeface="Arial" pitchFamily="34" charset="-122"/>
-                <a:cs typeface="Arial" pitchFamily="34" charset="-120"/>
-              </a:rPr>
-              <a:t>The five sections</a:t>
-            </a:r>
-            <a:pPr algn="l" indent="0" marL="0">
-              <a:lnSpc>
-                <a:spcPts val="1620"/>
-              </a:lnSpc>
-              <a:spcAft>
-                <a:spcPts val="300"/>
-              </a:spcAft>
-              <a:buNone/>
-            </a:pPr>
-            <a:r>
-              <a:rPr lang="en-US" sz="1200" dirty="0">
-                <a:solidFill>
-                  <a:srgbClr val="1C2833"/>
-                </a:solidFill>
-                <a:latin typeface="Arial" pitchFamily="34" charset="0"/>
-                <a:ea typeface="Arial" pitchFamily="34" charset="-122"/>
-                <a:cs typeface="Arial" pitchFamily="34" charset="-120"/>
-              </a:rPr>
-              <a:t> (5 min). Walk through the template:</a:t>
-            </a:r>
-            <a:endParaRPr lang="en-US" sz="1200" dirty="0"/>
-          </a:p>
-        </p:txBody>
-      </p:sp>
-      <p:sp>
-        <p:nvSpPr>
-          <p:cNvPr id="7" name="Text 5"/>
-          <p:cNvSpPr/>
-          <p:nvPr/>
-        </p:nvSpPr>
-        <p:spPr>
-          <a:xfrm>
-            <a:off x="406301" y="2140446"/>
-            <a:ext cx="8498026" cy="213271"/>
-          </a:xfrm>
-          <a:prstGeom prst="rect">
-            <a:avLst/>
-          </a:prstGeom>
-          <a:noFill/>
-          <a:ln/>
-        </p:spPr>
-        <p:txBody>
-          <a:bodyPr wrap="square" lIns="0" tIns="0" rIns="0" bIns="0" rtlCol="0" anchor="t"/>
-          <a:lstStyle/>
-          <a:p>
-            <a:pPr algn="l" indent="0" marL="0">
-              <a:lnSpc>
-                <a:spcPts val="1680"/>
-              </a:lnSpc>
-              <a:spcBef>
-                <a:spcPts val="300"/>
-              </a:spcBef>
-              <a:spcAft>
-                <a:spcPts val="300"/>
-              </a:spcAft>
-              <a:buNone/>
-            </a:pPr>
-            <a:r>
-              <a:rPr lang="en-US" sz="1200" i="1" dirty="0">
-                <a:solidFill>
-                  <a:srgbClr val="1C2833"/>
-                </a:solidFill>
-                <a:latin typeface="Arial" pitchFamily="34" charset="0"/>
-                <a:ea typeface="Arial" pitchFamily="34" charset="-122"/>
-                <a:cs typeface="Arial" pitchFamily="34" charset="-120"/>
-              </a:rPr>
-              <a:t>Each row: Section · Length · What goes here.</a:t>
-            </a:r>
-            <a:endParaRPr lang="en-US" sz="1200" dirty="0"/>
-          </a:p>
-        </p:txBody>
-      </p:sp>
-      <p:sp>
-        <p:nvSpPr>
-          <p:cNvPr id="8" name="Text 6"/>
-          <p:cNvSpPr/>
-          <p:nvPr/>
-        </p:nvSpPr>
-        <p:spPr>
-          <a:xfrm>
-            <a:off x="634901" y="2442567"/>
-            <a:ext cx="8102798" cy="1257002"/>
-          </a:xfrm>
-          <a:prstGeom prst="rect">
-            <a:avLst/>
-          </a:prstGeom>
-          <a:noFill/>
-          <a:ln/>
-        </p:spPr>
-        <p:txBody>
-          <a:bodyPr wrap="square" lIns="0" tIns="0" rIns="0" bIns="0" rtlCol="0" anchor="t"/>
-          <a:lstStyle/>
-          <a:p>
-            <a:pPr algn="l" marL="342900" indent="-342900">
-              <a:lnSpc>
-                <a:spcPts val="1620"/>
-              </a:lnSpc>
-              <a:spcAft>
-                <a:spcPts val="300"/>
-              </a:spcAft>
-              <a:buSzPct val="100000"/>
-              <a:buChar char="•"/>
-            </a:pPr>
-            <a:r>
-              <a:rPr lang="en-US" sz="1200" b="1" dirty="0">
-                <a:solidFill>
-                  <a:srgbClr val="1C2833"/>
-                </a:solidFill>
-                <a:latin typeface="Arial" pitchFamily="34" charset="0"/>
-                <a:ea typeface="Arial" pitchFamily="34" charset="-122"/>
-                <a:cs typeface="Arial" pitchFamily="34" charset="-120"/>
-              </a:rPr>
-              <a:t>1. The question</a:t>
-            </a:r>
-            <a:pPr algn="l" indent="0" marL="0">
-              <a:lnSpc>
-                <a:spcPts val="1620"/>
-              </a:lnSpc>
-              <a:spcAft>
-                <a:spcPts val="300"/>
-              </a:spcAft>
-              <a:buNone/>
-            </a:pPr>
-            <a:r>
-              <a:rPr lang="en-US" sz="1200" dirty="0">
-                <a:solidFill>
-                  <a:srgbClr val="1C2833"/>
-                </a:solidFill>
-                <a:latin typeface="Arial" pitchFamily="34" charset="0"/>
-                <a:ea typeface="Arial" pitchFamily="34" charset="-122"/>
-                <a:cs typeface="Arial" pitchFamily="34" charset="-120"/>
-              </a:rPr>
-              <a:t> — 1–2 sentences · The driving question you set on Day 2 (and how, if at all, it changed)</a:t>
-            </a:r>
-            <a:endParaRPr lang="en-US" sz="1200" dirty="0"/>
-          </a:p>
-          <a:p>
-            <a:pPr algn="l" marL="342900" indent="-342900">
-              <a:lnSpc>
-                <a:spcPts val="1620"/>
-              </a:lnSpc>
-              <a:spcAft>
-                <a:spcPts val="300"/>
-              </a:spcAft>
-              <a:buSzPct val="100000"/>
-              <a:buChar char="•"/>
-            </a:pPr>
-            <a:r>
-              <a:rPr lang="en-US" sz="1200" b="1" dirty="0">
-                <a:solidFill>
-                  <a:srgbClr val="1C2833"/>
-                </a:solidFill>
-                <a:latin typeface="Arial" pitchFamily="34" charset="0"/>
-                <a:ea typeface="Arial" pitchFamily="34" charset="-122"/>
-                <a:cs typeface="Arial" pitchFamily="34" charset="-120"/>
-              </a:rPr>
-              <a:t>2. The process</a:t>
-            </a:r>
-            <a:pPr algn="l" indent="0" marL="0">
-              <a:lnSpc>
-                <a:spcPts val="1620"/>
-              </a:lnSpc>
-              <a:spcAft>
-                <a:spcPts val="300"/>
-              </a:spcAft>
-              <a:buNone/>
-            </a:pPr>
-            <a:r>
-              <a:rPr lang="en-US" sz="1200" dirty="0">
-                <a:solidFill>
-                  <a:srgbClr val="1C2833"/>
-                </a:solidFill>
-                <a:latin typeface="Arial" pitchFamily="34" charset="0"/>
-                <a:ea typeface="Arial" pitchFamily="34" charset="-122"/>
-                <a:cs typeface="Arial" pitchFamily="34" charset="-120"/>
-              </a:rPr>
-              <a:t> — 1 paragraph · A short narrative of Days 1–7 — what you did, in order</a:t>
-            </a:r>
-            <a:endParaRPr lang="en-US" sz="1200" dirty="0"/>
-          </a:p>
-          <a:p>
-            <a:pPr algn="l" marL="342900" indent="-342900">
-              <a:lnSpc>
-                <a:spcPts val="1620"/>
-              </a:lnSpc>
-              <a:spcAft>
-                <a:spcPts val="300"/>
-              </a:spcAft>
-              <a:buSzPct val="100000"/>
-              <a:buChar char="•"/>
-            </a:pPr>
-            <a:r>
-              <a:rPr lang="en-US" sz="1200" b="1" dirty="0">
-                <a:solidFill>
-                  <a:srgbClr val="1C2833"/>
-                </a:solidFill>
-                <a:latin typeface="Arial" pitchFamily="34" charset="0"/>
-                <a:ea typeface="Arial" pitchFamily="34" charset="-122"/>
-                <a:cs typeface="Arial" pitchFamily="34" charset="-120"/>
-              </a:rPr>
-              <a:t>3. The sources</a:t>
-            </a:r>
-            <a:pPr algn="l" indent="0" marL="0">
-              <a:lnSpc>
-                <a:spcPts val="1620"/>
-              </a:lnSpc>
-              <a:spcAft>
-                <a:spcPts val="300"/>
-              </a:spcAft>
-              <a:buNone/>
-            </a:pPr>
-            <a:r>
-              <a:rPr lang="en-US" sz="1200" dirty="0">
-                <a:solidFill>
-                  <a:srgbClr val="1C2833"/>
-                </a:solidFill>
-                <a:latin typeface="Arial" pitchFamily="34" charset="0"/>
-                <a:ea typeface="Arial" pitchFamily="34" charset="-122"/>
-                <a:cs typeface="Arial" pitchFamily="34" charset="-120"/>
-              </a:rPr>
-              <a:t> — 3–5 bullets · Each source with its identifier, what it contributed</a:t>
-            </a:r>
-            <a:endParaRPr lang="en-US" sz="1200" dirty="0"/>
-          </a:p>
-          <a:p>
-            <a:pPr algn="l" marL="342900" indent="-342900">
-              <a:lnSpc>
-                <a:spcPts val="1620"/>
-              </a:lnSpc>
-              <a:spcAft>
-                <a:spcPts val="300"/>
-              </a:spcAft>
-              <a:buSzPct val="100000"/>
-              <a:buChar char="•"/>
-            </a:pPr>
-            <a:r>
-              <a:rPr lang="en-US" sz="1200" b="1" dirty="0">
-                <a:solidFill>
-                  <a:srgbClr val="1C2833"/>
-                </a:solidFill>
-                <a:latin typeface="Arial" pitchFamily="34" charset="0"/>
-                <a:ea typeface="Arial" pitchFamily="34" charset="-122"/>
-                <a:cs typeface="Arial" pitchFamily="34" charset="-120"/>
-              </a:rPr>
-              <a:t>4. The artefact</a:t>
-            </a:r>
-            <a:pPr algn="l" indent="0" marL="0">
-              <a:lnSpc>
-                <a:spcPts val="1620"/>
-              </a:lnSpc>
-              <a:spcAft>
-                <a:spcPts val="300"/>
-              </a:spcAft>
-              <a:buNone/>
-            </a:pPr>
-            <a:r>
-              <a:rPr lang="en-US" sz="1200" dirty="0">
-                <a:solidFill>
-                  <a:srgbClr val="1C2833"/>
-                </a:solidFill>
-                <a:latin typeface="Arial" pitchFamily="34" charset="0"/>
-                <a:ea typeface="Arial" pitchFamily="34" charset="-122"/>
-                <a:cs typeface="Arial" pitchFamily="34" charset="-120"/>
-              </a:rPr>
-              <a:t> — 1 paragraph · What the final artefact is, in plain language, including its dimensions / format</a:t>
-            </a:r>
-            <a:endParaRPr lang="en-US" sz="1200" dirty="0"/>
-          </a:p>
-          <a:p>
-            <a:pPr algn="l" marL="342900" indent="-342900">
-              <a:lnSpc>
-                <a:spcPts val="1620"/>
-              </a:lnSpc>
-              <a:spcAft>
-                <a:spcPts val="300"/>
-              </a:spcAft>
-              <a:buSzPct val="100000"/>
-              <a:buChar char="•"/>
-            </a:pPr>
-            <a:r>
-              <a:rPr lang="en-US" sz="1200" b="1" dirty="0">
-                <a:solidFill>
-                  <a:srgbClr val="1C2833"/>
-                </a:solidFill>
-                <a:latin typeface="Arial" pitchFamily="34" charset="0"/>
-                <a:ea typeface="Arial" pitchFamily="34" charset="-122"/>
-                <a:cs typeface="Arial" pitchFamily="34" charset="-120"/>
-              </a:rPr>
-              <a:t>5. The reflection</a:t>
-            </a:r>
-            <a:pPr algn="l" indent="0" marL="0">
-              <a:lnSpc>
-                <a:spcPts val="1620"/>
-              </a:lnSpc>
-              <a:spcAft>
-                <a:spcPts val="300"/>
-              </a:spcAft>
-              <a:buNone/>
-            </a:pPr>
-            <a:r>
-              <a:rPr lang="en-US" sz="1200" dirty="0">
-                <a:solidFill>
-                  <a:srgbClr val="1C2833"/>
-                </a:solidFill>
-                <a:latin typeface="Arial" pitchFamily="34" charset="0"/>
-                <a:ea typeface="Arial" pitchFamily="34" charset="-122"/>
-                <a:cs typeface="Arial" pitchFamily="34" charset="-120"/>
-              </a:rPr>
-              <a:t> — 1 paragraph · What worked, what didn't, what you'd do with three more days</a:t>
-            </a:r>
-            <a:endParaRPr lang="en-US" sz="1200" dirty="0"/>
-          </a:p>
-        </p:txBody>
-      </p:sp>
-      <p:sp>
-        <p:nvSpPr>
-          <p:cNvPr id="9" name="Text 7"/>
-          <p:cNvSpPr/>
-          <p:nvPr/>
-        </p:nvSpPr>
-        <p:spPr>
-          <a:xfrm>
-            <a:off x="634901" y="3801070"/>
-            <a:ext cx="8102798" cy="898922"/>
-          </a:xfrm>
-          <a:prstGeom prst="rect">
-            <a:avLst/>
-          </a:prstGeom>
-          <a:noFill/>
-          <a:ln/>
-        </p:spPr>
-        <p:txBody>
-          <a:bodyPr wrap="square" lIns="0" tIns="0" rIns="0" bIns="0" rtlCol="0" anchor="t"/>
-          <a:lstStyle/>
-          <a:p>
-            <a:pPr algn="l" marL="342900" indent="-342900">
-              <a:lnSpc>
-                <a:spcPts val="1620"/>
-              </a:lnSpc>
-              <a:spcAft>
-                <a:spcPts val="300"/>
-              </a:spcAft>
-              <a:buSzPct val="100000"/>
-              <a:buChar char="•"/>
-            </a:pPr>
-            <a:r>
-              <a:rPr lang="en-US" sz="1200" b="1" dirty="0">
-                <a:solidFill>
-                  <a:srgbClr val="1C2833"/>
-                </a:solidFill>
-                <a:latin typeface="Arial" pitchFamily="34" charset="0"/>
-                <a:ea typeface="Arial" pitchFamily="34" charset="-122"/>
-                <a:cs typeface="Arial" pitchFamily="34" charset="-120"/>
-              </a:rPr>
-              <a:t>The honesty rule</a:t>
-            </a:r>
-            <a:pPr algn="l" indent="0" marL="0">
-              <a:lnSpc>
-                <a:spcPts val="1620"/>
-              </a:lnSpc>
-              <a:spcAft>
-                <a:spcPts val="300"/>
-              </a:spcAft>
-              <a:buNone/>
-            </a:pPr>
-            <a:r>
-              <a:rPr lang="en-US" sz="1200" dirty="0">
-                <a:solidFill>
-                  <a:srgbClr val="1C2833"/>
-                </a:solidFill>
-                <a:latin typeface="Arial" pitchFamily="34" charset="0"/>
-                <a:ea typeface="Arial" pitchFamily="34" charset="-122"/>
-                <a:cs typeface="Arial" pitchFamily="34" charset="-120"/>
-              </a:rPr>
-              <a:t> (2 min). The reflection section is </a:t>
-            </a:r>
-            <a:pPr algn="l" indent="0" marL="0">
-              <a:lnSpc>
-                <a:spcPts val="1620"/>
-              </a:lnSpc>
-              <a:spcAft>
-                <a:spcPts val="300"/>
-              </a:spcAft>
-              <a:buNone/>
-            </a:pPr>
-            <a:r>
-              <a:rPr lang="en-US" sz="1200" b="1" dirty="0">
-                <a:solidFill>
-                  <a:srgbClr val="1C2833"/>
-                </a:solidFill>
-                <a:latin typeface="Arial" pitchFamily="34" charset="0"/>
-                <a:ea typeface="Arial" pitchFamily="34" charset="-122"/>
-                <a:cs typeface="Arial" pitchFamily="34" charset="-120"/>
-              </a:rPr>
-              <a:t>graded for honesty</a:t>
-            </a:r>
-            <a:pPr algn="l" indent="0" marL="0">
-              <a:lnSpc>
-                <a:spcPts val="1620"/>
-              </a:lnSpc>
-              <a:spcAft>
-                <a:spcPts val="300"/>
-              </a:spcAft>
-              <a:buNone/>
-            </a:pPr>
-            <a:r>
-              <a:rPr lang="en-US" sz="1200" dirty="0">
-                <a:solidFill>
-                  <a:srgbClr val="1C2833"/>
-                </a:solidFill>
-                <a:latin typeface="Arial" pitchFamily="34" charset="0"/>
-                <a:ea typeface="Arial" pitchFamily="34" charset="-122"/>
-                <a:cs typeface="Arial" pitchFamily="34" charset="-120"/>
-              </a:rPr>
-              <a:t>, not for showing your project in the best light. A student who writes </a:t>
-            </a:r>
-            <a:pPr algn="l" indent="0" marL="0">
-              <a:lnSpc>
-                <a:spcPts val="1620"/>
-              </a:lnSpc>
-              <a:spcAft>
-                <a:spcPts val="300"/>
-              </a:spcAft>
-              <a:buNone/>
-            </a:pPr>
-            <a:r>
-              <a:rPr lang="en-US" sz="1200" i="1" dirty="0">
-                <a:solidFill>
-                  <a:srgbClr val="1C2833"/>
-                </a:solidFill>
-                <a:latin typeface="Arial" pitchFamily="34" charset="0"/>
-                <a:ea typeface="Arial" pitchFamily="34" charset="-122"/>
-                <a:cs typeface="Arial" pitchFamily="34" charset="-120"/>
-              </a:rPr>
-              <a:t>"My calendar's first three days had wrong tithi values because I used the wrong reference; I corrected on Day 5; I'd start with a verified pañcāṅga next time"</a:t>
-            </a:r>
-            <a:pPr algn="l" indent="0" marL="0">
-              <a:lnSpc>
-                <a:spcPts val="1620"/>
-              </a:lnSpc>
-              <a:spcAft>
-                <a:spcPts val="300"/>
-              </a:spcAft>
-              <a:buNone/>
-            </a:pPr>
-            <a:r>
-              <a:rPr lang="en-US" sz="1200" dirty="0">
-                <a:solidFill>
-                  <a:srgbClr val="1C2833"/>
-                </a:solidFill>
-                <a:latin typeface="Arial" pitchFamily="34" charset="0"/>
-                <a:ea typeface="Arial" pitchFamily="34" charset="-122"/>
-                <a:cs typeface="Arial" pitchFamily="34" charset="-120"/>
-              </a:rPr>
-              <a:t> gets full marks. A student who writes </a:t>
-            </a:r>
-            <a:pPr algn="l" indent="0" marL="0">
-              <a:lnSpc>
-                <a:spcPts val="1620"/>
-              </a:lnSpc>
-              <a:spcAft>
-                <a:spcPts val="300"/>
-              </a:spcAft>
-              <a:buNone/>
-            </a:pPr>
-            <a:r>
-              <a:rPr lang="en-US" sz="1200" i="1" dirty="0">
-                <a:solidFill>
-                  <a:srgbClr val="1C2833"/>
-                </a:solidFill>
-                <a:latin typeface="Arial" pitchFamily="34" charset="0"/>
-                <a:ea typeface="Arial" pitchFamily="34" charset="-122"/>
-                <a:cs typeface="Arial" pitchFamily="34" charset="-120"/>
-              </a:rPr>
-              <a:t>"Everything went perfectly"</a:t>
-            </a:r>
-            <a:pPr algn="l" indent="0" marL="0">
-              <a:lnSpc>
-                <a:spcPts val="1620"/>
-              </a:lnSpc>
-              <a:spcAft>
-                <a:spcPts val="300"/>
-              </a:spcAft>
-              <a:buNone/>
-            </a:pPr>
-            <a:r>
-              <a:rPr lang="en-US" sz="1200" dirty="0">
-                <a:solidFill>
-                  <a:srgbClr val="1C2833"/>
-                </a:solidFill>
-                <a:latin typeface="Arial" pitchFamily="34" charset="0"/>
-                <a:ea typeface="Arial" pitchFamily="34" charset="-122"/>
-                <a:cs typeface="Arial" pitchFamily="34" charset="-120"/>
-              </a:rPr>
-              <a:t> loses marks for vague self-praise.</a:t>
-            </a:r>
-            <a:endParaRPr lang="en-US" sz="1200" dirty="0"/>
-          </a:p>
-        </p:txBody>
-      </p:sp>
-      <p:sp>
-        <p:nvSpPr>
-          <p:cNvPr id="10" name="Text 8"/>
-          <p:cNvSpPr/>
-          <p:nvPr/>
-        </p:nvSpPr>
-        <p:spPr>
-          <a:xfrm>
-            <a:off x="406301" y="4865043"/>
+            <a:off x="406301" y="4434929"/>
             <a:ext cx="8498026" cy="213271"/>
           </a:xfrm>
           <a:prstGeom prst="rect">
@@ -5157,7 +6648,7 @@
                 <a:ea typeface="Georgia" pitchFamily="34" charset="-122"/>
                 <a:cs typeface="Georgia" pitchFamily="34" charset="-120"/>
               </a:rPr>
-              <a:t>Activity (25 min) — Write the documentation</a:t>
+              <a:t>Core (10 min)</a:t>
             </a:r>
             <a:endParaRPr lang="en-US" sz="1800" dirty="0"/>
           </a:p>
@@ -5171,8 +6662,8 @@
         </p:nvSpPr>
         <p:spPr>
           <a:xfrm>
-            <a:off x="406301" y="870942"/>
-            <a:ext cx="8498026" cy="853083"/>
+            <a:off x="634901" y="883593"/>
+            <a:ext cx="8102798" cy="281880"/>
           </a:xfrm>
           <a:prstGeom prst="rect">
             <a:avLst/>
@@ -5184,13 +6675,31 @@
           <a:bodyPr wrap="square" lIns="0" tIns="0" rIns="0" bIns="0" rtlCol="0" anchor="t"/>
           <a:lstStyle/>
           <a:p>
-            <a:pPr algn="l" indent="0" marL="0">
-              <a:lnSpc>
-                <a:spcPts val="1680"/>
-              </a:lnSpc>
-              <a:spcBef>
-                <a:spcPts val="300"/>
-              </a:spcBef>
+            <a:pPr algn="l" marL="342900" indent="-342900">
+              <a:lnSpc>
+                <a:spcPts val="1620"/>
+              </a:lnSpc>
+              <a:spcAft>
+                <a:spcPts val="300"/>
+              </a:spcAft>
+              <a:buSzPct val="100000"/>
+              <a:buChar char="•"/>
+            </a:pPr>
+            <a:r>
+              <a:rPr lang="en-US" sz="1200" b="1" dirty="0">
+                <a:solidFill>
+                  <a:srgbClr val="1C2833"/>
+                </a:solidFill>
+                <a:latin typeface="Arial" pitchFamily="34" charset="0"/>
+                <a:ea typeface="Arial" pitchFamily="34" charset="-122"/>
+                <a:cs typeface="Arial" pitchFamily="34" charset="-120"/>
+              </a:rPr>
+              <a:t>Why documentation matters</a:t>
+            </a:r>
+            <a:pPr algn="l" indent="0" marL="0">
+              <a:lnSpc>
+                <a:spcPts val="1620"/>
+              </a:lnSpc>
               <a:spcAft>
                 <a:spcPts val="300"/>
               </a:spcAft>
@@ -5205,15 +6714,82 @@
                 <a:ea typeface="Arial" pitchFamily="34" charset="-122"/>
                 <a:cs typeface="Arial" pitchFamily="34" charset="-120"/>
               </a:rPr>
-              <a:t>– Silent writing. 25 minutes. – Students may consult their journal, citation slips, and artefact constantly. – At the 15-minute mark, the teacher prompts: </a:t>
-            </a:r>
-            <a:pPr algn="l" indent="0" marL="0">
-              <a:lnSpc>
-                <a:spcPts val="1680"/>
-              </a:lnSpc>
-              <a:spcBef>
-                <a:spcPts val="300"/>
-              </a:spcBef>
+              <a:t> (3 min). Three reasons:</a:t>
+            </a:r>
+            <a:endParaRPr lang="en-US" sz="1200" dirty="0"/>
+          </a:p>
+        </p:txBody>
+      </p:sp>
+      <p:sp>
+        <p:nvSpPr>
+          <p:cNvPr id="5" name="Text 3"/>
+          <p:cNvSpPr/>
+          <p:nvPr/>
+        </p:nvSpPr>
+        <p:spPr>
+          <a:xfrm>
+            <a:off x="634901" y="1266974"/>
+            <a:ext cx="8102798" cy="769441"/>
+          </a:xfrm>
+          <a:prstGeom prst="rect">
+            <a:avLst/>
+          </a:prstGeom>
+          <a:noFill/>
+          <a:ln/>
+        </p:spPr>
+        <p:txBody>
+          <a:bodyPr wrap="square" lIns="0" tIns="0" rIns="0" bIns="0" rtlCol="0" anchor="t"/>
+          <a:lstStyle/>
+          <a:p>
+            <a:pPr algn="l" marL="342900" indent="-342900">
+              <a:lnSpc>
+                <a:spcPts val="1620"/>
+              </a:lnSpc>
+              <a:spcAft>
+                <a:spcPts val="300"/>
+              </a:spcAft>
+              <a:buSzPct val="100000"/>
+              <a:buChar char="•"/>
+            </a:pPr>
+            <a:r>
+              <a:rPr lang="en-US" sz="1200" dirty="0">
+                <a:solidFill>
+                  <a:srgbClr val="1C2833"/>
+                </a:solidFill>
+                <a:latin typeface="Arial" pitchFamily="34" charset="0"/>
+                <a:ea typeface="Arial" pitchFamily="34" charset="-122"/>
+                <a:cs typeface="Arial" pitchFamily="34" charset="-120"/>
+              </a:rPr>
+              <a:t>It's the part the audience can read AFTER your 4-minute share. It outlives the presentation.</a:t>
+            </a:r>
+            <a:endParaRPr lang="en-US" sz="1200" dirty="0"/>
+          </a:p>
+          <a:p>
+            <a:pPr algn="l" marL="342900" indent="-342900">
+              <a:lnSpc>
+                <a:spcPts val="1620"/>
+              </a:lnSpc>
+              <a:spcAft>
+                <a:spcPts val="300"/>
+              </a:spcAft>
+              <a:buSzPct val="100000"/>
+              <a:buChar char="•"/>
+            </a:pPr>
+            <a:r>
+              <a:rPr lang="en-US" sz="1200" dirty="0">
+                <a:solidFill>
+                  <a:srgbClr val="1C2833"/>
+                </a:solidFill>
+                <a:latin typeface="Arial" pitchFamily="34" charset="0"/>
+                <a:ea typeface="Arial" pitchFamily="34" charset="-122"/>
+                <a:cs typeface="Arial" pitchFamily="34" charset="-120"/>
+              </a:rPr>
+              <a:t>It's the record of </a:t>
+            </a:r>
+            <a:pPr algn="l" indent="0" marL="0">
+              <a:lnSpc>
+                <a:spcPts val="1620"/>
+              </a:lnSpc>
               <a:spcAft>
                 <a:spcPts val="300"/>
               </a:spcAft>
@@ -5228,15 +6804,12 @@
                 <a:ea typeface="Arial" pitchFamily="34" charset="-122"/>
                 <a:cs typeface="Arial" pitchFamily="34" charset="-120"/>
               </a:rPr>
-              <a:t>"You should be on Section 3 or later by now. If you're still on Section 1, condense — each section is at most one paragraph."</a:t>
-            </a:r>
-            <a:pPr algn="l" indent="0" marL="0">
-              <a:lnSpc>
-                <a:spcPts val="1680"/>
-              </a:lnSpc>
-              <a:spcBef>
-                <a:spcPts val="300"/>
-              </a:spcBef>
+              <a:t>thinking</a:t>
+            </a:r>
+            <a:pPr algn="l" indent="0" marL="0">
+              <a:lnSpc>
+                <a:spcPts val="1620"/>
+              </a:lnSpc>
               <a:spcAft>
                 <a:spcPts val="300"/>
               </a:spcAft>
@@ -5251,15 +6824,12 @@
                 <a:ea typeface="Arial" pitchFamily="34" charset="-122"/>
                 <a:cs typeface="Arial" pitchFamily="34" charset="-120"/>
               </a:rPr>
-              <a:t> – At the 22-minute mark: </a:t>
-            </a:r>
-            <a:pPr algn="l" indent="0" marL="0">
-              <a:lnSpc>
-                <a:spcPts val="1680"/>
-              </a:lnSpc>
-              <a:spcBef>
-                <a:spcPts val="300"/>
-              </a:spcBef>
+              <a:t>, not just </a:t>
+            </a:r>
+            <a:pPr algn="l" indent="0" marL="0">
+              <a:lnSpc>
+                <a:spcPts val="1620"/>
+              </a:lnSpc>
               <a:spcAft>
                 <a:spcPts val="300"/>
               </a:spcAft>
@@ -5274,15 +6844,59 @@
                 <a:ea typeface="Arial" pitchFamily="34" charset="-122"/>
                 <a:cs typeface="Arial" pitchFamily="34" charset="-120"/>
               </a:rPr>
-              <a:t>"Three minutes left. Whatever you have is what you submit. Finish a sentence and stop."</a:t>
+              <a:t>result</a:t>
+            </a:r>
+            <a:pPr algn="l" indent="0" marL="0">
+              <a:lnSpc>
+                <a:spcPts val="1620"/>
+              </a:lnSpc>
+              <a:spcAft>
+                <a:spcPts val="300"/>
+              </a:spcAft>
+              <a:buNone/>
+            </a:pPr>
+            <a:r>
+              <a:rPr lang="en-US" sz="1200" dirty="0">
+                <a:solidFill>
+                  <a:srgbClr val="1C2833"/>
+                </a:solidFill>
+                <a:latin typeface="Arial" pitchFamily="34" charset="0"/>
+                <a:ea typeface="Arial" pitchFamily="34" charset="-122"/>
+                <a:cs typeface="Arial" pitchFamily="34" charset="-120"/>
+              </a:rPr>
+              <a:t>. Examiners can see your reasoning.</a:t>
             </a:r>
             <a:endParaRPr lang="en-US" sz="1200" dirty="0"/>
           </a:p>
-        </p:txBody>
-      </p:sp>
-      <p:sp>
-        <p:nvSpPr>
-          <p:cNvPr id="5" name="Text 3"/>
+          <a:p>
+            <a:pPr algn="l" marL="342900" indent="-342900">
+              <a:lnSpc>
+                <a:spcPts val="1620"/>
+              </a:lnSpc>
+              <a:spcAft>
+                <a:spcPts val="300"/>
+              </a:spcAft>
+              <a:buSzPct val="100000"/>
+              <a:buChar char="•"/>
+            </a:pPr>
+            <a:r>
+              <a:rPr lang="en-US" sz="1200" dirty="0">
+                <a:solidFill>
+                  <a:srgbClr val="1C2833"/>
+                </a:solidFill>
+                <a:latin typeface="Arial" pitchFamily="34" charset="0"/>
+                <a:ea typeface="Arial" pitchFamily="34" charset="-122"/>
+                <a:cs typeface="Arial" pitchFamily="34" charset="-120"/>
+              </a:rPr>
+              <a:t>It's how you learn from this project for the next one.</a:t>
+            </a:r>
+            <a:endParaRPr lang="en-US" sz="1200" dirty="0"/>
+          </a:p>
+        </p:txBody>
+      </p:sp>
+      <p:sp>
+        <p:nvSpPr>
+          <p:cNvPr id="6" name="Text 4"/>
           <p:cNvSpPr/>
           <p:nvPr/>
         </p:nvSpPr>
@@ -5432,7 +7046,7 @@
                 <a:ea typeface="Georgia" pitchFamily="34" charset="-122"/>
                 <a:cs typeface="Georgia" pitchFamily="34" charset="-120"/>
               </a:rPr>
-              <a:t>Wrap-up (5 min)</a:t>
+              <a:t>Core (10 min) (cont.)</a:t>
             </a:r>
             <a:endParaRPr lang="en-US" sz="1800" dirty="0"/>
           </a:p>
@@ -5446,8 +7060,8 @@
         </p:nvSpPr>
         <p:spPr>
           <a:xfrm>
-            <a:off x="406301" y="870942"/>
-            <a:ext cx="8498026" cy="426541"/>
+            <a:off x="634901" y="883593"/>
+            <a:ext cx="8102798" cy="281880"/>
           </a:xfrm>
           <a:prstGeom prst="rect">
             <a:avLst/>
@@ -5459,6 +7073,72 @@
           <a:bodyPr wrap="square" lIns="0" tIns="0" rIns="0" bIns="0" rtlCol="0" anchor="t"/>
           <a:lstStyle/>
           <a:p>
+            <a:pPr algn="l" marL="342900" indent="-342900">
+              <a:lnSpc>
+                <a:spcPts val="1620"/>
+              </a:lnSpc>
+              <a:spcAft>
+                <a:spcPts val="300"/>
+              </a:spcAft>
+              <a:buSzPct val="100000"/>
+              <a:buChar char="•"/>
+            </a:pPr>
+            <a:r>
+              <a:rPr lang="en-US" sz="1200" b="1" dirty="0">
+                <a:solidFill>
+                  <a:srgbClr val="1C2833"/>
+                </a:solidFill>
+                <a:latin typeface="Arial" pitchFamily="34" charset="0"/>
+                <a:ea typeface="Arial" pitchFamily="34" charset="-122"/>
+                <a:cs typeface="Arial" pitchFamily="34" charset="-120"/>
+              </a:rPr>
+              <a:t>The five sections</a:t>
+            </a:r>
+            <a:pPr algn="l" indent="0" marL="0">
+              <a:lnSpc>
+                <a:spcPts val="1620"/>
+              </a:lnSpc>
+              <a:spcAft>
+                <a:spcPts val="300"/>
+              </a:spcAft>
+              <a:buNone/>
+            </a:pPr>
+            <a:r>
+              <a:rPr lang="en-US" sz="1200" dirty="0">
+                <a:solidFill>
+                  <a:srgbClr val="1C2833"/>
+                </a:solidFill>
+                <a:latin typeface="Arial" pitchFamily="34" charset="0"/>
+                <a:ea typeface="Arial" pitchFamily="34" charset="-122"/>
+                <a:cs typeface="Arial" pitchFamily="34" charset="-120"/>
+              </a:rPr>
+              <a:t> (5 min). Walk through the template:</a:t>
+            </a:r>
+            <a:endParaRPr lang="en-US" sz="1200" dirty="0"/>
+          </a:p>
+        </p:txBody>
+      </p:sp>
+      <p:sp>
+        <p:nvSpPr>
+          <p:cNvPr id="5" name="Text 3"/>
+          <p:cNvSpPr/>
+          <p:nvPr/>
+        </p:nvSpPr>
+        <p:spPr>
+          <a:xfrm>
+            <a:off x="406301" y="1254323"/>
+            <a:ext cx="8498026" cy="213271"/>
+          </a:xfrm>
+          <a:prstGeom prst="rect">
+            <a:avLst/>
+          </a:prstGeom>
+          <a:noFill/>
+          <a:ln/>
+        </p:spPr>
+        <p:txBody>
+          <a:bodyPr wrap="square" lIns="0" tIns="0" rIns="0" bIns="0" rtlCol="0" anchor="t"/>
+          <a:lstStyle/>
+          <a:p>
             <a:pPr algn="l" indent="0" marL="0">
               <a:lnSpc>
                 <a:spcPts val="1680"/>
@@ -5472,29 +7152,6 @@
               <a:buNone/>
             </a:pPr>
             <a:r>
-              <a:rPr lang="en-US" sz="1200" dirty="0">
-                <a:solidFill>
-                  <a:srgbClr val="1C2833"/>
-                </a:solidFill>
-                <a:latin typeface="Arial" pitchFamily="34" charset="0"/>
-                <a:ea typeface="Arial" pitchFamily="34" charset="-122"/>
-                <a:cs typeface="Arial" pitchFamily="34" charset="-120"/>
-              </a:rPr>
-              <a:t>– Hand documentation into the in-tray. – Journal entry: "Writing this up made me realise ___ ." – Preview Day 9: </a:t>
-            </a:r>
-            <a:pPr algn="l" indent="0" marL="0">
-              <a:lnSpc>
-                <a:spcPts val="1680"/>
-              </a:lnSpc>
-              <a:spcBef>
-                <a:spcPts val="300"/>
-              </a:spcBef>
-              <a:spcAft>
-                <a:spcPts val="300"/>
-              </a:spcAft>
-              <a:buNone/>
-            </a:pPr>
-            <a:r>
               <a:rPr lang="en-US" sz="1200" i="1" dirty="0">
                 <a:solidFill>
                   <a:srgbClr val="1C2833"/>
@@ -5503,7 +7160,7 @@
                 <a:ea typeface="Arial" pitchFamily="34" charset="-122"/>
                 <a:cs typeface="Arial" pitchFamily="34" charset="-120"/>
               </a:rPr>
-              <a:t>"Tomorrow you rehearse your share. Bring the artefact and your documentation. You'll get one full run-through with peer feedback."</a:t>
+              <a:t>Each row: Section · Length · What goes here.</a:t>
             </a:r>
             <a:endParaRPr lang="en-US" sz="1200" dirty="0"/>
           </a:p>
@@ -5511,7 +7168,7 @@
       </p:sp>
       <p:sp>
         <p:nvSpPr>
-          <p:cNvPr id="5" name="Text 3"/>
+          <p:cNvPr id="6" name="Text 4"/>
           <p:cNvSpPr/>
           <p:nvPr/>
         </p:nvSpPr>
@@ -5661,7 +7318,7 @@
                 <a:ea typeface="Georgia" pitchFamily="34" charset="-122"/>
                 <a:cs typeface="Georgia" pitchFamily="34" charset="-120"/>
               </a:rPr>
-              <a:t>Student-facing content</a:t>
+              <a:t>Core (10 min) (cont.)</a:t>
             </a:r>
             <a:endParaRPr lang="en-US" sz="1800" dirty="0"/>
           </a:p>
@@ -5675,61 +7332,8 @@
         </p:nvSpPr>
         <p:spPr>
           <a:xfrm>
-            <a:off x="406301" y="883593"/>
-            <a:ext cx="8331398" cy="2343150"/>
-          </a:xfrm>
-          <a:prstGeom prst="rect">
-            <a:avLst/>
-          </a:prstGeom>
-          <a:solidFill>
-            <a:srgbClr val="F4F8F9"/>
-          </a:solidFill>
-          <a:ln/>
-        </p:spPr>
-        <p:txBody>
-          <a:bodyPr wrap="square" rtlCol="0" anchor="ctr"/>
-          <a:lstStyle/>
-          <a:p>
-            <a:pPr indent="0" marL="0">
-              <a:buNone/>
-            </a:pPr>
-            <a:endParaRPr lang="en-US" dirty="0"/>
-          </a:p>
-        </p:txBody>
-      </p:sp>
-      <p:sp>
-        <p:nvSpPr>
-          <p:cNvPr id="5" name="Shape 3"/>
-          <p:cNvSpPr/>
-          <p:nvPr/>
-        </p:nvSpPr>
-        <p:spPr>
-          <a:xfrm>
-            <a:off x="434876" y="883593"/>
-            <a:ext cx="0" cy="2343150"/>
-          </a:xfrm>
-          <a:prstGeom prst="line">
-            <a:avLst/>
-          </a:prstGeom>
-          <a:noFill/>
-          <a:ln w="57150">
-            <a:solidFill>
-              <a:srgbClr val="FE4447"/>
-            </a:solidFill>
-            <a:prstDash val="solid"/>
-          </a:ln>
-        </p:spPr>
-      </p:sp>
-      <p:sp>
-        <p:nvSpPr>
-          <p:cNvPr id="6" name="Text 4"/>
-          <p:cNvSpPr/>
-          <p:nvPr/>
-        </p:nvSpPr>
-        <p:spPr>
-          <a:xfrm>
-            <a:off x="692051" y="1074093"/>
-            <a:ext cx="7973389" cy="230981"/>
+            <a:off x="634901" y="883593"/>
+            <a:ext cx="8102798" cy="1257002"/>
           </a:xfrm>
           <a:prstGeom prst="rect">
             <a:avLst/>
@@ -5741,433 +7345,230 @@
           <a:bodyPr wrap="square" lIns="0" tIns="0" rIns="0" bIns="0" rtlCol="0" anchor="t"/>
           <a:lstStyle/>
           <a:p>
-            <a:pPr algn="l" indent="0" marL="0">
-              <a:lnSpc>
-                <a:spcPts val="1820"/>
-              </a:lnSpc>
-              <a:spcBef>
-                <a:spcPts val="300"/>
-              </a:spcBef>
-              <a:spcAft>
-                <a:spcPts val="300"/>
-              </a:spcAft>
-              <a:buNone/>
-            </a:pPr>
-            <a:r>
-              <a:rPr lang="en-US" sz="1300" b="1" i="1" dirty="0">
-                <a:solidFill>
-                  <a:srgbClr val="1C2833"/>
-                </a:solidFill>
-                <a:latin typeface="Georgia" pitchFamily="34" charset="0"/>
-                <a:ea typeface="Georgia" pitchFamily="34" charset="-122"/>
-                <a:cs typeface="Georgia" pitchFamily="34" charset="-120"/>
-              </a:rPr>
-              <a:t>Today you write the project up.</a:t>
-            </a:r>
-            <a:endParaRPr lang="en-US" sz="1300" dirty="0"/>
-          </a:p>
-        </p:txBody>
-      </p:sp>
-      <p:sp>
-        <p:nvSpPr>
-          <p:cNvPr id="7" name="Text 5"/>
-          <p:cNvSpPr/>
-          <p:nvPr/>
-        </p:nvSpPr>
-        <p:spPr>
-          <a:xfrm>
-            <a:off x="692051" y="1343174"/>
-            <a:ext cx="7973389" cy="230981"/>
-          </a:xfrm>
-          <a:prstGeom prst="rect">
-            <a:avLst/>
-          </a:prstGeom>
-          <a:noFill/>
-          <a:ln/>
-        </p:spPr>
-        <p:txBody>
-          <a:bodyPr wrap="square" lIns="0" tIns="0" rIns="0" bIns="0" rtlCol="0" anchor="t"/>
-          <a:lstStyle/>
-          <a:p>
-            <a:pPr algn="l" indent="0" marL="0">
-              <a:lnSpc>
-                <a:spcPts val="1820"/>
-              </a:lnSpc>
-              <a:spcBef>
-                <a:spcPts val="300"/>
-              </a:spcBef>
-              <a:spcAft>
-                <a:spcPts val="300"/>
-              </a:spcAft>
-              <a:buNone/>
-            </a:pPr>
-            <a:r>
-              <a:rPr lang="en-US" sz="1300" i="1" dirty="0">
-                <a:solidFill>
-                  <a:srgbClr val="1C2833"/>
-                </a:solidFill>
-                <a:latin typeface="Georgia" pitchFamily="34" charset="0"/>
-                <a:ea typeface="Georgia" pitchFamily="34" charset="-122"/>
-                <a:cs typeface="Georgia" pitchFamily="34" charset="-120"/>
-              </a:rPr>
-              <a:t>Five sections, one paragraph each (Section 3 can be bullets):</a:t>
-            </a:r>
-            <a:endParaRPr lang="en-US" sz="1300" dirty="0"/>
-          </a:p>
-        </p:txBody>
-      </p:sp>
-      <p:sp>
-        <p:nvSpPr>
-          <p:cNvPr id="8" name="Text 6"/>
-          <p:cNvSpPr/>
-          <p:nvPr/>
-        </p:nvSpPr>
-        <p:spPr>
-          <a:xfrm>
-            <a:off x="692051" y="1612255"/>
-            <a:ext cx="7973389" cy="923925"/>
-          </a:xfrm>
-          <a:prstGeom prst="rect">
-            <a:avLst/>
-          </a:prstGeom>
-          <a:noFill/>
-          <a:ln/>
-        </p:spPr>
-        <p:txBody>
-          <a:bodyPr wrap="square" lIns="0" tIns="0" rIns="0" bIns="0" rtlCol="0" anchor="t"/>
-          <a:lstStyle/>
-          <a:p>
-            <a:pPr algn="l" indent="0" marL="0">
-              <a:lnSpc>
-                <a:spcPts val="1820"/>
-              </a:lnSpc>
-              <a:spcBef>
-                <a:spcPts val="300"/>
-              </a:spcBef>
-              <a:spcAft>
-                <a:spcPts val="300"/>
-              </a:spcAft>
-              <a:buNone/>
-            </a:pPr>
-            <a:r>
-              <a:rPr lang="en-US" sz="1300" dirty="0">
-                <a:solidFill>
-                  <a:srgbClr val="1C2833"/>
-                </a:solidFill>
-                <a:latin typeface="Georgia" pitchFamily="34" charset="0"/>
-                <a:ea typeface="Georgia" pitchFamily="34" charset="-122"/>
-                <a:cs typeface="Georgia" pitchFamily="34" charset="-120"/>
-              </a:rPr>
-              <a:t>1. </a:t>
-            </a:r>
-            <a:pPr algn="l" indent="0" marL="0">
-              <a:lnSpc>
-                <a:spcPts val="1820"/>
-              </a:lnSpc>
-              <a:spcBef>
-                <a:spcPts val="300"/>
-              </a:spcBef>
-              <a:spcAft>
-                <a:spcPts val="300"/>
-              </a:spcAft>
-              <a:buNone/>
-            </a:pPr>
-            <a:r>
-              <a:rPr lang="en-US" sz="1300" b="1" i="1" dirty="0">
-                <a:solidFill>
-                  <a:srgbClr val="1C2833"/>
-                </a:solidFill>
-                <a:latin typeface="Georgia" pitchFamily="34" charset="0"/>
-                <a:ea typeface="Georgia" pitchFamily="34" charset="-122"/>
-                <a:cs typeface="Georgia" pitchFamily="34" charset="-120"/>
-              </a:rPr>
-              <a:t>The question.</a:t>
-            </a:r>
-            <a:pPr algn="l" indent="0" marL="0">
-              <a:lnSpc>
-                <a:spcPts val="1820"/>
-              </a:lnSpc>
-              <a:spcBef>
-                <a:spcPts val="300"/>
-              </a:spcBef>
-              <a:spcAft>
-                <a:spcPts val="300"/>
-              </a:spcAft>
-              <a:buNone/>
-            </a:pPr>
-            <a:r>
-              <a:rPr lang="en-US" sz="1300" dirty="0">
-                <a:solidFill>
-                  <a:srgbClr val="1C2833"/>
-                </a:solidFill>
-                <a:latin typeface="Georgia" pitchFamily="34" charset="0"/>
-                <a:ea typeface="Georgia" pitchFamily="34" charset="-122"/>
-                <a:cs typeface="Georgia" pitchFamily="34" charset="-120"/>
-              </a:rPr>
-              <a:t> What did you set out to find / make? Did the question change? 2. </a:t>
-            </a:r>
-            <a:pPr algn="l" indent="0" marL="0">
-              <a:lnSpc>
-                <a:spcPts val="1820"/>
-              </a:lnSpc>
-              <a:spcBef>
-                <a:spcPts val="300"/>
-              </a:spcBef>
-              <a:spcAft>
-                <a:spcPts val="300"/>
-              </a:spcAft>
-              <a:buNone/>
-            </a:pPr>
-            <a:r>
-              <a:rPr lang="en-US" sz="1300" b="1" i="1" dirty="0">
-                <a:solidFill>
-                  <a:srgbClr val="1C2833"/>
-                </a:solidFill>
-                <a:latin typeface="Georgia" pitchFamily="34" charset="0"/>
-                <a:ea typeface="Georgia" pitchFamily="34" charset="-122"/>
-                <a:cs typeface="Georgia" pitchFamily="34" charset="-120"/>
-              </a:rPr>
-              <a:t>The process.</a:t>
-            </a:r>
-            <a:pPr algn="l" indent="0" marL="0">
-              <a:lnSpc>
-                <a:spcPts val="1820"/>
-              </a:lnSpc>
-              <a:spcBef>
-                <a:spcPts val="300"/>
-              </a:spcBef>
-              <a:spcAft>
-                <a:spcPts val="300"/>
-              </a:spcAft>
-              <a:buNone/>
-            </a:pPr>
-            <a:r>
-              <a:rPr lang="en-US" sz="1300" dirty="0">
-                <a:solidFill>
-                  <a:srgbClr val="1C2833"/>
-                </a:solidFill>
-                <a:latin typeface="Georgia" pitchFamily="34" charset="0"/>
-                <a:ea typeface="Georgia" pitchFamily="34" charset="-122"/>
-                <a:cs typeface="Georgia" pitchFamily="34" charset="-120"/>
-              </a:rPr>
-              <a:t> What you did across Days 1–7, in order, as a short story. 3. </a:t>
-            </a:r>
-            <a:pPr algn="l" indent="0" marL="0">
-              <a:lnSpc>
-                <a:spcPts val="1820"/>
-              </a:lnSpc>
-              <a:spcBef>
-                <a:spcPts val="300"/>
-              </a:spcBef>
-              <a:spcAft>
-                <a:spcPts val="300"/>
-              </a:spcAft>
-              <a:buNone/>
-            </a:pPr>
-            <a:r>
-              <a:rPr lang="en-US" sz="1300" b="1" i="1" dirty="0">
-                <a:solidFill>
-                  <a:srgbClr val="1C2833"/>
-                </a:solidFill>
-                <a:latin typeface="Georgia" pitchFamily="34" charset="0"/>
-                <a:ea typeface="Georgia" pitchFamily="34" charset="-122"/>
-                <a:cs typeface="Georgia" pitchFamily="34" charset="-120"/>
-              </a:rPr>
-              <a:t>The sources.</a:t>
-            </a:r>
-            <a:pPr algn="l" indent="0" marL="0">
-              <a:lnSpc>
-                <a:spcPts val="1820"/>
-              </a:lnSpc>
-              <a:spcBef>
-                <a:spcPts val="300"/>
-              </a:spcBef>
-              <a:spcAft>
-                <a:spcPts val="300"/>
-              </a:spcAft>
-              <a:buNone/>
-            </a:pPr>
-            <a:r>
-              <a:rPr lang="en-US" sz="1300" dirty="0">
-                <a:solidFill>
-                  <a:srgbClr val="1C2833"/>
-                </a:solidFill>
-                <a:latin typeface="Georgia" pitchFamily="34" charset="0"/>
-                <a:ea typeface="Georgia" pitchFamily="34" charset="-122"/>
-                <a:cs typeface="Georgia" pitchFamily="34" charset="-120"/>
-              </a:rPr>
-              <a:t> Each source: identifier + what it contributed. 4. </a:t>
-            </a:r>
-            <a:pPr algn="l" indent="0" marL="0">
-              <a:lnSpc>
-                <a:spcPts val="1820"/>
-              </a:lnSpc>
-              <a:spcBef>
-                <a:spcPts val="300"/>
-              </a:spcBef>
-              <a:spcAft>
-                <a:spcPts val="300"/>
-              </a:spcAft>
-              <a:buNone/>
-            </a:pPr>
-            <a:r>
-              <a:rPr lang="en-US" sz="1300" b="1" i="1" dirty="0">
-                <a:solidFill>
-                  <a:srgbClr val="1C2833"/>
-                </a:solidFill>
-                <a:latin typeface="Georgia" pitchFamily="34" charset="0"/>
-                <a:ea typeface="Georgia" pitchFamily="34" charset="-122"/>
-                <a:cs typeface="Georgia" pitchFamily="34" charset="-120"/>
-              </a:rPr>
-              <a:t>The artefact.</a:t>
-            </a:r>
-            <a:pPr algn="l" indent="0" marL="0">
-              <a:lnSpc>
-                <a:spcPts val="1820"/>
-              </a:lnSpc>
-              <a:spcBef>
-                <a:spcPts val="300"/>
-              </a:spcBef>
-              <a:spcAft>
-                <a:spcPts val="300"/>
-              </a:spcAft>
-              <a:buNone/>
-            </a:pPr>
-            <a:r>
-              <a:rPr lang="en-US" sz="1300" dirty="0">
-                <a:solidFill>
-                  <a:srgbClr val="1C2833"/>
-                </a:solidFill>
-                <a:latin typeface="Georgia" pitchFamily="34" charset="0"/>
-                <a:ea typeface="Georgia" pitchFamily="34" charset="-122"/>
-                <a:cs typeface="Georgia" pitchFamily="34" charset="-120"/>
-              </a:rPr>
-              <a:t> What the final is, in plain words — its size, format, key features. 5. </a:t>
-            </a:r>
-            <a:pPr algn="l" indent="0" marL="0">
-              <a:lnSpc>
-                <a:spcPts val="1820"/>
-              </a:lnSpc>
-              <a:spcBef>
-                <a:spcPts val="300"/>
-              </a:spcBef>
-              <a:spcAft>
-                <a:spcPts val="300"/>
-              </a:spcAft>
-              <a:buNone/>
-            </a:pPr>
-            <a:r>
-              <a:rPr lang="en-US" sz="1300" b="1" i="1" dirty="0">
-                <a:solidFill>
-                  <a:srgbClr val="1C2833"/>
-                </a:solidFill>
-                <a:latin typeface="Georgia" pitchFamily="34" charset="0"/>
-                <a:ea typeface="Georgia" pitchFamily="34" charset="-122"/>
-                <a:cs typeface="Georgia" pitchFamily="34" charset="-120"/>
-              </a:rPr>
-              <a:t>The reflection.</a:t>
-            </a:r>
-            <a:pPr algn="l" indent="0" marL="0">
-              <a:lnSpc>
-                <a:spcPts val="1820"/>
-              </a:lnSpc>
-              <a:spcBef>
-                <a:spcPts val="300"/>
-              </a:spcBef>
-              <a:spcAft>
-                <a:spcPts val="300"/>
-              </a:spcAft>
-              <a:buNone/>
-            </a:pPr>
-            <a:r>
-              <a:rPr lang="en-US" sz="1300" dirty="0">
-                <a:solidFill>
-                  <a:srgbClr val="1C2833"/>
-                </a:solidFill>
-                <a:latin typeface="Georgia" pitchFamily="34" charset="0"/>
-                <a:ea typeface="Georgia" pitchFamily="34" charset="-122"/>
-                <a:cs typeface="Georgia" pitchFamily="34" charset="-120"/>
-              </a:rPr>
-              <a:t> What worked, what didn't, what you'd do with three more days.</a:t>
-            </a:r>
-            <a:endParaRPr lang="en-US" sz="1300" dirty="0"/>
-          </a:p>
-        </p:txBody>
-      </p:sp>
-      <p:sp>
-        <p:nvSpPr>
-          <p:cNvPr id="9" name="Text 7"/>
-          <p:cNvSpPr/>
-          <p:nvPr/>
-        </p:nvSpPr>
-        <p:spPr>
-          <a:xfrm>
-            <a:off x="692051" y="2574280"/>
-            <a:ext cx="7973389" cy="461963"/>
-          </a:xfrm>
-          <a:prstGeom prst="rect">
-            <a:avLst/>
-          </a:prstGeom>
-          <a:noFill/>
-          <a:ln/>
-        </p:spPr>
-        <p:txBody>
-          <a:bodyPr wrap="square" lIns="0" tIns="0" rIns="0" bIns="0" rtlCol="0" anchor="t"/>
-          <a:lstStyle/>
-          <a:p>
-            <a:pPr algn="l" indent="0" marL="0">
-              <a:lnSpc>
-                <a:spcPts val="1820"/>
-              </a:lnSpc>
-              <a:spcBef>
-                <a:spcPts val="300"/>
-              </a:spcBef>
-              <a:spcAft>
-                <a:spcPts val="300"/>
-              </a:spcAft>
-              <a:buNone/>
-            </a:pPr>
-            <a:r>
-              <a:rPr lang="en-US" sz="1300" b="1" i="1" dirty="0">
-                <a:solidFill>
-                  <a:srgbClr val="1C2833"/>
-                </a:solidFill>
-                <a:latin typeface="Georgia" pitchFamily="34" charset="0"/>
-                <a:ea typeface="Georgia" pitchFamily="34" charset="-122"/>
-                <a:cs typeface="Georgia" pitchFamily="34" charset="-120"/>
-              </a:rPr>
-              <a:t>The honesty rule:</a:t>
-            </a:r>
-            <a:pPr algn="l" indent="0" marL="0">
-              <a:lnSpc>
-                <a:spcPts val="1820"/>
-              </a:lnSpc>
-              <a:spcBef>
-                <a:spcPts val="300"/>
-              </a:spcBef>
-              <a:spcAft>
-                <a:spcPts val="300"/>
-              </a:spcAft>
-              <a:buNone/>
-            </a:pPr>
-            <a:r>
-              <a:rPr lang="en-US" sz="1300" dirty="0">
-                <a:solidFill>
-                  <a:srgbClr val="1C2833"/>
-                </a:solidFill>
-                <a:latin typeface="Georgia" pitchFamily="34" charset="0"/>
-                <a:ea typeface="Georgia" pitchFamily="34" charset="-122"/>
-                <a:cs typeface="Georgia" pitchFamily="34" charset="-120"/>
-              </a:rPr>
-              <a:t> Section 5 is graded for honesty. A reflection that says "everything went perfectly" loses marks. A reflection that names a specific thing that didn't work, and why, earns full marks.</a:t>
-            </a:r>
-            <a:endParaRPr lang="en-US" sz="1300" dirty="0"/>
-          </a:p>
-        </p:txBody>
-      </p:sp>
-      <p:sp>
-        <p:nvSpPr>
-          <p:cNvPr id="10" name="Text 8"/>
+            <a:pPr algn="l" marL="342900" indent="-342900">
+              <a:lnSpc>
+                <a:spcPts val="1620"/>
+              </a:lnSpc>
+              <a:spcAft>
+                <a:spcPts val="300"/>
+              </a:spcAft>
+              <a:buSzPct val="100000"/>
+              <a:buChar char="•"/>
+            </a:pPr>
+            <a:r>
+              <a:rPr lang="en-US" sz="1200" b="1" dirty="0">
+                <a:solidFill>
+                  <a:srgbClr val="1C2833"/>
+                </a:solidFill>
+                <a:latin typeface="Arial" pitchFamily="34" charset="0"/>
+                <a:ea typeface="Arial" pitchFamily="34" charset="-122"/>
+                <a:cs typeface="Arial" pitchFamily="34" charset="-120"/>
+              </a:rPr>
+              <a:t>1. The question</a:t>
+            </a:r>
+            <a:pPr algn="l" indent="0" marL="0">
+              <a:lnSpc>
+                <a:spcPts val="1620"/>
+              </a:lnSpc>
+              <a:spcAft>
+                <a:spcPts val="300"/>
+              </a:spcAft>
+              <a:buNone/>
+            </a:pPr>
+            <a:r>
+              <a:rPr lang="en-US" sz="1200" dirty="0">
+                <a:solidFill>
+                  <a:srgbClr val="1C2833"/>
+                </a:solidFill>
+                <a:latin typeface="Arial" pitchFamily="34" charset="0"/>
+                <a:ea typeface="Arial" pitchFamily="34" charset="-122"/>
+                <a:cs typeface="Arial" pitchFamily="34" charset="-120"/>
+              </a:rPr>
+              <a:t> — 1–2 sentences · The driving question you set on Day 2 (and how, if at all, it changed)</a:t>
+            </a:r>
+            <a:endParaRPr lang="en-US" sz="1200" dirty="0"/>
+          </a:p>
+          <a:p>
+            <a:pPr algn="l" marL="342900" indent="-342900">
+              <a:lnSpc>
+                <a:spcPts val="1620"/>
+              </a:lnSpc>
+              <a:spcAft>
+                <a:spcPts val="300"/>
+              </a:spcAft>
+              <a:buSzPct val="100000"/>
+              <a:buChar char="•"/>
+            </a:pPr>
+            <a:r>
+              <a:rPr lang="en-US" sz="1200" b="1" dirty="0">
+                <a:solidFill>
+                  <a:srgbClr val="1C2833"/>
+                </a:solidFill>
+                <a:latin typeface="Arial" pitchFamily="34" charset="0"/>
+                <a:ea typeface="Arial" pitchFamily="34" charset="-122"/>
+                <a:cs typeface="Arial" pitchFamily="34" charset="-120"/>
+              </a:rPr>
+              <a:t>2. The process</a:t>
+            </a:r>
+            <a:pPr algn="l" indent="0" marL="0">
+              <a:lnSpc>
+                <a:spcPts val="1620"/>
+              </a:lnSpc>
+              <a:spcAft>
+                <a:spcPts val="300"/>
+              </a:spcAft>
+              <a:buNone/>
+            </a:pPr>
+            <a:r>
+              <a:rPr lang="en-US" sz="1200" dirty="0">
+                <a:solidFill>
+                  <a:srgbClr val="1C2833"/>
+                </a:solidFill>
+                <a:latin typeface="Arial" pitchFamily="34" charset="0"/>
+                <a:ea typeface="Arial" pitchFamily="34" charset="-122"/>
+                <a:cs typeface="Arial" pitchFamily="34" charset="-120"/>
+              </a:rPr>
+              <a:t> — 1 paragraph · A short narrative of Days 1–7 — what you did, in order</a:t>
+            </a:r>
+            <a:endParaRPr lang="en-US" sz="1200" dirty="0"/>
+          </a:p>
+          <a:p>
+            <a:pPr algn="l" marL="342900" indent="-342900">
+              <a:lnSpc>
+                <a:spcPts val="1620"/>
+              </a:lnSpc>
+              <a:spcAft>
+                <a:spcPts val="300"/>
+              </a:spcAft>
+              <a:buSzPct val="100000"/>
+              <a:buChar char="•"/>
+            </a:pPr>
+            <a:r>
+              <a:rPr lang="en-US" sz="1200" b="1" dirty="0">
+                <a:solidFill>
+                  <a:srgbClr val="1C2833"/>
+                </a:solidFill>
+                <a:latin typeface="Arial" pitchFamily="34" charset="0"/>
+                <a:ea typeface="Arial" pitchFamily="34" charset="-122"/>
+                <a:cs typeface="Arial" pitchFamily="34" charset="-120"/>
+              </a:rPr>
+              <a:t>3. The sources</a:t>
+            </a:r>
+            <a:pPr algn="l" indent="0" marL="0">
+              <a:lnSpc>
+                <a:spcPts val="1620"/>
+              </a:lnSpc>
+              <a:spcAft>
+                <a:spcPts val="300"/>
+              </a:spcAft>
+              <a:buNone/>
+            </a:pPr>
+            <a:r>
+              <a:rPr lang="en-US" sz="1200" dirty="0">
+                <a:solidFill>
+                  <a:srgbClr val="1C2833"/>
+                </a:solidFill>
+                <a:latin typeface="Arial" pitchFamily="34" charset="0"/>
+                <a:ea typeface="Arial" pitchFamily="34" charset="-122"/>
+                <a:cs typeface="Arial" pitchFamily="34" charset="-120"/>
+              </a:rPr>
+              <a:t> — 3–5 bullets · Each source with its identifier, what it contributed</a:t>
+            </a:r>
+            <a:endParaRPr lang="en-US" sz="1200" dirty="0"/>
+          </a:p>
+          <a:p>
+            <a:pPr algn="l" marL="342900" indent="-342900">
+              <a:lnSpc>
+                <a:spcPts val="1620"/>
+              </a:lnSpc>
+              <a:spcAft>
+                <a:spcPts val="300"/>
+              </a:spcAft>
+              <a:buSzPct val="100000"/>
+              <a:buChar char="•"/>
+            </a:pPr>
+            <a:r>
+              <a:rPr lang="en-US" sz="1200" b="1" dirty="0">
+                <a:solidFill>
+                  <a:srgbClr val="1C2833"/>
+                </a:solidFill>
+                <a:latin typeface="Arial" pitchFamily="34" charset="0"/>
+                <a:ea typeface="Arial" pitchFamily="34" charset="-122"/>
+                <a:cs typeface="Arial" pitchFamily="34" charset="-120"/>
+              </a:rPr>
+              <a:t>4. The artefact</a:t>
+            </a:r>
+            <a:pPr algn="l" indent="0" marL="0">
+              <a:lnSpc>
+                <a:spcPts val="1620"/>
+              </a:lnSpc>
+              <a:spcAft>
+                <a:spcPts val="300"/>
+              </a:spcAft>
+              <a:buNone/>
+            </a:pPr>
+            <a:r>
+              <a:rPr lang="en-US" sz="1200" dirty="0">
+                <a:solidFill>
+                  <a:srgbClr val="1C2833"/>
+                </a:solidFill>
+                <a:latin typeface="Arial" pitchFamily="34" charset="0"/>
+                <a:ea typeface="Arial" pitchFamily="34" charset="-122"/>
+                <a:cs typeface="Arial" pitchFamily="34" charset="-120"/>
+              </a:rPr>
+              <a:t> — 1 paragraph · What the final artefact is, in plain language, including its dimensions / format</a:t>
+            </a:r>
+            <a:endParaRPr lang="en-US" sz="1200" dirty="0"/>
+          </a:p>
+          <a:p>
+            <a:pPr algn="l" marL="342900" indent="-342900">
+              <a:lnSpc>
+                <a:spcPts val="1620"/>
+              </a:lnSpc>
+              <a:spcAft>
+                <a:spcPts val="300"/>
+              </a:spcAft>
+              <a:buSzPct val="100000"/>
+              <a:buChar char="•"/>
+            </a:pPr>
+            <a:r>
+              <a:rPr lang="en-US" sz="1200" b="1" dirty="0">
+                <a:solidFill>
+                  <a:srgbClr val="1C2833"/>
+                </a:solidFill>
+                <a:latin typeface="Arial" pitchFamily="34" charset="0"/>
+                <a:ea typeface="Arial" pitchFamily="34" charset="-122"/>
+                <a:cs typeface="Arial" pitchFamily="34" charset="-120"/>
+              </a:rPr>
+              <a:t>5. The reflection</a:t>
+            </a:r>
+            <a:pPr algn="l" indent="0" marL="0">
+              <a:lnSpc>
+                <a:spcPts val="1620"/>
+              </a:lnSpc>
+              <a:spcAft>
+                <a:spcPts val="300"/>
+              </a:spcAft>
+              <a:buNone/>
+            </a:pPr>
+            <a:r>
+              <a:rPr lang="en-US" sz="1200" dirty="0">
+                <a:solidFill>
+                  <a:srgbClr val="1C2833"/>
+                </a:solidFill>
+                <a:latin typeface="Arial" pitchFamily="34" charset="0"/>
+                <a:ea typeface="Arial" pitchFamily="34" charset="-122"/>
+                <a:cs typeface="Arial" pitchFamily="34" charset="-120"/>
+              </a:rPr>
+              <a:t> — 1 paragraph · What worked, what didn't, what you'd do with three more days</a:t>
+            </a:r>
+            <a:endParaRPr lang="en-US" sz="1200" dirty="0"/>
+          </a:p>
+        </p:txBody>
+      </p:sp>
+      <p:sp>
+        <p:nvSpPr>
+          <p:cNvPr id="5" name="Text 3"/>
           <p:cNvSpPr/>
           <p:nvPr/>
         </p:nvSpPr>
@@ -6317,7 +7718,7 @@
                 <a:ea typeface="Georgia" pitchFamily="34" charset="-122"/>
                 <a:cs typeface="Georgia" pitchFamily="34" charset="-120"/>
               </a:rPr>
-              <a:t>Homework</a:t>
+              <a:t>Core (10 min) (cont.)</a:t>
             </a:r>
             <a:endParaRPr lang="en-US" sz="1800" dirty="0"/>
           </a:p>
@@ -6331,8 +7732,8 @@
         </p:nvSpPr>
         <p:spPr>
           <a:xfrm>
-            <a:off x="406301" y="870942"/>
-            <a:ext cx="8498026" cy="639812"/>
+            <a:off x="634901" y="883593"/>
+            <a:ext cx="8102798" cy="898922"/>
           </a:xfrm>
           <a:prstGeom prst="rect">
             <a:avLst/>
@@ -6344,13 +7745,31 @@
           <a:bodyPr wrap="square" lIns="0" tIns="0" rIns="0" bIns="0" rtlCol="0" anchor="t"/>
           <a:lstStyle/>
           <a:p>
-            <a:pPr algn="l" indent="0" marL="0">
-              <a:lnSpc>
-                <a:spcPts val="1680"/>
-              </a:lnSpc>
-              <a:spcBef>
-                <a:spcPts val="300"/>
-              </a:spcBef>
+            <a:pPr algn="l" marL="342900" indent="-342900">
+              <a:lnSpc>
+                <a:spcPts val="1620"/>
+              </a:lnSpc>
+              <a:spcAft>
+                <a:spcPts val="300"/>
+              </a:spcAft>
+              <a:buSzPct val="100000"/>
+              <a:buChar char="•"/>
+            </a:pPr>
+            <a:r>
+              <a:rPr lang="en-US" sz="1200" b="1" dirty="0">
+                <a:solidFill>
+                  <a:srgbClr val="1C2833"/>
+                </a:solidFill>
+                <a:latin typeface="Arial" pitchFamily="34" charset="0"/>
+                <a:ea typeface="Arial" pitchFamily="34" charset="-122"/>
+                <a:cs typeface="Arial" pitchFamily="34" charset="-120"/>
+              </a:rPr>
+              <a:t>The honesty rule</a:t>
+            </a:r>
+            <a:pPr algn="l" indent="0" marL="0">
+              <a:lnSpc>
+                <a:spcPts val="1620"/>
+              </a:lnSpc>
               <a:spcAft>
                 <a:spcPts val="300"/>
               </a:spcAft>
@@ -6365,15 +7784,52 @@
                 <a:ea typeface="Arial" pitchFamily="34" charset="-122"/>
                 <a:cs typeface="Arial" pitchFamily="34" charset="-120"/>
               </a:rPr>
-              <a:t>– Read your documentation aloud to a family member tonight. Ask: </a:t>
-            </a:r>
-            <a:pPr algn="l" indent="0" marL="0">
-              <a:lnSpc>
-                <a:spcPts val="1680"/>
-              </a:lnSpc>
-              <a:spcBef>
-                <a:spcPts val="300"/>
-              </a:spcBef>
+              <a:t> (2 min). The reflection section is </a:t>
+            </a:r>
+            <a:pPr algn="l" indent="0" marL="0">
+              <a:lnSpc>
+                <a:spcPts val="1620"/>
+              </a:lnSpc>
+              <a:spcAft>
+                <a:spcPts val="300"/>
+              </a:spcAft>
+              <a:buNone/>
+            </a:pPr>
+            <a:r>
+              <a:rPr lang="en-US" sz="1200" b="1" dirty="0">
+                <a:solidFill>
+                  <a:srgbClr val="1C2833"/>
+                </a:solidFill>
+                <a:latin typeface="Arial" pitchFamily="34" charset="0"/>
+                <a:ea typeface="Arial" pitchFamily="34" charset="-122"/>
+                <a:cs typeface="Arial" pitchFamily="34" charset="-120"/>
+              </a:rPr>
+              <a:t>graded for honesty</a:t>
+            </a:r>
+            <a:pPr algn="l" indent="0" marL="0">
+              <a:lnSpc>
+                <a:spcPts val="1620"/>
+              </a:lnSpc>
+              <a:spcAft>
+                <a:spcPts val="300"/>
+              </a:spcAft>
+              <a:buNone/>
+            </a:pPr>
+            <a:r>
+              <a:rPr lang="en-US" sz="1200" dirty="0">
+                <a:solidFill>
+                  <a:srgbClr val="1C2833"/>
+                </a:solidFill>
+                <a:latin typeface="Arial" pitchFamily="34" charset="0"/>
+                <a:ea typeface="Arial" pitchFamily="34" charset="-122"/>
+                <a:cs typeface="Arial" pitchFamily="34" charset="-120"/>
+              </a:rPr>
+              <a:t>, not for showing your project in the best light. A student who writes </a:t>
+            </a:r>
+            <a:pPr algn="l" indent="0" marL="0">
+              <a:lnSpc>
+                <a:spcPts val="1620"/>
+              </a:lnSpc>
               <a:spcAft>
                 <a:spcPts val="300"/>
               </a:spcAft>
@@ -6388,15 +7844,12 @@
                 <a:ea typeface="Arial" pitchFamily="34" charset="-122"/>
                 <a:cs typeface="Arial" pitchFamily="34" charset="-120"/>
               </a:rPr>
-              <a:t>"Does this make sense to someone who wasn't in the class?"</a:t>
-            </a:r>
-            <a:pPr algn="l" indent="0" marL="0">
-              <a:lnSpc>
-                <a:spcPts val="1680"/>
-              </a:lnSpc>
-              <a:spcBef>
-                <a:spcPts val="300"/>
-              </a:spcBef>
+              <a:t>"My calendar's first three days had wrong tithi values because I used the wrong reference; I corrected on Day 5; I'd start with a verified pañcāṅga next time"</a:t>
+            </a:r>
+            <a:pPr algn="l" indent="0" marL="0">
+              <a:lnSpc>
+                <a:spcPts val="1620"/>
+              </a:lnSpc>
               <a:spcAft>
                 <a:spcPts val="300"/>
               </a:spcAft>
@@ -6411,7 +7864,47 @@
                 <a:ea typeface="Arial" pitchFamily="34" charset="-122"/>
                 <a:cs typeface="Arial" pitchFamily="34" charset="-120"/>
               </a:rPr>
-              <a:t> Note the answer. – If anything didn't make sense, fix it before Day 9. – Bring documentation + artefact tomorrow for rehearsal.</a:t>
+              <a:t> gets full marks. A student who writes </a:t>
+            </a:r>
+            <a:pPr algn="l" indent="0" marL="0">
+              <a:lnSpc>
+                <a:spcPts val="1620"/>
+              </a:lnSpc>
+              <a:spcAft>
+                <a:spcPts val="300"/>
+              </a:spcAft>
+              <a:buNone/>
+            </a:pPr>
+            <a:r>
+              <a:rPr lang="en-US" sz="1200" i="1" dirty="0">
+                <a:solidFill>
+                  <a:srgbClr val="1C2833"/>
+                </a:solidFill>
+                <a:latin typeface="Arial" pitchFamily="34" charset="0"/>
+                <a:ea typeface="Arial" pitchFamily="34" charset="-122"/>
+                <a:cs typeface="Arial" pitchFamily="34" charset="-120"/>
+              </a:rPr>
+              <a:t>"Everything went perfectly"</a:t>
+            </a:r>
+            <a:pPr algn="l" indent="0" marL="0">
+              <a:lnSpc>
+                <a:spcPts val="1620"/>
+              </a:lnSpc>
+              <a:spcAft>
+                <a:spcPts val="300"/>
+              </a:spcAft>
+              <a:buNone/>
+            </a:pPr>
+            <a:r>
+              <a:rPr lang="en-US" sz="1200" dirty="0">
+                <a:solidFill>
+                  <a:srgbClr val="1C2833"/>
+                </a:solidFill>
+                <a:latin typeface="Arial" pitchFamily="34" charset="0"/>
+                <a:ea typeface="Arial" pitchFamily="34" charset="-122"/>
+                <a:cs typeface="Arial" pitchFamily="34" charset="-120"/>
+              </a:rPr>
+              <a:t> loses marks for vague self-praise.</a:t>
             </a:r>
             <a:endParaRPr lang="en-US" sz="1200" dirty="0"/>
           </a:p>
